--- a/literature/Final_Presentation/Final_Presentation.pptx
+++ b/literature/Final_Presentation/Final_Presentation.pptx
@@ -3695,7 +3695,7 @@
           <a:p>
             <a:fld id="{EBB1BE45-1CB7-4396-9169-B755BB6ADE02}" type="datetimeFigureOut">
               <a:rPr lang="en-IL" smtClean="0"/>
-              <a:t>1/15/26</a:t>
+              <a:t>1/16/26</a:t>
             </a:fld>
             <a:endParaRPr lang="en-IL"/>
           </a:p>
@@ -4025,13 +4025,7 @@
           <a:bodyPr/>
           <a:lstStyle/>
           <a:p>
-            <a:r>
-              <a:rPr lang="en-US" dirty="0"/>
-              <a:t>Hi everyone. We are Itay, Moran, and Shaked. Our project studies short-term stock prediction using historical prices and news sentiment. The key contribution is not a single accuracy number, but a rigorous, leakage-free evaluation pipeline and a systematic comparison of models and feature blocks in a very noisy domain.
-[Sources]
-- Final_Project_Report.pdf (project report generated from our notebook)
-[/Sources]</a:t>
-            </a:r>
+            <a:endParaRPr lang="en-US" dirty="0"/>
           </a:p>
         </p:txBody>
       </p:sp>
@@ -4462,7 +4456,7 @@
           <a:lstStyle/>
           <a:p>
             <a:pPr marL="0" algn="r" defTabSz="914400" rtl="1" eaLnBrk="1" latinLnBrk="0" hangingPunct="1"/>
-            <a:endParaRPr lang="he-IL"/>
+            <a:endParaRPr lang="he-IL" dirty="0"/>
           </a:p>
         </p:txBody>
       </p:sp>
@@ -5263,7 +5257,7 @@
           <a:p>
             <a:fld id="{F87F66E4-06DE-0B40-BCA4-D92B925EC948}" type="datetime13">
               <a:rPr lang="he-IL" smtClean="0"/>
-              <a:t>15/1/2026</a:t>
+              <a:t>16/1/2026</a:t>
             </a:fld>
             <a:endParaRPr lang="en-US"/>
           </a:p>
@@ -5434,7 +5428,7 @@
           <a:p>
             <a:fld id="{BE6DD2B9-D026-6142-837F-6E665A79104F}" type="datetime13">
               <a:rPr lang="he-IL" smtClean="0"/>
-              <a:t>15/1/2026</a:t>
+              <a:t>16/1/2026</a:t>
             </a:fld>
             <a:endParaRPr lang="en-US"/>
           </a:p>
@@ -5615,7 +5609,7 @@
           <a:p>
             <a:fld id="{CBDEDE16-B89B-4947-B45B-F5CDDF51DE33}" type="datetime13">
               <a:rPr lang="he-IL" smtClean="0"/>
-              <a:t>15/1/2026</a:t>
+              <a:t>16/1/2026</a:t>
             </a:fld>
             <a:endParaRPr lang="en-US"/>
           </a:p>
@@ -5821,7 +5815,7 @@
           <a:p>
             <a:fld id="{3F4F0310-300F-EA41-93E9-AF345995A55A}" type="datetime13">
               <a:rPr lang="he-IL" smtClean="0"/>
-              <a:t>15/1/2026</a:t>
+              <a:t>16/1/2026</a:t>
             </a:fld>
             <a:endParaRPr lang="en-US"/>
           </a:p>
@@ -6069,7 +6063,7 @@
           <a:p>
             <a:fld id="{EB702750-F344-EA49-A46F-381423429D01}" type="datetime13">
               <a:rPr lang="he-IL" smtClean="0"/>
-              <a:t>15/1/2026</a:t>
+              <a:t>16/1/2026</a:t>
             </a:fld>
             <a:endParaRPr lang="en-US"/>
           </a:p>
@@ -6357,7 +6351,7 @@
           <a:p>
             <a:fld id="{1357DBA8-90D0-AA42-9A42-ED7A3AEB6C51}" type="datetime13">
               <a:rPr lang="he-IL" smtClean="0"/>
-              <a:t>15/1/2026</a:t>
+              <a:t>16/1/2026</a:t>
             </a:fld>
             <a:endParaRPr lang="en-US"/>
           </a:p>
@@ -6779,7 +6773,7 @@
           <a:p>
             <a:fld id="{DB0F3303-2B75-724A-9960-61AFF1FB627A}" type="datetime13">
               <a:rPr lang="he-IL" smtClean="0"/>
-              <a:t>15/1/2026</a:t>
+              <a:t>16/1/2026</a:t>
             </a:fld>
             <a:endParaRPr lang="en-US"/>
           </a:p>
@@ -6899,7 +6893,7 @@
           <a:p>
             <a:fld id="{656D5A8D-213E-BE43-978A-A6A5A5743FF1}" type="datetime13">
               <a:rPr lang="he-IL" smtClean="0"/>
-              <a:t>15/1/2026</a:t>
+              <a:t>16/1/2026</a:t>
             </a:fld>
             <a:endParaRPr lang="en-US"/>
           </a:p>
@@ -7040,7 +7034,7 @@
             <a:fld id="{81A792BA-DE5A-904A-B48C-83C9489152F3}" type="datetime13">
               <a:rPr lang="he-IL" smtClean="0"/>
               <a:pPr/>
-              <a:t>15/1/2026</a:t>
+              <a:t>16/1/2026</a:t>
             </a:fld>
             <a:endParaRPr lang="en-US" dirty="0">
               <a:cs typeface="Calibri" panose="020F0502020204030204" pitchFamily="34" charset="0"/>
@@ -7677,7 +7671,7 @@
           <a:p>
             <a:fld id="{8D5D403C-09DB-3844-9712-8DBC90134995}" type="datetime13">
               <a:rPr lang="he-IL" smtClean="0"/>
-              <a:t>15/1/2026</a:t>
+              <a:t>16/1/2026</a:t>
             </a:fld>
             <a:endParaRPr lang="en-US"/>
           </a:p>
@@ -7932,7 +7926,7 @@
           <a:p>
             <a:fld id="{4D34B927-E40F-1F45-B303-502F6E359B11}" type="datetime13">
               <a:rPr lang="he-IL" smtClean="0"/>
-              <a:t>15/1/2026</a:t>
+              <a:t>16/1/2026</a:t>
             </a:fld>
             <a:endParaRPr lang="en-US"/>
           </a:p>
@@ -8146,7 +8140,7 @@
           <a:p>
             <a:fld id="{19800AD9-F236-2F43-BB94-EFEF07D6F6F7}" type="datetime13">
               <a:rPr lang="he-IL" smtClean="0"/>
-              <a:t>15/1/2026</a:t>
+              <a:t>16/1/2026</a:t>
             </a:fld>
             <a:endParaRPr lang="en-US"/>
           </a:p>
@@ -9187,7 +9181,7 @@
             <a:fld id="{81A792BA-DE5A-904A-B48C-83C9489152F3}" type="datetime13">
               <a:rPr lang="he-IL" smtClean="0"/>
               <a:pPr/>
-              <a:t>15/1/2026</a:t>
+              <a:t>16/1/2026</a:t>
             </a:fld>
             <a:endParaRPr lang="en-US" dirty="0">
               <a:cs typeface="Calibri" panose="020F0502020204030204" pitchFamily="34" charset="0"/>
@@ -11272,7 +11266,7 @@
             <a:fld id="{81A792BA-DE5A-904A-B48C-83C9489152F3}" type="datetime13">
               <a:rPr lang="he-IL" smtClean="0"/>
               <a:pPr/>
-              <a:t>15/1/2026</a:t>
+              <a:t>16/1/2026</a:t>
             </a:fld>
             <a:endParaRPr lang="en-US" dirty="0">
               <a:cs typeface="Calibri" panose="020F0502020204030204" pitchFamily="34" charset="0"/>
@@ -11769,7 +11763,7 @@
             <a:fld id="{81A792BA-DE5A-904A-B48C-83C9489152F3}" type="datetime13">
               <a:rPr lang="he-IL" smtClean="0"/>
               <a:pPr/>
-              <a:t>15/1/2026</a:t>
+              <a:t>16/1/2026</a:t>
             </a:fld>
             <a:endParaRPr lang="en-US" dirty="0">
               <a:cs typeface="Calibri" panose="020F0502020204030204" pitchFamily="34" charset="0"/>
@@ -13822,7 +13816,7 @@
             <a:fld id="{81A792BA-DE5A-904A-B48C-83C9489152F3}" type="datetime13">
               <a:rPr lang="he-IL" smtClean="0"/>
               <a:pPr/>
-              <a:t>15/1/2026</a:t>
+              <a:t>16/1/2026</a:t>
             </a:fld>
             <a:endParaRPr lang="en-US" dirty="0">
               <a:cs typeface="Calibri" panose="020F0502020204030204" pitchFamily="34" charset="0"/>
@@ -14017,7 +14011,7 @@
           <a:p>
             <a:fld id="{81A792BA-DE5A-904A-B48C-83C9489152F3}" type="datetime13">
               <a:rPr lang="he-IL" smtClean="0"/>
-              <a:t>15/1/2026</a:t>
+              <a:t>16/1/2026</a:t>
             </a:fld>
             <a:endParaRPr lang="en-US" dirty="0"/>
           </a:p>
@@ -14176,7 +14170,7 @@
             <a:fld id="{81A792BA-DE5A-904A-B48C-83C9489152F3}" type="datetime13">
               <a:rPr lang="he-IL" smtClean="0"/>
               <a:pPr/>
-              <a:t>15/1/2026</a:t>
+              <a:t>16/1/2026</a:t>
             </a:fld>
             <a:endParaRPr lang="en-US" dirty="0">
               <a:cs typeface="Calibri" panose="020F0502020204030204" pitchFamily="34" charset="0"/>
@@ -14811,7 +14805,7 @@
             <a:fld id="{81A792BA-DE5A-904A-B48C-83C9489152F3}" type="datetime13">
               <a:rPr lang="he-IL" smtClean="0"/>
               <a:pPr/>
-              <a:t>15/1/2026</a:t>
+              <a:t>16/1/2026</a:t>
             </a:fld>
             <a:endParaRPr lang="en-US" dirty="0">
               <a:cs typeface="Calibri" panose="020F0502020204030204" pitchFamily="34" charset="0"/>
@@ -15014,7 +15008,7 @@
             <a:fld id="{81A792BA-DE5A-904A-B48C-83C9489152F3}" type="datetime13">
               <a:rPr lang="he-IL" smtClean="0"/>
               <a:pPr/>
-              <a:t>15/1/2026</a:t>
+              <a:t>16/1/2026</a:t>
             </a:fld>
             <a:endParaRPr lang="en-US" dirty="0">
               <a:cs typeface="Calibri" panose="020F0502020204030204" pitchFamily="34" charset="0"/>
@@ -15650,7 +15644,7 @@
           <a:bodyPr/>
           <a:lstStyle/>
           <a:p>
-            <a:pPr algn="l" rtl="0"/>
+            <a:pPr marL="0" algn="r" defTabSz="914400" rtl="1" eaLnBrk="1" latinLnBrk="0" hangingPunct="1"/>
             <a:endParaRPr lang="he-IL"/>
           </a:p>
         </p:txBody>
@@ -15771,7 +15765,7 @@
             <a:fld id="{81A792BA-DE5A-904A-B48C-83C9489152F3}" type="datetime13">
               <a:rPr lang="he-IL" smtClean="0"/>
               <a:pPr/>
-              <a:t>15/1/2026</a:t>
+              <a:t>16/1/2026</a:t>
             </a:fld>
             <a:endParaRPr lang="en-US" dirty="0">
               <a:cs typeface="Calibri" panose="020F0502020204030204" pitchFamily="34" charset="0"/>
@@ -17749,7 +17743,7 @@
             <a:fld id="{81A792BA-DE5A-904A-B48C-83C9489152F3}" type="datetime13">
               <a:rPr lang="he-IL" smtClean="0"/>
               <a:pPr/>
-              <a:t>15/1/2026</a:t>
+              <a:t>16/1/2026</a:t>
             </a:fld>
             <a:endParaRPr lang="en-US" dirty="0">
               <a:cs typeface="Calibri" panose="020F0502020204030204" pitchFamily="34" charset="0"/>
@@ -18147,7 +18141,7 @@
             <a:fld id="{81A792BA-DE5A-904A-B48C-83C9489152F3}" type="datetime13">
               <a:rPr lang="he-IL" smtClean="0"/>
               <a:pPr/>
-              <a:t>15/1/2026</a:t>
+              <a:t>16/1/2026</a:t>
             </a:fld>
             <a:endParaRPr lang="en-US" dirty="0">
               <a:cs typeface="Calibri" panose="020F0502020204030204" pitchFamily="34" charset="0"/>
@@ -18326,7 +18320,7 @@
             <a:fld id="{81A792BA-DE5A-904A-B48C-83C9489152F3}" type="datetime13">
               <a:rPr lang="he-IL" smtClean="0"/>
               <a:pPr/>
-              <a:t>15/1/2026</a:t>
+              <a:t>16/1/2026</a:t>
             </a:fld>
             <a:endParaRPr lang="en-US" dirty="0">
               <a:cs typeface="Calibri" panose="020F0502020204030204" pitchFamily="34" charset="0"/>
@@ -19028,7 +19022,7 @@
             <a:fld id="{81A792BA-DE5A-904A-B48C-83C9489152F3}" type="datetime13">
               <a:rPr lang="he-IL" smtClean="0"/>
               <a:pPr/>
-              <a:t>15/1/2026</a:t>
+              <a:t>16/1/2026</a:t>
             </a:fld>
             <a:endParaRPr lang="en-US" dirty="0">
               <a:cs typeface="Calibri" panose="020F0502020204030204" pitchFamily="34" charset="0"/>
@@ -20309,7 +20303,7 @@
             <a:fld id="{81A792BA-DE5A-904A-B48C-83C9489152F3}" type="datetime13">
               <a:rPr lang="he-IL" smtClean="0"/>
               <a:pPr/>
-              <a:t>15/1/2026</a:t>
+              <a:t>16/1/2026</a:t>
             </a:fld>
             <a:endParaRPr lang="en-US" dirty="0">
               <a:cs typeface="Calibri" panose="020F0502020204030204" pitchFamily="34" charset="0"/>

--- a/literature/Final_Presentation/Final_Presentation.pptx
+++ b/literature/Final_Presentation/Final_Presentation.pptx
@@ -5,7 +5,7 @@
     <p:sldMasterId id="2147483660" r:id="rId1"/>
   </p:sldMasterIdLst>
   <p:notesMasterIdLst>
-    <p:notesMasterId r:id="rId17"/>
+    <p:notesMasterId r:id="rId19"/>
   </p:notesMasterIdLst>
   <p:sldIdLst>
     <p:sldId id="268" r:id="rId2"/>
@@ -13,16 +13,18 @@
     <p:sldId id="311" r:id="rId4"/>
     <p:sldId id="310" r:id="rId5"/>
     <p:sldId id="312" r:id="rId6"/>
-    <p:sldId id="313" r:id="rId7"/>
-    <p:sldId id="323" r:id="rId8"/>
-    <p:sldId id="321" r:id="rId9"/>
-    <p:sldId id="322" r:id="rId10"/>
-    <p:sldId id="324" r:id="rId11"/>
-    <p:sldId id="325" r:id="rId12"/>
-    <p:sldId id="326" r:id="rId13"/>
-    <p:sldId id="315" r:id="rId14"/>
-    <p:sldId id="306" r:id="rId15"/>
-    <p:sldId id="318" r:id="rId16"/>
+    <p:sldId id="328" r:id="rId7"/>
+    <p:sldId id="327" r:id="rId8"/>
+    <p:sldId id="313" r:id="rId9"/>
+    <p:sldId id="323" r:id="rId10"/>
+    <p:sldId id="321" r:id="rId11"/>
+    <p:sldId id="322" r:id="rId12"/>
+    <p:sldId id="324" r:id="rId13"/>
+    <p:sldId id="325" r:id="rId14"/>
+    <p:sldId id="326" r:id="rId15"/>
+    <p:sldId id="315" r:id="rId16"/>
+    <p:sldId id="306" r:id="rId17"/>
+    <p:sldId id="318" r:id="rId18"/>
   </p:sldIdLst>
   <p:sldSz cx="12192000" cy="6858000"/>
   <p:notesSz cx="6858000" cy="9144000"/>
@@ -1524,47 +1526,6 @@
         </a:p>
       </dgm:t>
     </dgm:pt>
-    <dgm:pt modelId="{B125A5F6-E8D7-D347-A484-1392140398F7}">
-      <dgm:prSet/>
-      <dgm:spPr/>
-      <dgm:t>
-        <a:bodyPr/>
-        <a:lstStyle/>
-        <a:p>
-          <a:pPr rtl="0">
-            <a:buNone/>
-          </a:pPr>
-          <a:r>
-            <a:rPr lang="en" b="0" i="0" dirty="0"/>
-            <a:t>Success Criteria</a:t>
-          </a:r>
-        </a:p>
-      </dgm:t>
-    </dgm:pt>
-    <dgm:pt modelId="{A42F5DCC-FF68-0A48-8A07-F36B08B08A81}" type="parTrans" cxnId="{3236FB96-7115-8C4B-B865-29B6EB2433C0}">
-      <dgm:prSet/>
-      <dgm:spPr/>
-      <dgm:t>
-        <a:bodyPr/>
-        <a:lstStyle/>
-        <a:p>
-          <a:pPr rtl="1"/>
-          <a:endParaRPr lang="he-IL"/>
-        </a:p>
-      </dgm:t>
-    </dgm:pt>
-    <dgm:pt modelId="{9DD7DA4B-F9F3-F445-803C-42EA7C5E0416}" type="sibTrans" cxnId="{3236FB96-7115-8C4B-B865-29B6EB2433C0}">
-      <dgm:prSet/>
-      <dgm:spPr/>
-      <dgm:t>
-        <a:bodyPr/>
-        <a:lstStyle/>
-        <a:p>
-          <a:pPr rtl="1"/>
-          <a:endParaRPr lang="he-IL"/>
-        </a:p>
-      </dgm:t>
-    </dgm:pt>
     <dgm:pt modelId="{D846E2CB-C070-3A4B-90AA-696447A48F86}" type="pres">
       <dgm:prSet presAssocID="{5C56AD31-8726-2D47-8EF2-E68FF98CBA3F}" presName="linear" presStyleCnt="0">
         <dgm:presLayoutVars>
@@ -1649,7 +1610,6 @@
     <dgm:cxn modelId="{AF3C000E-21B8-334C-A64B-620849F13BA1}" type="presOf" srcId="{8B35E9CB-9CC6-094E-AC51-F39526347D42}" destId="{49760C75-765E-4F41-8938-18FA0560BDAF}" srcOrd="0" destOrd="1" presId="urn:microsoft.com/office/officeart/2005/8/layout/vList2"/>
     <dgm:cxn modelId="{2C5E9E16-146D-4148-BD7D-E26F33F6C1E3}" srcId="{D505491F-5793-D847-8174-8D2C2514A554}" destId="{86EE90E8-41DB-484B-86A1-7A1CEA5587B2}" srcOrd="0" destOrd="0" parTransId="{EDFDE427-3A84-E849-A846-491DE66EC558}" sibTransId="{D6FED4F8-61FC-D146-9DA6-76F5740719F8}"/>
     <dgm:cxn modelId="{5CCE6422-E721-684B-ABB1-4636AE32C203}" type="presOf" srcId="{C762D7F4-8F39-5940-ADA8-6083405134E8}" destId="{2F690795-15E4-6C4E-97D0-34B2E957BA7B}" srcOrd="0" destOrd="0" presId="urn:microsoft.com/office/officeart/2005/8/layout/vList2"/>
-    <dgm:cxn modelId="{ED57C324-C94F-0842-80A4-46EE9A49C49C}" type="presOf" srcId="{B125A5F6-E8D7-D347-A484-1392140398F7}" destId="{2F690795-15E4-6C4E-97D0-34B2E957BA7B}" srcOrd="0" destOrd="2" presId="urn:microsoft.com/office/officeart/2005/8/layout/vList2"/>
     <dgm:cxn modelId="{BF10062C-6E39-AE41-B57F-309155983BDF}" type="presOf" srcId="{8671E508-6C85-304B-B584-0E17AA9CE83F}" destId="{1C731534-5575-EA44-96EA-8E7C0CC63BAC}" srcOrd="0" destOrd="0" presId="urn:microsoft.com/office/officeart/2005/8/layout/vList2"/>
     <dgm:cxn modelId="{61CAB32C-CBD7-8E42-B76E-9BFEBF84381C}" type="presOf" srcId="{35351E90-3069-9842-8F1B-959D92FA9C73}" destId="{1C731534-5575-EA44-96EA-8E7C0CC63BAC}" srcOrd="0" destOrd="1" presId="urn:microsoft.com/office/officeart/2005/8/layout/vList2"/>
     <dgm:cxn modelId="{2D177730-A08A-9247-893E-6273AF26E6F6}" srcId="{D505491F-5793-D847-8174-8D2C2514A554}" destId="{663C43A9-9BAB-4545-9E4E-99F803BC6B6F}" srcOrd="2" destOrd="0" parTransId="{BCDEFF8A-C39D-2A46-B660-2ABAD114DEC3}" sibTransId="{B6A59F2F-EB4E-364D-87FD-3F740271B218}"/>
@@ -1660,7 +1620,6 @@
     <dgm:cxn modelId="{B6B58387-5109-7D49-AF8E-32FD1D388AE4}" type="presOf" srcId="{663C43A9-9BAB-4545-9E4E-99F803BC6B6F}" destId="{49760C75-765E-4F41-8938-18FA0560BDAF}" srcOrd="0" destOrd="2" presId="urn:microsoft.com/office/officeart/2005/8/layout/vList2"/>
     <dgm:cxn modelId="{0422508A-2337-6B4D-8E97-1AC5D7C528B8}" type="presOf" srcId="{BF162617-F3C0-1041-BAC2-57411E459941}" destId="{2F690795-15E4-6C4E-97D0-34B2E957BA7B}" srcOrd="0" destOrd="1" presId="urn:microsoft.com/office/officeart/2005/8/layout/vList2"/>
     <dgm:cxn modelId="{DC306A94-2971-DC4D-8054-9D40D4903AAC}" srcId="{7055AE6A-8471-4B40-AF0D-981D38B7394D}" destId="{BF162617-F3C0-1041-BAC2-57411E459941}" srcOrd="1" destOrd="0" parTransId="{CE86E852-834F-5F4C-9A78-2A0B79941343}" sibTransId="{9747DB30-3085-A047-91F9-164FD5A30963}"/>
-    <dgm:cxn modelId="{3236FB96-7115-8C4B-B865-29B6EB2433C0}" srcId="{BF162617-F3C0-1041-BAC2-57411E459941}" destId="{B125A5F6-E8D7-D347-A484-1392140398F7}" srcOrd="0" destOrd="0" parTransId="{A42F5DCC-FF68-0A48-8A07-F36B08B08A81}" sibTransId="{9DD7DA4B-F9F3-F445-803C-42EA7C5E0416}"/>
     <dgm:cxn modelId="{50217F9E-28CF-1644-A94D-1E04669E66D7}" type="presOf" srcId="{AA814A63-0F5F-B845-957C-9E54C12119BC}" destId="{1C731534-5575-EA44-96EA-8E7C0CC63BAC}" srcOrd="0" destOrd="2" presId="urn:microsoft.com/office/officeart/2005/8/layout/vList2"/>
     <dgm:cxn modelId="{55AFC39F-A47C-C340-A110-5BD82EC8A13B}" srcId="{7055AE6A-8471-4B40-AF0D-981D38B7394D}" destId="{C762D7F4-8F39-5940-ADA8-6083405134E8}" srcOrd="0" destOrd="0" parTransId="{69B1478B-5950-1C47-8996-17EA4280CE8A}" sibTransId="{9E2DFE44-66DF-274A-8117-88959635DCEF}"/>
     <dgm:cxn modelId="{F0464FA1-91D3-2C4F-ADA7-76BF7EC0C910}" srcId="{E5CF41FF-16C5-C544-8609-7C3B24722160}" destId="{8671E508-6C85-304B-B584-0E17AA9CE83F}" srcOrd="0" destOrd="0" parTransId="{3BC38CB7-10FA-794A-BB2F-21A66C223285}" sibTransId="{7DA8BCAD-DAB9-D143-8650-F3E84D0FA517}"/>
@@ -1717,8 +1676,8 @@
       </dsp:nvSpPr>
       <dsp:spPr>
         <a:xfrm>
-          <a:off x="0" y="101473"/>
-          <a:ext cx="10540330" cy="431730"/>
+          <a:off x="0" y="83777"/>
+          <a:ext cx="10540330" cy="455715"/>
         </a:xfrm>
         <a:prstGeom prst="roundRect">
           <a:avLst/>
@@ -1759,12 +1718,12 @@
         </a:fontRef>
       </dsp:style>
       <dsp:txBody>
-        <a:bodyPr spcFirstLastPara="0" vert="horz" wrap="square" lIns="68580" tIns="68580" rIns="68580" bIns="68580" numCol="1" spcCol="1270" anchor="ctr" anchorCtr="0">
+        <a:bodyPr spcFirstLastPara="0" vert="horz" wrap="square" lIns="72390" tIns="72390" rIns="72390" bIns="72390" numCol="1" spcCol="1270" anchor="ctr" anchorCtr="0">
           <a:noAutofit/>
         </a:bodyPr>
         <a:lstStyle/>
         <a:p>
-          <a:pPr marL="0" lvl="0" indent="0" algn="l" defTabSz="800100" rtl="0">
+          <a:pPr marL="0" lvl="0" indent="0" algn="l" defTabSz="844550" rtl="0">
             <a:lnSpc>
               <a:spcPct val="90000"/>
             </a:lnSpc>
@@ -1777,14 +1736,14 @@
             <a:buNone/>
           </a:pPr>
           <a:r>
-            <a:rPr lang="en" sz="1800" b="0" i="0" kern="1200" dirty="0"/>
+            <a:rPr lang="en" sz="1900" b="0" i="0" kern="1200" dirty="0"/>
             <a:t>Reminder</a:t>
           </a:r>
         </a:p>
       </dsp:txBody>
       <dsp:txXfrm>
-        <a:off x="21075" y="122548"/>
-        <a:ext cx="10498180" cy="389580"/>
+        <a:off x="22246" y="106023"/>
+        <a:ext cx="10495838" cy="411223"/>
       </dsp:txXfrm>
     </dsp:sp>
     <dsp:sp modelId="{2F690795-15E4-6C4E-97D0-34B2E957BA7B}">
@@ -1794,8 +1753,8 @@
       </dsp:nvSpPr>
       <dsp:spPr>
         <a:xfrm>
-          <a:off x="0" y="533203"/>
-          <a:ext cx="10540330" cy="726570"/>
+          <a:off x="0" y="539492"/>
+          <a:ext cx="10540330" cy="521122"/>
         </a:xfrm>
         <a:prstGeom prst="rect">
           <a:avLst/>
@@ -1819,12 +1778,12 @@
         <a:fontRef idx="minor"/>
       </dsp:style>
       <dsp:txBody>
-        <a:bodyPr spcFirstLastPara="0" vert="horz" wrap="square" lIns="334655" tIns="22860" rIns="128016" bIns="22860" numCol="1" spcCol="1270" anchor="t" anchorCtr="0">
+        <a:bodyPr spcFirstLastPara="0" vert="horz" wrap="square" lIns="334655" tIns="24130" rIns="135128" bIns="24130" numCol="1" spcCol="1270" anchor="t" anchorCtr="0">
           <a:noAutofit/>
         </a:bodyPr>
         <a:lstStyle/>
         <a:p>
-          <a:pPr marL="114300" lvl="1" indent="-114300" algn="l" defTabSz="622300" rtl="0">
+          <a:pPr marL="114300" lvl="1" indent="-114300" algn="l" defTabSz="666750" rtl="0">
             <a:lnSpc>
               <a:spcPct val="90000"/>
             </a:lnSpc>
@@ -1837,17 +1796,17 @@
             <a:buNone/>
           </a:pPr>
           <a:r>
-            <a:rPr lang="en" sz="1400" b="0" i="0" kern="1200" dirty="0"/>
+            <a:rPr lang="en" sz="1500" b="0" i="0" kern="1200" dirty="0"/>
             <a:t>Project </a:t>
           </a:r>
           <a:r>
-            <a:rPr lang="en" sz="1400" b="0" i="0" kern="1200" dirty="0" err="1"/>
+            <a:rPr lang="en" sz="1500" b="0" i="0" kern="1200" dirty="0" err="1"/>
             <a:t>Rodemap</a:t>
           </a:r>
-          <a:endParaRPr lang="en" sz="1400" b="0" i="0" kern="1200" dirty="0"/>
+          <a:endParaRPr lang="en" sz="1500" b="0" i="0" kern="1200" dirty="0"/>
         </a:p>
         <a:p>
-          <a:pPr marL="114300" lvl="1" indent="-114300" algn="l" defTabSz="622300" rtl="0">
+          <a:pPr marL="114300" lvl="1" indent="-114300" algn="l" defTabSz="666750" rtl="0">
             <a:lnSpc>
               <a:spcPct val="90000"/>
             </a:lnSpc>
@@ -1860,32 +1819,14 @@
             <a:buNone/>
           </a:pPr>
           <a:r>
-            <a:rPr lang="en" sz="1400" b="0" i="0" kern="1200" dirty="0"/>
+            <a:rPr lang="en" sz="1500" b="0" i="0" kern="1200" dirty="0"/>
             <a:t>Benchmarks and Expectations</a:t>
-          </a:r>
-        </a:p>
-        <a:p>
-          <a:pPr marL="228600" lvl="2" indent="-114300" algn="l" defTabSz="622300" rtl="0">
-            <a:lnSpc>
-              <a:spcPct val="90000"/>
-            </a:lnSpc>
-            <a:spcBef>
-              <a:spcPct val="0"/>
-            </a:spcBef>
-            <a:spcAft>
-              <a:spcPct val="20000"/>
-            </a:spcAft>
-            <a:buNone/>
-          </a:pPr>
-          <a:r>
-            <a:rPr lang="en" sz="1400" b="0" i="0" kern="1200" dirty="0"/>
-            <a:t>Success Criteria</a:t>
           </a:r>
         </a:p>
       </dsp:txBody>
       <dsp:txXfrm>
-        <a:off x="0" y="533203"/>
-        <a:ext cx="10540330" cy="726570"/>
+        <a:off x="0" y="539492"/>
+        <a:ext cx="10540330" cy="521122"/>
       </dsp:txXfrm>
     </dsp:sp>
     <dsp:sp modelId="{D2581B42-5C9E-DF4F-B6EA-8C219719E7B5}">
@@ -1895,8 +1836,8 @@
       </dsp:nvSpPr>
       <dsp:spPr>
         <a:xfrm>
-          <a:off x="0" y="1259773"/>
-          <a:ext cx="10540330" cy="431730"/>
+          <a:off x="0" y="1060614"/>
+          <a:ext cx="10540330" cy="455715"/>
         </a:xfrm>
         <a:prstGeom prst="roundRect">
           <a:avLst/>
@@ -1937,12 +1878,12 @@
         </a:fontRef>
       </dsp:style>
       <dsp:txBody>
-        <a:bodyPr spcFirstLastPara="0" vert="horz" wrap="square" lIns="68580" tIns="68580" rIns="68580" bIns="68580" numCol="1" spcCol="1270" anchor="ctr" anchorCtr="0">
+        <a:bodyPr spcFirstLastPara="0" vert="horz" wrap="square" lIns="72390" tIns="72390" rIns="72390" bIns="72390" numCol="1" spcCol="1270" anchor="ctr" anchorCtr="0">
           <a:noAutofit/>
         </a:bodyPr>
         <a:lstStyle/>
         <a:p>
-          <a:pPr marL="0" lvl="0" indent="0" algn="l" defTabSz="800100" rtl="0">
+          <a:pPr marL="0" lvl="0" indent="0" algn="l" defTabSz="844550" rtl="0">
             <a:lnSpc>
               <a:spcPct val="90000"/>
             </a:lnSpc>
@@ -1955,14 +1896,14 @@
             <a:buNone/>
           </a:pPr>
           <a:r>
-            <a:rPr lang="en" sz="1800" b="0" i="0" kern="1200" dirty="0"/>
+            <a:rPr lang="en" sz="1900" b="0" i="0" kern="1200" dirty="0"/>
             <a:t>Recent Progress And Main Challenges</a:t>
           </a:r>
         </a:p>
       </dsp:txBody>
       <dsp:txXfrm>
-        <a:off x="21075" y="1280848"/>
-        <a:ext cx="10498180" cy="389580"/>
+        <a:off x="22246" y="1082860"/>
+        <a:ext cx="10495838" cy="411223"/>
       </dsp:txXfrm>
     </dsp:sp>
     <dsp:sp modelId="{49760C75-765E-4F41-8938-18FA0560BDAF}">
@@ -1972,8 +1913,8 @@
       </dsp:nvSpPr>
       <dsp:spPr>
         <a:xfrm>
-          <a:off x="0" y="1691503"/>
-          <a:ext cx="10540330" cy="726570"/>
+          <a:off x="0" y="1516329"/>
+          <a:ext cx="10540330" cy="786599"/>
         </a:xfrm>
         <a:prstGeom prst="rect">
           <a:avLst/>
@@ -1997,12 +1938,12 @@
         <a:fontRef idx="minor"/>
       </dsp:style>
       <dsp:txBody>
-        <a:bodyPr spcFirstLastPara="0" vert="horz" wrap="square" lIns="334655" tIns="22860" rIns="128016" bIns="22860" numCol="1" spcCol="1270" anchor="t" anchorCtr="0">
+        <a:bodyPr spcFirstLastPara="0" vert="horz" wrap="square" lIns="334655" tIns="24130" rIns="135128" bIns="24130" numCol="1" spcCol="1270" anchor="t" anchorCtr="0">
           <a:noAutofit/>
         </a:bodyPr>
         <a:lstStyle/>
         <a:p>
-          <a:pPr marL="114300" lvl="1" indent="-114300" algn="l" defTabSz="622300" rtl="0">
+          <a:pPr marL="114300" lvl="1" indent="-114300" algn="l" defTabSz="666750" rtl="0">
             <a:lnSpc>
               <a:spcPct val="90000"/>
             </a:lnSpc>
@@ -2015,12 +1956,12 @@
             <a:buNone/>
           </a:pPr>
           <a:r>
-            <a:rPr lang="en" sz="1400" b="0" i="0" kern="1200" dirty="0"/>
+            <a:rPr lang="en" sz="1500" b="0" i="0" kern="1200" dirty="0"/>
             <a:t>Project Status - Finished Missions</a:t>
           </a:r>
         </a:p>
         <a:p>
-          <a:pPr marL="114300" lvl="1" indent="-114300" algn="l" defTabSz="622300" rtl="0">
+          <a:pPr marL="114300" lvl="1" indent="-114300" algn="l" defTabSz="666750" rtl="0">
             <a:lnSpc>
               <a:spcPct val="90000"/>
             </a:lnSpc>
@@ -2033,12 +1974,12 @@
             <a:buNone/>
           </a:pPr>
           <a:r>
-            <a:rPr lang="en" sz="1400" b="0" i="0" kern="1200" dirty="0"/>
+            <a:rPr lang="en" sz="1500" b="0" i="0" kern="1200" dirty="0"/>
             <a:t>Data &amp; feature engineering (block-based)</a:t>
           </a:r>
         </a:p>
         <a:p>
-          <a:pPr marL="114300" lvl="1" indent="-114300" algn="l" defTabSz="622300" rtl="0">
+          <a:pPr marL="114300" lvl="1" indent="-114300" algn="l" defTabSz="666750" rtl="0">
             <a:lnSpc>
               <a:spcPct val="90000"/>
             </a:lnSpc>
@@ -2051,14 +1992,14 @@
             <a:buNone/>
           </a:pPr>
           <a:r>
-            <a:rPr lang="en" sz="1400" b="0" i="0" kern="1200" dirty="0"/>
+            <a:rPr lang="en" sz="1500" b="0" i="0" kern="1200" dirty="0"/>
             <a:t>Evaluation: the “no cheating” zone (walk-forward)</a:t>
           </a:r>
         </a:p>
       </dsp:txBody>
       <dsp:txXfrm>
-        <a:off x="0" y="1691503"/>
-        <a:ext cx="10540330" cy="726570"/>
+        <a:off x="0" y="1516329"/>
+        <a:ext cx="10540330" cy="786599"/>
       </dsp:txXfrm>
     </dsp:sp>
     <dsp:sp modelId="{B74D8510-A130-3241-A1DB-1B409A4DA373}">
@@ -2068,8 +2009,8 @@
       </dsp:nvSpPr>
       <dsp:spPr>
         <a:xfrm>
-          <a:off x="0" y="2418073"/>
-          <a:ext cx="10540330" cy="431730"/>
+          <a:off x="0" y="2302929"/>
+          <a:ext cx="10540330" cy="455715"/>
         </a:xfrm>
         <a:prstGeom prst="roundRect">
           <a:avLst/>
@@ -2110,12 +2051,12 @@
         </a:fontRef>
       </dsp:style>
       <dsp:txBody>
-        <a:bodyPr spcFirstLastPara="0" vert="horz" wrap="square" lIns="68580" tIns="68580" rIns="68580" bIns="68580" numCol="1" spcCol="1270" anchor="ctr" anchorCtr="0">
+        <a:bodyPr spcFirstLastPara="0" vert="horz" wrap="square" lIns="72390" tIns="72390" rIns="72390" bIns="72390" numCol="1" spcCol="1270" anchor="ctr" anchorCtr="0">
           <a:noAutofit/>
         </a:bodyPr>
         <a:lstStyle/>
         <a:p>
-          <a:pPr marL="0" lvl="0" indent="0" algn="l" defTabSz="800100" rtl="0">
+          <a:pPr marL="0" lvl="0" indent="0" algn="l" defTabSz="844550" rtl="0">
             <a:lnSpc>
               <a:spcPct val="90000"/>
             </a:lnSpc>
@@ -2128,14 +2069,14 @@
             <a:buNone/>
           </a:pPr>
           <a:r>
-            <a:rPr lang="en" sz="1800" b="0" i="0" kern="1200" dirty="0"/>
+            <a:rPr lang="en" sz="1900" b="0" i="0" kern="1200" dirty="0"/>
             <a:t>Current Results</a:t>
           </a:r>
         </a:p>
       </dsp:txBody>
       <dsp:txXfrm>
-        <a:off x="21075" y="2439148"/>
-        <a:ext cx="10498180" cy="389580"/>
+        <a:off x="22246" y="2325175"/>
+        <a:ext cx="10495838" cy="411223"/>
       </dsp:txXfrm>
     </dsp:sp>
     <dsp:sp modelId="{1C731534-5575-EA44-96EA-8E7C0CC63BAC}">
@@ -2145,8 +2086,8 @@
       </dsp:nvSpPr>
       <dsp:spPr>
         <a:xfrm>
-          <a:off x="0" y="2849803"/>
-          <a:ext cx="10540330" cy="1229580"/>
+          <a:off x="0" y="2758644"/>
+          <a:ext cx="10540330" cy="1297889"/>
         </a:xfrm>
         <a:prstGeom prst="rect">
           <a:avLst/>
@@ -2170,12 +2111,12 @@
         <a:fontRef idx="minor"/>
       </dsp:style>
       <dsp:txBody>
-        <a:bodyPr spcFirstLastPara="0" vert="horz" wrap="square" lIns="334655" tIns="22860" rIns="128016" bIns="22860" numCol="1" spcCol="1270" anchor="t" anchorCtr="0">
+        <a:bodyPr spcFirstLastPara="0" vert="horz" wrap="square" lIns="334655" tIns="24130" rIns="135128" bIns="24130" numCol="1" spcCol="1270" anchor="t" anchorCtr="0">
           <a:noAutofit/>
         </a:bodyPr>
         <a:lstStyle/>
         <a:p>
-          <a:pPr marL="114300" lvl="1" indent="-114300" algn="l" defTabSz="622300" rtl="0">
+          <a:pPr marL="114300" lvl="1" indent="-114300" algn="l" defTabSz="666750" rtl="0">
             <a:lnSpc>
               <a:spcPct val="90000"/>
             </a:lnSpc>
@@ -2188,13 +2129,13 @@
             <a:buNone/>
           </a:pPr>
           <a:r>
-            <a:rPr lang="en" sz="1400" b="0" i="0" kern="1200"/>
+            <a:rPr lang="en" sz="1500" b="0" i="0" kern="1200"/>
             <a:t>Tasks &amp; metrics (ML + finance-aware)</a:t>
           </a:r>
-          <a:endParaRPr lang="en" sz="1400" b="0" i="0" kern="1200" dirty="0"/>
+          <a:endParaRPr lang="en" sz="1500" b="0" i="0" kern="1200" dirty="0"/>
         </a:p>
         <a:p>
-          <a:pPr marL="114300" lvl="1" indent="-114300" algn="l" defTabSz="622300" rtl="0">
+          <a:pPr marL="114300" lvl="1" indent="-114300" algn="l" defTabSz="666750" rtl="0">
             <a:lnSpc>
               <a:spcPct val="90000"/>
             </a:lnSpc>
@@ -2207,12 +2148,12 @@
             <a:buNone/>
           </a:pPr>
           <a:r>
-            <a:rPr lang="en" sz="1400" b="0" i="0" kern="1200" dirty="0"/>
+            <a:rPr lang="en" sz="1500" b="0" i="0" kern="1200" dirty="0"/>
             <a:t>Phase 1: Regression (insight: noise dominates)</a:t>
           </a:r>
         </a:p>
         <a:p>
-          <a:pPr marL="114300" lvl="1" indent="-114300" algn="l" defTabSz="622300" rtl="0">
+          <a:pPr marL="114300" lvl="1" indent="-114300" algn="l" defTabSz="666750" rtl="0">
             <a:lnSpc>
               <a:spcPct val="90000"/>
             </a:lnSpc>
@@ -2225,12 +2166,12 @@
             <a:buNone/>
           </a:pPr>
           <a:r>
-            <a:rPr lang="en" sz="1400" b="0" i="0" kern="1200" dirty="0"/>
+            <a:rPr lang="en" sz="1500" b="0" i="0" kern="1200" dirty="0"/>
             <a:t>Phase 2: Pivot to direction classification</a:t>
           </a:r>
         </a:p>
         <a:p>
-          <a:pPr marL="114300" lvl="1" indent="-114300" algn="l" defTabSz="622300" rtl="0">
+          <a:pPr marL="114300" lvl="1" indent="-114300" algn="l" defTabSz="666750" rtl="0">
             <a:lnSpc>
               <a:spcPct val="90000"/>
             </a:lnSpc>
@@ -2243,12 +2184,12 @@
             <a:buNone/>
           </a:pPr>
           <a:r>
-            <a:rPr lang="en" sz="1400" b="0" i="0" kern="1200" dirty="0"/>
+            <a:rPr lang="en" sz="1500" b="0" i="0" kern="1200" dirty="0"/>
             <a:t>Classification results (binary direction) vs baselines</a:t>
           </a:r>
         </a:p>
         <a:p>
-          <a:pPr marL="114300" lvl="1" indent="-114300" algn="l" defTabSz="622300" rtl="0">
+          <a:pPr marL="114300" lvl="1" indent="-114300" algn="l" defTabSz="666750" rtl="0">
             <a:lnSpc>
               <a:spcPct val="90000"/>
             </a:lnSpc>
@@ -2261,14 +2202,14 @@
             <a:buNone/>
           </a:pPr>
           <a:r>
-            <a:rPr lang="en" sz="1400" b="0" i="0" kern="1200" dirty="0"/>
+            <a:rPr lang="en" sz="1500" b="0" i="0" kern="1200" dirty="0"/>
             <a:t>What improved: controlled comparisons via feature blocks</a:t>
           </a:r>
         </a:p>
       </dsp:txBody>
       <dsp:txXfrm>
-        <a:off x="0" y="2849803"/>
-        <a:ext cx="10540330" cy="1229580"/>
+        <a:off x="0" y="2758644"/>
+        <a:ext cx="10540330" cy="1297889"/>
       </dsp:txXfrm>
     </dsp:sp>
     <dsp:sp modelId="{FD1514AF-9F2D-494C-895E-53CE3968FFA4}">
@@ -2278,8 +2219,8 @@
       </dsp:nvSpPr>
       <dsp:spPr>
         <a:xfrm>
-          <a:off x="0" y="4079383"/>
-          <a:ext cx="10540330" cy="431730"/>
+          <a:off x="0" y="4056534"/>
+          <a:ext cx="10540330" cy="455715"/>
         </a:xfrm>
         <a:prstGeom prst="roundRect">
           <a:avLst/>
@@ -2320,12 +2261,12 @@
         </a:fontRef>
       </dsp:style>
       <dsp:txBody>
-        <a:bodyPr spcFirstLastPara="0" vert="horz" wrap="square" lIns="68580" tIns="68580" rIns="68580" bIns="68580" numCol="1" spcCol="1270" anchor="ctr" anchorCtr="0">
+        <a:bodyPr spcFirstLastPara="0" vert="horz" wrap="square" lIns="72390" tIns="72390" rIns="72390" bIns="72390" numCol="1" spcCol="1270" anchor="ctr" anchorCtr="0">
           <a:noAutofit/>
         </a:bodyPr>
         <a:lstStyle/>
         <a:p>
-          <a:pPr marL="0" lvl="0" indent="0" algn="l" defTabSz="800100" rtl="0">
+          <a:pPr marL="0" lvl="0" indent="0" algn="l" defTabSz="844550" rtl="0">
             <a:lnSpc>
               <a:spcPct val="90000"/>
             </a:lnSpc>
@@ -2338,14 +2279,14 @@
             <a:buNone/>
           </a:pPr>
           <a:r>
-            <a:rPr lang="en" sz="1800" b="0" i="0" kern="1200" dirty="0"/>
+            <a:rPr lang="en" sz="1900" b="0" i="0" kern="1200" dirty="0"/>
             <a:t>What’s Next </a:t>
           </a:r>
         </a:p>
       </dsp:txBody>
       <dsp:txXfrm>
-        <a:off x="21075" y="4100458"/>
-        <a:ext cx="10498180" cy="389580"/>
+        <a:off x="22246" y="4078780"/>
+        <a:ext cx="10495838" cy="411223"/>
       </dsp:txXfrm>
     </dsp:sp>
     <dsp:sp modelId="{EA186B5F-B9F8-B649-9488-0C29CB4C3F17}">
@@ -2355,8 +2296,8 @@
       </dsp:nvSpPr>
       <dsp:spPr>
         <a:xfrm>
-          <a:off x="0" y="4511113"/>
-          <a:ext cx="10540330" cy="298080"/>
+          <a:off x="0" y="4512249"/>
+          <a:ext cx="10540330" cy="314640"/>
         </a:xfrm>
         <a:prstGeom prst="rect">
           <a:avLst/>
@@ -2380,12 +2321,12 @@
         <a:fontRef idx="minor"/>
       </dsp:style>
       <dsp:txBody>
-        <a:bodyPr spcFirstLastPara="0" vert="horz" wrap="square" lIns="334655" tIns="22860" rIns="128016" bIns="22860" numCol="1" spcCol="1270" anchor="t" anchorCtr="0">
+        <a:bodyPr spcFirstLastPara="0" vert="horz" wrap="square" lIns="334655" tIns="24130" rIns="135128" bIns="24130" numCol="1" spcCol="1270" anchor="t" anchorCtr="0">
           <a:noAutofit/>
         </a:bodyPr>
         <a:lstStyle/>
         <a:p>
-          <a:pPr marL="114300" lvl="1" indent="-114300" algn="l" defTabSz="622300" rtl="0">
+          <a:pPr marL="114300" lvl="1" indent="-114300" algn="l" defTabSz="666750" rtl="0">
             <a:lnSpc>
               <a:spcPct val="90000"/>
             </a:lnSpc>
@@ -2398,14 +2339,14 @@
             <a:buNone/>
           </a:pPr>
           <a:r>
-            <a:rPr lang="en" sz="1400" b="0" i="0" kern="1200" dirty="0"/>
+            <a:rPr lang="en" sz="1500" b="0" i="0" kern="1200" dirty="0"/>
             <a:t>Conclusions &amp; next steps</a:t>
           </a:r>
         </a:p>
       </dsp:txBody>
       <dsp:txXfrm>
-        <a:off x="0" y="4511113"/>
-        <a:ext cx="10540330" cy="298080"/>
+        <a:off x="0" y="4512249"/>
+        <a:ext cx="10540330" cy="314640"/>
       </dsp:txXfrm>
     </dsp:sp>
   </dsp:spTree>
@@ -3695,7 +3636,7 @@
           <a:p>
             <a:fld id="{EBB1BE45-1CB7-4396-9169-B755BB6ADE02}" type="datetimeFigureOut">
               <a:rPr lang="en-IL" smtClean="0"/>
-              <a:t>1/16/26</a:t>
+              <a:t>1/17/26</a:t>
             </a:fld>
             <a:endParaRPr lang="en-IL"/>
           </a:p>
@@ -4076,7 +4017,13 @@
   <p:cSld>
     <p:spTree>
       <p:nvGrpSpPr>
-        <p:cNvPr id="1" name=""/>
+        <p:cNvPr id="1" name="">
+          <a:extLst>
+            <a:ext uri="{FF2B5EF4-FFF2-40B4-BE49-F238E27FC236}">
+              <a16:creationId xmlns:a16="http://schemas.microsoft.com/office/drawing/2014/main" id="{061FA2EE-C3C6-9213-2FB0-DE9CF5F5BFD5}"/>
+            </a:ext>
+          </a:extLst>
+        </p:cNvPr>
         <p:cNvGrpSpPr/>
         <p:nvPr/>
       </p:nvGrpSpPr>
@@ -4090,7 +4037,13 @@
       </p:grpSpPr>
       <p:sp>
         <p:nvSpPr>
-          <p:cNvPr id="2" name="מציין מיקום של תמונת שקופית 1"/>
+          <p:cNvPr id="2" name="מציין מיקום של תמונת שקופית 1">
+            <a:extLst>
+              <a:ext uri="{FF2B5EF4-FFF2-40B4-BE49-F238E27FC236}">
+                <a16:creationId xmlns:a16="http://schemas.microsoft.com/office/drawing/2014/main" id="{6C693CA4-BCB6-A788-F1B8-95D5354E7D6C}"/>
+              </a:ext>
+            </a:extLst>
+          </p:cNvPr>
           <p:cNvSpPr>
             <a:spLocks noGrp="1" noRot="1" noChangeAspect="1"/>
           </p:cNvSpPr>
@@ -4102,7 +4055,13 @@
       </p:sp>
       <p:sp>
         <p:nvSpPr>
-          <p:cNvPr id="3" name="מציין מיקום של הערות 2"/>
+          <p:cNvPr id="3" name="מציין מיקום של הערות 2">
+            <a:extLst>
+              <a:ext uri="{FF2B5EF4-FFF2-40B4-BE49-F238E27FC236}">
+                <a16:creationId xmlns:a16="http://schemas.microsoft.com/office/drawing/2014/main" id="{61953A54-B9EB-8518-8C5B-AC7C50BCB41B}"/>
+              </a:ext>
+            </a:extLst>
+          </p:cNvPr>
           <p:cNvSpPr>
             <a:spLocks noGrp="1"/>
           </p:cNvSpPr>
@@ -4122,7 +4081,13 @@
       </p:sp>
       <p:sp>
         <p:nvSpPr>
-          <p:cNvPr id="4" name="מציין מיקום של מספר שקופית 3"/>
+          <p:cNvPr id="4" name="מציין מיקום של מספר שקופית 3">
+            <a:extLst>
+              <a:ext uri="{FF2B5EF4-FFF2-40B4-BE49-F238E27FC236}">
+                <a16:creationId xmlns:a16="http://schemas.microsoft.com/office/drawing/2014/main" id="{A1522D12-6597-5898-53B7-BB2578132D83}"/>
+              </a:ext>
+            </a:extLst>
+          </p:cNvPr>
           <p:cNvSpPr>
             <a:spLocks noGrp="1"/>
           </p:cNvSpPr>
@@ -4137,7 +4102,7 @@
           <a:p>
             <a:fld id="{C7A60F00-D350-442A-BC31-6786C900FCCD}" type="slidenum">
               <a:rPr lang="en-IL" smtClean="0"/>
-              <a:t>13</a:t>
+              <a:t>10</a:t>
             </a:fld>
             <a:endParaRPr lang="en-IL"/>
           </a:p>
@@ -4146,7 +4111,7 @@
     </p:spTree>
     <p:extLst>
       <p:ext uri="{BB962C8B-B14F-4D97-AF65-F5344CB8AC3E}">
-        <p14:creationId xmlns:p14="http://schemas.microsoft.com/office/powerpoint/2010/main" val="119315347"/>
+        <p14:creationId xmlns:p14="http://schemas.microsoft.com/office/powerpoint/2010/main" val="4255690584"/>
       </p:ext>
     </p:extLst>
   </p:cSld>
@@ -4161,7 +4126,13 @@
   <p:cSld>
     <p:spTree>
       <p:nvGrpSpPr>
-        <p:cNvPr id="1" name=""/>
+        <p:cNvPr id="1" name="">
+          <a:extLst>
+            <a:ext uri="{FF2B5EF4-FFF2-40B4-BE49-F238E27FC236}">
+              <a16:creationId xmlns:a16="http://schemas.microsoft.com/office/drawing/2014/main" id="{33AB1333-49E8-5566-E6A3-FCD3DC81825D}"/>
+            </a:ext>
+          </a:extLst>
+        </p:cNvPr>
         <p:cNvGrpSpPr/>
         <p:nvPr/>
       </p:nvGrpSpPr>
@@ -4175,7 +4146,13 @@
       </p:grpSpPr>
       <p:sp>
         <p:nvSpPr>
-          <p:cNvPr id="2" name="מציין מיקום של תמונת שקופית 1"/>
+          <p:cNvPr id="2" name="מציין מיקום של תמונת שקופית 1">
+            <a:extLst>
+              <a:ext uri="{FF2B5EF4-FFF2-40B4-BE49-F238E27FC236}">
+                <a16:creationId xmlns:a16="http://schemas.microsoft.com/office/drawing/2014/main" id="{76ECFCCF-A914-F578-1AE6-026B3413C080}"/>
+              </a:ext>
+            </a:extLst>
+          </p:cNvPr>
           <p:cNvSpPr>
             <a:spLocks noGrp="1" noRot="1" noChangeAspect="1"/>
           </p:cNvSpPr>
@@ -4187,7 +4164,13 @@
       </p:sp>
       <p:sp>
         <p:nvSpPr>
-          <p:cNvPr id="3" name="מציין מיקום של הערות 2"/>
+          <p:cNvPr id="3" name="מציין מיקום של הערות 2">
+            <a:extLst>
+              <a:ext uri="{FF2B5EF4-FFF2-40B4-BE49-F238E27FC236}">
+                <a16:creationId xmlns:a16="http://schemas.microsoft.com/office/drawing/2014/main" id="{BE9287DB-7D83-3BC9-EC03-AD02518E0A92}"/>
+              </a:ext>
+            </a:extLst>
+          </p:cNvPr>
           <p:cNvSpPr>
             <a:spLocks noGrp="1"/>
           </p:cNvSpPr>
@@ -4207,7 +4190,13 @@
       </p:sp>
       <p:sp>
         <p:nvSpPr>
-          <p:cNvPr id="4" name="מציין מיקום של מספר שקופית 3"/>
+          <p:cNvPr id="4" name="מציין מיקום של מספר שקופית 3">
+            <a:extLst>
+              <a:ext uri="{FF2B5EF4-FFF2-40B4-BE49-F238E27FC236}">
+                <a16:creationId xmlns:a16="http://schemas.microsoft.com/office/drawing/2014/main" id="{CEE1BC61-B551-2FD1-A21D-D625992E9593}"/>
+              </a:ext>
+            </a:extLst>
+          </p:cNvPr>
           <p:cNvSpPr>
             <a:spLocks noGrp="1"/>
           </p:cNvSpPr>
@@ -4222,7 +4211,7 @@
           <a:p>
             <a:fld id="{C7A60F00-D350-442A-BC31-6786C900FCCD}" type="slidenum">
               <a:rPr lang="en-IL" smtClean="0"/>
-              <a:t>14</a:t>
+              <a:t>11</a:t>
             </a:fld>
             <a:endParaRPr lang="en-IL"/>
           </a:p>
@@ -4231,7 +4220,7 @@
     </p:spTree>
     <p:extLst>
       <p:ext uri="{BB962C8B-B14F-4D97-AF65-F5344CB8AC3E}">
-        <p14:creationId xmlns:p14="http://schemas.microsoft.com/office/powerpoint/2010/main" val="3825070016"/>
+        <p14:creationId xmlns:p14="http://schemas.microsoft.com/office/powerpoint/2010/main" val="1643536917"/>
       </p:ext>
     </p:extLst>
   </p:cSld>
@@ -4308,6 +4297,176 @@
             <a:fld id="{C7A60F00-D350-442A-BC31-6786C900FCCD}" type="slidenum">
               <a:rPr lang="en-IL" smtClean="0"/>
               <a:t>15</a:t>
+            </a:fld>
+            <a:endParaRPr lang="en-IL"/>
+          </a:p>
+        </p:txBody>
+      </p:sp>
+    </p:spTree>
+    <p:extLst>
+      <p:ext uri="{BB962C8B-B14F-4D97-AF65-F5344CB8AC3E}">
+        <p14:creationId xmlns:p14="http://schemas.microsoft.com/office/powerpoint/2010/main" val="119315347"/>
+      </p:ext>
+    </p:extLst>
+  </p:cSld>
+  <p:clrMapOvr>
+    <a:masterClrMapping/>
+  </p:clrMapOvr>
+</p:notes>
+</file>
+
+<file path=ppt/notesSlides/notesSlide13.xml><?xml version="1.0" encoding="utf-8"?>
+<p:notes xmlns:a="http://schemas.openxmlformats.org/drawingml/2006/main" xmlns:r="http://schemas.openxmlformats.org/officeDocument/2006/relationships" xmlns:p="http://schemas.openxmlformats.org/presentationml/2006/main">
+  <p:cSld>
+    <p:spTree>
+      <p:nvGrpSpPr>
+        <p:cNvPr id="1" name=""/>
+        <p:cNvGrpSpPr/>
+        <p:nvPr/>
+      </p:nvGrpSpPr>
+      <p:grpSpPr>
+        <a:xfrm>
+          <a:off x="0" y="0"/>
+          <a:ext cx="0" cy="0"/>
+          <a:chOff x="0" y="0"/>
+          <a:chExt cx="0" cy="0"/>
+        </a:xfrm>
+      </p:grpSpPr>
+      <p:sp>
+        <p:nvSpPr>
+          <p:cNvPr id="2" name="מציין מיקום של תמונת שקופית 1"/>
+          <p:cNvSpPr>
+            <a:spLocks noGrp="1" noRot="1" noChangeAspect="1"/>
+          </p:cNvSpPr>
+          <p:nvPr>
+            <p:ph type="sldImg"/>
+          </p:nvPr>
+        </p:nvSpPr>
+        <p:spPr/>
+      </p:sp>
+      <p:sp>
+        <p:nvSpPr>
+          <p:cNvPr id="3" name="מציין מיקום של הערות 2"/>
+          <p:cNvSpPr>
+            <a:spLocks noGrp="1"/>
+          </p:cNvSpPr>
+          <p:nvPr>
+            <p:ph type="body" idx="1"/>
+          </p:nvPr>
+        </p:nvSpPr>
+        <p:spPr/>
+        <p:txBody>
+          <a:bodyPr/>
+          <a:lstStyle/>
+          <a:p>
+            <a:pPr marL="0" algn="r" defTabSz="914400" rtl="1" eaLnBrk="1" latinLnBrk="0" hangingPunct="1"/>
+            <a:endParaRPr lang="he-IL"/>
+          </a:p>
+        </p:txBody>
+      </p:sp>
+      <p:sp>
+        <p:nvSpPr>
+          <p:cNvPr id="4" name="מציין מיקום של מספר שקופית 3"/>
+          <p:cNvSpPr>
+            <a:spLocks noGrp="1"/>
+          </p:cNvSpPr>
+          <p:nvPr>
+            <p:ph type="sldNum" sz="quarter" idx="5"/>
+          </p:nvPr>
+        </p:nvSpPr>
+        <p:spPr/>
+        <p:txBody>
+          <a:bodyPr/>
+          <a:lstStyle/>
+          <a:p>
+            <a:fld id="{C7A60F00-D350-442A-BC31-6786C900FCCD}" type="slidenum">
+              <a:rPr lang="en-IL" smtClean="0"/>
+              <a:t>16</a:t>
+            </a:fld>
+            <a:endParaRPr lang="en-IL"/>
+          </a:p>
+        </p:txBody>
+      </p:sp>
+    </p:spTree>
+    <p:extLst>
+      <p:ext uri="{BB962C8B-B14F-4D97-AF65-F5344CB8AC3E}">
+        <p14:creationId xmlns:p14="http://schemas.microsoft.com/office/powerpoint/2010/main" val="3825070016"/>
+      </p:ext>
+    </p:extLst>
+  </p:cSld>
+  <p:clrMapOvr>
+    <a:masterClrMapping/>
+  </p:clrMapOvr>
+</p:notes>
+</file>
+
+<file path=ppt/notesSlides/notesSlide14.xml><?xml version="1.0" encoding="utf-8"?>
+<p:notes xmlns:a="http://schemas.openxmlformats.org/drawingml/2006/main" xmlns:r="http://schemas.openxmlformats.org/officeDocument/2006/relationships" xmlns:p="http://schemas.openxmlformats.org/presentationml/2006/main">
+  <p:cSld>
+    <p:spTree>
+      <p:nvGrpSpPr>
+        <p:cNvPr id="1" name=""/>
+        <p:cNvGrpSpPr/>
+        <p:nvPr/>
+      </p:nvGrpSpPr>
+      <p:grpSpPr>
+        <a:xfrm>
+          <a:off x="0" y="0"/>
+          <a:ext cx="0" cy="0"/>
+          <a:chOff x="0" y="0"/>
+          <a:chExt cx="0" cy="0"/>
+        </a:xfrm>
+      </p:grpSpPr>
+      <p:sp>
+        <p:nvSpPr>
+          <p:cNvPr id="2" name="מציין מיקום של תמונת שקופית 1"/>
+          <p:cNvSpPr>
+            <a:spLocks noGrp="1" noRot="1" noChangeAspect="1"/>
+          </p:cNvSpPr>
+          <p:nvPr>
+            <p:ph type="sldImg"/>
+          </p:nvPr>
+        </p:nvSpPr>
+        <p:spPr/>
+      </p:sp>
+      <p:sp>
+        <p:nvSpPr>
+          <p:cNvPr id="3" name="מציין מיקום של הערות 2"/>
+          <p:cNvSpPr>
+            <a:spLocks noGrp="1"/>
+          </p:cNvSpPr>
+          <p:nvPr>
+            <p:ph type="body" idx="1"/>
+          </p:nvPr>
+        </p:nvSpPr>
+        <p:spPr/>
+        <p:txBody>
+          <a:bodyPr/>
+          <a:lstStyle/>
+          <a:p>
+            <a:pPr marL="0" algn="r" defTabSz="914400" rtl="1" eaLnBrk="1" latinLnBrk="0" hangingPunct="1"/>
+            <a:endParaRPr lang="he-IL"/>
+          </a:p>
+        </p:txBody>
+      </p:sp>
+      <p:sp>
+        <p:nvSpPr>
+          <p:cNvPr id="4" name="מציין מיקום של מספר שקופית 3"/>
+          <p:cNvSpPr>
+            <a:spLocks noGrp="1"/>
+          </p:cNvSpPr>
+          <p:nvPr>
+            <p:ph type="sldNum" sz="quarter" idx="5"/>
+          </p:nvPr>
+        </p:nvSpPr>
+        <p:spPr/>
+        <p:txBody>
+          <a:bodyPr/>
+          <a:lstStyle/>
+          <a:p>
+            <a:fld id="{C7A60F00-D350-442A-BC31-6786C900FCCD}" type="slidenum">
+              <a:rPr lang="en-IL" smtClean="0"/>
+              <a:t>17</a:t>
             </a:fld>
             <a:endParaRPr lang="en-IL"/>
           </a:p>
@@ -4671,6 +4830,224 @@
   <p:cSld>
     <p:spTree>
       <p:nvGrpSpPr>
+        <p:cNvPr id="1" name="">
+          <a:extLst>
+            <a:ext uri="{FF2B5EF4-FFF2-40B4-BE49-F238E27FC236}">
+              <a16:creationId xmlns:a16="http://schemas.microsoft.com/office/drawing/2014/main" id="{DFDB0AAF-BC8D-F45E-BA37-D7900E12CCB9}"/>
+            </a:ext>
+          </a:extLst>
+        </p:cNvPr>
+        <p:cNvGrpSpPr/>
+        <p:nvPr/>
+      </p:nvGrpSpPr>
+      <p:grpSpPr>
+        <a:xfrm>
+          <a:off x="0" y="0"/>
+          <a:ext cx="0" cy="0"/>
+          <a:chOff x="0" y="0"/>
+          <a:chExt cx="0" cy="0"/>
+        </a:xfrm>
+      </p:grpSpPr>
+      <p:sp>
+        <p:nvSpPr>
+          <p:cNvPr id="2" name="מציין מיקום של תמונת שקופית 1">
+            <a:extLst>
+              <a:ext uri="{FF2B5EF4-FFF2-40B4-BE49-F238E27FC236}">
+                <a16:creationId xmlns:a16="http://schemas.microsoft.com/office/drawing/2014/main" id="{F8B15C35-FC43-43E8-B7BE-50FA572F14E9}"/>
+              </a:ext>
+            </a:extLst>
+          </p:cNvPr>
+          <p:cNvSpPr>
+            <a:spLocks noGrp="1" noRot="1" noChangeAspect="1"/>
+          </p:cNvSpPr>
+          <p:nvPr>
+            <p:ph type="sldImg"/>
+          </p:nvPr>
+        </p:nvSpPr>
+        <p:spPr/>
+      </p:sp>
+      <p:sp>
+        <p:nvSpPr>
+          <p:cNvPr id="3" name="מציין מיקום של הערות 2">
+            <a:extLst>
+              <a:ext uri="{FF2B5EF4-FFF2-40B4-BE49-F238E27FC236}">
+                <a16:creationId xmlns:a16="http://schemas.microsoft.com/office/drawing/2014/main" id="{3EFE98AA-8BFD-B43C-D9E7-312BDDD09A02}"/>
+              </a:ext>
+            </a:extLst>
+          </p:cNvPr>
+          <p:cNvSpPr>
+            <a:spLocks noGrp="1"/>
+          </p:cNvSpPr>
+          <p:nvPr>
+            <p:ph type="body" idx="1"/>
+          </p:nvPr>
+        </p:nvSpPr>
+        <p:spPr/>
+        <p:txBody>
+          <a:bodyPr/>
+          <a:lstStyle/>
+          <a:p>
+            <a:pPr marL="0" algn="r" defTabSz="914400" rtl="1" eaLnBrk="1" latinLnBrk="0" hangingPunct="1"/>
+            <a:endParaRPr lang="he-IL"/>
+          </a:p>
+        </p:txBody>
+      </p:sp>
+      <p:sp>
+        <p:nvSpPr>
+          <p:cNvPr id="4" name="מציין מיקום של מספר שקופית 3">
+            <a:extLst>
+              <a:ext uri="{FF2B5EF4-FFF2-40B4-BE49-F238E27FC236}">
+                <a16:creationId xmlns:a16="http://schemas.microsoft.com/office/drawing/2014/main" id="{6FE53D87-99B1-85D9-C1AE-5F71695B0C1A}"/>
+              </a:ext>
+            </a:extLst>
+          </p:cNvPr>
+          <p:cNvSpPr>
+            <a:spLocks noGrp="1"/>
+          </p:cNvSpPr>
+          <p:nvPr>
+            <p:ph type="sldNum" sz="quarter" idx="5"/>
+          </p:nvPr>
+        </p:nvSpPr>
+        <p:spPr/>
+        <p:txBody>
+          <a:bodyPr/>
+          <a:lstStyle/>
+          <a:p>
+            <a:fld id="{C7A60F00-D350-442A-BC31-6786C900FCCD}" type="slidenum">
+              <a:rPr lang="en-IL" smtClean="0"/>
+              <a:t>6</a:t>
+            </a:fld>
+            <a:endParaRPr lang="en-IL"/>
+          </a:p>
+        </p:txBody>
+      </p:sp>
+    </p:spTree>
+    <p:extLst>
+      <p:ext uri="{BB962C8B-B14F-4D97-AF65-F5344CB8AC3E}">
+        <p14:creationId xmlns:p14="http://schemas.microsoft.com/office/powerpoint/2010/main" val="150261420"/>
+      </p:ext>
+    </p:extLst>
+  </p:cSld>
+  <p:clrMapOvr>
+    <a:masterClrMapping/>
+  </p:clrMapOvr>
+</p:notes>
+</file>
+
+<file path=ppt/notesSlides/notesSlide7.xml><?xml version="1.0" encoding="utf-8"?>
+<p:notes xmlns:a="http://schemas.openxmlformats.org/drawingml/2006/main" xmlns:r="http://schemas.openxmlformats.org/officeDocument/2006/relationships" xmlns:p="http://schemas.openxmlformats.org/presentationml/2006/main">
+  <p:cSld>
+    <p:spTree>
+      <p:nvGrpSpPr>
+        <p:cNvPr id="1" name="">
+          <a:extLst>
+            <a:ext uri="{FF2B5EF4-FFF2-40B4-BE49-F238E27FC236}">
+              <a16:creationId xmlns:a16="http://schemas.microsoft.com/office/drawing/2014/main" id="{8E2A5A3A-E61D-03DD-BDF3-9582D2EC5845}"/>
+            </a:ext>
+          </a:extLst>
+        </p:cNvPr>
+        <p:cNvGrpSpPr/>
+        <p:nvPr/>
+      </p:nvGrpSpPr>
+      <p:grpSpPr>
+        <a:xfrm>
+          <a:off x="0" y="0"/>
+          <a:ext cx="0" cy="0"/>
+          <a:chOff x="0" y="0"/>
+          <a:chExt cx="0" cy="0"/>
+        </a:xfrm>
+      </p:grpSpPr>
+      <p:sp>
+        <p:nvSpPr>
+          <p:cNvPr id="2" name="מציין מיקום של תמונת שקופית 1">
+            <a:extLst>
+              <a:ext uri="{FF2B5EF4-FFF2-40B4-BE49-F238E27FC236}">
+                <a16:creationId xmlns:a16="http://schemas.microsoft.com/office/drawing/2014/main" id="{7CBDC9C7-7657-ECF9-85F4-FEBD8764447F}"/>
+              </a:ext>
+            </a:extLst>
+          </p:cNvPr>
+          <p:cNvSpPr>
+            <a:spLocks noGrp="1" noRot="1" noChangeAspect="1"/>
+          </p:cNvSpPr>
+          <p:nvPr>
+            <p:ph type="sldImg"/>
+          </p:nvPr>
+        </p:nvSpPr>
+        <p:spPr/>
+      </p:sp>
+      <p:sp>
+        <p:nvSpPr>
+          <p:cNvPr id="3" name="מציין מיקום של הערות 2">
+            <a:extLst>
+              <a:ext uri="{FF2B5EF4-FFF2-40B4-BE49-F238E27FC236}">
+                <a16:creationId xmlns:a16="http://schemas.microsoft.com/office/drawing/2014/main" id="{30D18715-3490-B3B0-0BBF-9D3350A523B5}"/>
+              </a:ext>
+            </a:extLst>
+          </p:cNvPr>
+          <p:cNvSpPr>
+            <a:spLocks noGrp="1"/>
+          </p:cNvSpPr>
+          <p:nvPr>
+            <p:ph type="body" idx="1"/>
+          </p:nvPr>
+        </p:nvSpPr>
+        <p:spPr/>
+        <p:txBody>
+          <a:bodyPr/>
+          <a:lstStyle/>
+          <a:p>
+            <a:pPr marL="0" algn="r" defTabSz="914400" rtl="1" eaLnBrk="1" latinLnBrk="0" hangingPunct="1"/>
+            <a:endParaRPr lang="he-IL"/>
+          </a:p>
+        </p:txBody>
+      </p:sp>
+      <p:sp>
+        <p:nvSpPr>
+          <p:cNvPr id="4" name="מציין מיקום של מספר שקופית 3">
+            <a:extLst>
+              <a:ext uri="{FF2B5EF4-FFF2-40B4-BE49-F238E27FC236}">
+                <a16:creationId xmlns:a16="http://schemas.microsoft.com/office/drawing/2014/main" id="{9F9AB429-5236-4635-B3F3-EFBA10A5922D}"/>
+              </a:ext>
+            </a:extLst>
+          </p:cNvPr>
+          <p:cNvSpPr>
+            <a:spLocks noGrp="1"/>
+          </p:cNvSpPr>
+          <p:nvPr>
+            <p:ph type="sldNum" sz="quarter" idx="5"/>
+          </p:nvPr>
+        </p:nvSpPr>
+        <p:spPr/>
+        <p:txBody>
+          <a:bodyPr/>
+          <a:lstStyle/>
+          <a:p>
+            <a:fld id="{C7A60F00-D350-442A-BC31-6786C900FCCD}" type="slidenum">
+              <a:rPr lang="en-IL" smtClean="0"/>
+              <a:t>7</a:t>
+            </a:fld>
+            <a:endParaRPr lang="en-IL"/>
+          </a:p>
+        </p:txBody>
+      </p:sp>
+    </p:spTree>
+    <p:extLst>
+      <p:ext uri="{BB962C8B-B14F-4D97-AF65-F5344CB8AC3E}">
+        <p14:creationId xmlns:p14="http://schemas.microsoft.com/office/powerpoint/2010/main" val="492223603"/>
+      </p:ext>
+    </p:extLst>
+  </p:cSld>
+  <p:clrMapOvr>
+    <a:masterClrMapping/>
+  </p:clrMapOvr>
+</p:notes>
+</file>
+
+<file path=ppt/notesSlides/notesSlide8.xml><?xml version="1.0" encoding="utf-8"?>
+<p:notes xmlns:a="http://schemas.openxmlformats.org/drawingml/2006/main" xmlns:r="http://schemas.openxmlformats.org/officeDocument/2006/relationships" xmlns:p="http://schemas.openxmlformats.org/presentationml/2006/main">
+  <p:cSld>
+    <p:spTree>
+      <p:nvGrpSpPr>
         <p:cNvPr id="1" name=""/>
         <p:cNvGrpSpPr/>
         <p:nvPr/>
@@ -4732,7 +5109,7 @@
           <a:p>
             <a:fld id="{C7A60F00-D350-442A-BC31-6786C900FCCD}" type="slidenum">
               <a:rPr lang="en-IL" smtClean="0"/>
-              <a:t>6</a:t>
+              <a:t>8</a:t>
             </a:fld>
             <a:endParaRPr lang="en-IL"/>
           </a:p>
@@ -4751,7 +5128,7 @@
 </p:notes>
 </file>
 
-<file path=ppt/notesSlides/notesSlide7.xml><?xml version="1.0" encoding="utf-8"?>
+<file path=ppt/notesSlides/notesSlide9.xml><?xml version="1.0" encoding="utf-8"?>
 <p:notes xmlns:a="http://schemas.openxmlformats.org/drawingml/2006/main" xmlns:r="http://schemas.openxmlformats.org/officeDocument/2006/relationships" xmlns:p="http://schemas.openxmlformats.org/presentationml/2006/main">
   <p:cSld>
     <p:spTree>
@@ -4841,7 +5218,7 @@
           <a:p>
             <a:fld id="{C7A60F00-D350-442A-BC31-6786C900FCCD}" type="slidenum">
               <a:rPr lang="en-IL" smtClean="0"/>
-              <a:t>7</a:t>
+              <a:t>9</a:t>
             </a:fld>
             <a:endParaRPr lang="en-IL"/>
           </a:p>
@@ -4851,224 +5228,6 @@
     <p:extLst>
       <p:ext uri="{BB962C8B-B14F-4D97-AF65-F5344CB8AC3E}">
         <p14:creationId xmlns:p14="http://schemas.microsoft.com/office/powerpoint/2010/main" val="547937499"/>
-      </p:ext>
-    </p:extLst>
-  </p:cSld>
-  <p:clrMapOvr>
-    <a:masterClrMapping/>
-  </p:clrMapOvr>
-</p:notes>
-</file>
-
-<file path=ppt/notesSlides/notesSlide8.xml><?xml version="1.0" encoding="utf-8"?>
-<p:notes xmlns:a="http://schemas.openxmlformats.org/drawingml/2006/main" xmlns:r="http://schemas.openxmlformats.org/officeDocument/2006/relationships" xmlns:p="http://schemas.openxmlformats.org/presentationml/2006/main">
-  <p:cSld>
-    <p:spTree>
-      <p:nvGrpSpPr>
-        <p:cNvPr id="1" name="">
-          <a:extLst>
-            <a:ext uri="{FF2B5EF4-FFF2-40B4-BE49-F238E27FC236}">
-              <a16:creationId xmlns:a16="http://schemas.microsoft.com/office/drawing/2014/main" id="{061FA2EE-C3C6-9213-2FB0-DE9CF5F5BFD5}"/>
-            </a:ext>
-          </a:extLst>
-        </p:cNvPr>
-        <p:cNvGrpSpPr/>
-        <p:nvPr/>
-      </p:nvGrpSpPr>
-      <p:grpSpPr>
-        <a:xfrm>
-          <a:off x="0" y="0"/>
-          <a:ext cx="0" cy="0"/>
-          <a:chOff x="0" y="0"/>
-          <a:chExt cx="0" cy="0"/>
-        </a:xfrm>
-      </p:grpSpPr>
-      <p:sp>
-        <p:nvSpPr>
-          <p:cNvPr id="2" name="מציין מיקום של תמונת שקופית 1">
-            <a:extLst>
-              <a:ext uri="{FF2B5EF4-FFF2-40B4-BE49-F238E27FC236}">
-                <a16:creationId xmlns:a16="http://schemas.microsoft.com/office/drawing/2014/main" id="{6C693CA4-BCB6-A788-F1B8-95D5354E7D6C}"/>
-              </a:ext>
-            </a:extLst>
-          </p:cNvPr>
-          <p:cNvSpPr>
-            <a:spLocks noGrp="1" noRot="1" noChangeAspect="1"/>
-          </p:cNvSpPr>
-          <p:nvPr>
-            <p:ph type="sldImg"/>
-          </p:nvPr>
-        </p:nvSpPr>
-        <p:spPr/>
-      </p:sp>
-      <p:sp>
-        <p:nvSpPr>
-          <p:cNvPr id="3" name="מציין מיקום של הערות 2">
-            <a:extLst>
-              <a:ext uri="{FF2B5EF4-FFF2-40B4-BE49-F238E27FC236}">
-                <a16:creationId xmlns:a16="http://schemas.microsoft.com/office/drawing/2014/main" id="{61953A54-B9EB-8518-8C5B-AC7C50BCB41B}"/>
-              </a:ext>
-            </a:extLst>
-          </p:cNvPr>
-          <p:cNvSpPr>
-            <a:spLocks noGrp="1"/>
-          </p:cNvSpPr>
-          <p:nvPr>
-            <p:ph type="body" idx="1"/>
-          </p:nvPr>
-        </p:nvSpPr>
-        <p:spPr/>
-        <p:txBody>
-          <a:bodyPr/>
-          <a:lstStyle/>
-          <a:p>
-            <a:pPr marL="0" algn="r" defTabSz="914400" rtl="1" eaLnBrk="1" latinLnBrk="0" hangingPunct="1"/>
-            <a:endParaRPr lang="he-IL"/>
-          </a:p>
-        </p:txBody>
-      </p:sp>
-      <p:sp>
-        <p:nvSpPr>
-          <p:cNvPr id="4" name="מציין מיקום של מספר שקופית 3">
-            <a:extLst>
-              <a:ext uri="{FF2B5EF4-FFF2-40B4-BE49-F238E27FC236}">
-                <a16:creationId xmlns:a16="http://schemas.microsoft.com/office/drawing/2014/main" id="{A1522D12-6597-5898-53B7-BB2578132D83}"/>
-              </a:ext>
-            </a:extLst>
-          </p:cNvPr>
-          <p:cNvSpPr>
-            <a:spLocks noGrp="1"/>
-          </p:cNvSpPr>
-          <p:nvPr>
-            <p:ph type="sldNum" sz="quarter" idx="5"/>
-          </p:nvPr>
-        </p:nvSpPr>
-        <p:spPr/>
-        <p:txBody>
-          <a:bodyPr/>
-          <a:lstStyle/>
-          <a:p>
-            <a:fld id="{C7A60F00-D350-442A-BC31-6786C900FCCD}" type="slidenum">
-              <a:rPr lang="en-IL" smtClean="0"/>
-              <a:t>8</a:t>
-            </a:fld>
-            <a:endParaRPr lang="en-IL"/>
-          </a:p>
-        </p:txBody>
-      </p:sp>
-    </p:spTree>
-    <p:extLst>
-      <p:ext uri="{BB962C8B-B14F-4D97-AF65-F5344CB8AC3E}">
-        <p14:creationId xmlns:p14="http://schemas.microsoft.com/office/powerpoint/2010/main" val="4255690584"/>
-      </p:ext>
-    </p:extLst>
-  </p:cSld>
-  <p:clrMapOvr>
-    <a:masterClrMapping/>
-  </p:clrMapOvr>
-</p:notes>
-</file>
-
-<file path=ppt/notesSlides/notesSlide9.xml><?xml version="1.0" encoding="utf-8"?>
-<p:notes xmlns:a="http://schemas.openxmlformats.org/drawingml/2006/main" xmlns:r="http://schemas.openxmlformats.org/officeDocument/2006/relationships" xmlns:p="http://schemas.openxmlformats.org/presentationml/2006/main">
-  <p:cSld>
-    <p:spTree>
-      <p:nvGrpSpPr>
-        <p:cNvPr id="1" name="">
-          <a:extLst>
-            <a:ext uri="{FF2B5EF4-FFF2-40B4-BE49-F238E27FC236}">
-              <a16:creationId xmlns:a16="http://schemas.microsoft.com/office/drawing/2014/main" id="{33AB1333-49E8-5566-E6A3-FCD3DC81825D}"/>
-            </a:ext>
-          </a:extLst>
-        </p:cNvPr>
-        <p:cNvGrpSpPr/>
-        <p:nvPr/>
-      </p:nvGrpSpPr>
-      <p:grpSpPr>
-        <a:xfrm>
-          <a:off x="0" y="0"/>
-          <a:ext cx="0" cy="0"/>
-          <a:chOff x="0" y="0"/>
-          <a:chExt cx="0" cy="0"/>
-        </a:xfrm>
-      </p:grpSpPr>
-      <p:sp>
-        <p:nvSpPr>
-          <p:cNvPr id="2" name="מציין מיקום של תמונת שקופית 1">
-            <a:extLst>
-              <a:ext uri="{FF2B5EF4-FFF2-40B4-BE49-F238E27FC236}">
-                <a16:creationId xmlns:a16="http://schemas.microsoft.com/office/drawing/2014/main" id="{76ECFCCF-A914-F578-1AE6-026B3413C080}"/>
-              </a:ext>
-            </a:extLst>
-          </p:cNvPr>
-          <p:cNvSpPr>
-            <a:spLocks noGrp="1" noRot="1" noChangeAspect="1"/>
-          </p:cNvSpPr>
-          <p:nvPr>
-            <p:ph type="sldImg"/>
-          </p:nvPr>
-        </p:nvSpPr>
-        <p:spPr/>
-      </p:sp>
-      <p:sp>
-        <p:nvSpPr>
-          <p:cNvPr id="3" name="מציין מיקום של הערות 2">
-            <a:extLst>
-              <a:ext uri="{FF2B5EF4-FFF2-40B4-BE49-F238E27FC236}">
-                <a16:creationId xmlns:a16="http://schemas.microsoft.com/office/drawing/2014/main" id="{BE9287DB-7D83-3BC9-EC03-AD02518E0A92}"/>
-              </a:ext>
-            </a:extLst>
-          </p:cNvPr>
-          <p:cNvSpPr>
-            <a:spLocks noGrp="1"/>
-          </p:cNvSpPr>
-          <p:nvPr>
-            <p:ph type="body" idx="1"/>
-          </p:nvPr>
-        </p:nvSpPr>
-        <p:spPr/>
-        <p:txBody>
-          <a:bodyPr/>
-          <a:lstStyle/>
-          <a:p>
-            <a:pPr marL="0" algn="r" defTabSz="914400" rtl="1" eaLnBrk="1" latinLnBrk="0" hangingPunct="1"/>
-            <a:endParaRPr lang="he-IL"/>
-          </a:p>
-        </p:txBody>
-      </p:sp>
-      <p:sp>
-        <p:nvSpPr>
-          <p:cNvPr id="4" name="מציין מיקום של מספר שקופית 3">
-            <a:extLst>
-              <a:ext uri="{FF2B5EF4-FFF2-40B4-BE49-F238E27FC236}">
-                <a16:creationId xmlns:a16="http://schemas.microsoft.com/office/drawing/2014/main" id="{CEE1BC61-B551-2FD1-A21D-D625992E9593}"/>
-              </a:ext>
-            </a:extLst>
-          </p:cNvPr>
-          <p:cNvSpPr>
-            <a:spLocks noGrp="1"/>
-          </p:cNvSpPr>
-          <p:nvPr>
-            <p:ph type="sldNum" sz="quarter" idx="5"/>
-          </p:nvPr>
-        </p:nvSpPr>
-        <p:spPr/>
-        <p:txBody>
-          <a:bodyPr/>
-          <a:lstStyle/>
-          <a:p>
-            <a:fld id="{C7A60F00-D350-442A-BC31-6786C900FCCD}" type="slidenum">
-              <a:rPr lang="en-IL" smtClean="0"/>
-              <a:t>9</a:t>
-            </a:fld>
-            <a:endParaRPr lang="en-IL"/>
-          </a:p>
-        </p:txBody>
-      </p:sp>
-    </p:spTree>
-    <p:extLst>
-      <p:ext uri="{BB962C8B-B14F-4D97-AF65-F5344CB8AC3E}">
-        <p14:creationId xmlns:p14="http://schemas.microsoft.com/office/powerpoint/2010/main" val="1643536917"/>
       </p:ext>
     </p:extLst>
   </p:cSld>
@@ -5257,7 +5416,7 @@
           <a:p>
             <a:fld id="{F87F66E4-06DE-0B40-BCA4-D92B925EC948}" type="datetime13">
               <a:rPr lang="he-IL" smtClean="0"/>
-              <a:t>16/1/2026</a:t>
+              <a:t>17/1/2026</a:t>
             </a:fld>
             <a:endParaRPr lang="en-US"/>
           </a:p>
@@ -5428,7 +5587,7 @@
           <a:p>
             <a:fld id="{BE6DD2B9-D026-6142-837F-6E665A79104F}" type="datetime13">
               <a:rPr lang="he-IL" smtClean="0"/>
-              <a:t>16/1/2026</a:t>
+              <a:t>17/1/2026</a:t>
             </a:fld>
             <a:endParaRPr lang="en-US"/>
           </a:p>
@@ -5609,7 +5768,7 @@
           <a:p>
             <a:fld id="{CBDEDE16-B89B-4947-B45B-F5CDDF51DE33}" type="datetime13">
               <a:rPr lang="he-IL" smtClean="0"/>
-              <a:t>16/1/2026</a:t>
+              <a:t>17/1/2026</a:t>
             </a:fld>
             <a:endParaRPr lang="en-US"/>
           </a:p>
@@ -5815,7 +5974,7 @@
           <a:p>
             <a:fld id="{3F4F0310-300F-EA41-93E9-AF345995A55A}" type="datetime13">
               <a:rPr lang="he-IL" smtClean="0"/>
-              <a:t>16/1/2026</a:t>
+              <a:t>17/1/2026</a:t>
             </a:fld>
             <a:endParaRPr lang="en-US"/>
           </a:p>
@@ -6063,7 +6222,7 @@
           <a:p>
             <a:fld id="{EB702750-F344-EA49-A46F-381423429D01}" type="datetime13">
               <a:rPr lang="he-IL" smtClean="0"/>
-              <a:t>16/1/2026</a:t>
+              <a:t>17/1/2026</a:t>
             </a:fld>
             <a:endParaRPr lang="en-US"/>
           </a:p>
@@ -6351,7 +6510,7 @@
           <a:p>
             <a:fld id="{1357DBA8-90D0-AA42-9A42-ED7A3AEB6C51}" type="datetime13">
               <a:rPr lang="he-IL" smtClean="0"/>
-              <a:t>16/1/2026</a:t>
+              <a:t>17/1/2026</a:t>
             </a:fld>
             <a:endParaRPr lang="en-US"/>
           </a:p>
@@ -6773,7 +6932,7 @@
           <a:p>
             <a:fld id="{DB0F3303-2B75-724A-9960-61AFF1FB627A}" type="datetime13">
               <a:rPr lang="he-IL" smtClean="0"/>
-              <a:t>16/1/2026</a:t>
+              <a:t>17/1/2026</a:t>
             </a:fld>
             <a:endParaRPr lang="en-US"/>
           </a:p>
@@ -6893,7 +7052,7 @@
           <a:p>
             <a:fld id="{656D5A8D-213E-BE43-978A-A6A5A5743FF1}" type="datetime13">
               <a:rPr lang="he-IL" smtClean="0"/>
-              <a:t>16/1/2026</a:t>
+              <a:t>17/1/2026</a:t>
             </a:fld>
             <a:endParaRPr lang="en-US"/>
           </a:p>
@@ -7034,7 +7193,7 @@
             <a:fld id="{81A792BA-DE5A-904A-B48C-83C9489152F3}" type="datetime13">
               <a:rPr lang="he-IL" smtClean="0"/>
               <a:pPr/>
-              <a:t>16/1/2026</a:t>
+              <a:t>17/1/2026</a:t>
             </a:fld>
             <a:endParaRPr lang="en-US" dirty="0">
               <a:cs typeface="Calibri" panose="020F0502020204030204" pitchFamily="34" charset="0"/>
@@ -7671,7 +7830,7 @@
           <a:p>
             <a:fld id="{8D5D403C-09DB-3844-9712-8DBC90134995}" type="datetime13">
               <a:rPr lang="he-IL" smtClean="0"/>
-              <a:t>16/1/2026</a:t>
+              <a:t>17/1/2026</a:t>
             </a:fld>
             <a:endParaRPr lang="en-US"/>
           </a:p>
@@ -7926,7 +8085,7 @@
           <a:p>
             <a:fld id="{4D34B927-E40F-1F45-B303-502F6E359B11}" type="datetime13">
               <a:rPr lang="he-IL" smtClean="0"/>
-              <a:t>16/1/2026</a:t>
+              <a:t>17/1/2026</a:t>
             </a:fld>
             <a:endParaRPr lang="en-US"/>
           </a:p>
@@ -8140,7 +8299,7 @@
           <a:p>
             <a:fld id="{19800AD9-F236-2F43-BB94-EFEF07D6F6F7}" type="datetime13">
               <a:rPr lang="he-IL" smtClean="0"/>
-              <a:t>16/1/2026</a:t>
+              <a:t>17/1/2026</a:t>
             </a:fld>
             <a:endParaRPr lang="en-US"/>
           </a:p>
@@ -9145,6 +9304,2198 @@
   <p:cSld>
     <p:spTree>
       <p:nvGrpSpPr>
+        <p:cNvPr id="1" name="">
+          <a:extLst>
+            <a:ext uri="{FF2B5EF4-FFF2-40B4-BE49-F238E27FC236}">
+              <a16:creationId xmlns:a16="http://schemas.microsoft.com/office/drawing/2014/main" id="{10D8440C-C2C2-47B2-5463-18EEDB50686A}"/>
+            </a:ext>
+          </a:extLst>
+        </p:cNvPr>
+        <p:cNvGrpSpPr/>
+        <p:nvPr/>
+      </p:nvGrpSpPr>
+      <p:grpSpPr>
+        <a:xfrm>
+          <a:off x="0" y="0"/>
+          <a:ext cx="0" cy="0"/>
+          <a:chOff x="0" y="0"/>
+          <a:chExt cx="0" cy="0"/>
+        </a:xfrm>
+      </p:grpSpPr>
+      <p:sp>
+        <p:nvSpPr>
+          <p:cNvPr id="2" name="מציין מיקום של תאריך 1">
+            <a:extLst>
+              <a:ext uri="{FF2B5EF4-FFF2-40B4-BE49-F238E27FC236}">
+                <a16:creationId xmlns:a16="http://schemas.microsoft.com/office/drawing/2014/main" id="{471033F1-27D9-0B14-C65F-6E6F0F396357}"/>
+              </a:ext>
+            </a:extLst>
+          </p:cNvPr>
+          <p:cNvSpPr>
+            <a:spLocks noGrp="1"/>
+          </p:cNvSpPr>
+          <p:nvPr>
+            <p:ph type="dt" sz="half" idx="10"/>
+          </p:nvPr>
+        </p:nvSpPr>
+        <p:spPr/>
+        <p:txBody>
+          <a:bodyPr/>
+          <a:lstStyle/>
+          <a:p>
+            <a:fld id="{81A792BA-DE5A-904A-B48C-83C9489152F3}" type="datetime13">
+              <a:rPr lang="he-IL" smtClean="0"/>
+              <a:pPr/>
+              <a:t>17/1/2026</a:t>
+            </a:fld>
+            <a:endParaRPr lang="en-US" dirty="0">
+              <a:cs typeface="Calibri" panose="020F0502020204030204" pitchFamily="34" charset="0"/>
+            </a:endParaRPr>
+          </a:p>
+        </p:txBody>
+      </p:sp>
+      <p:sp>
+        <p:nvSpPr>
+          <p:cNvPr id="3" name="מציין מיקום של כותרת תחתונה 2">
+            <a:extLst>
+              <a:ext uri="{FF2B5EF4-FFF2-40B4-BE49-F238E27FC236}">
+                <a16:creationId xmlns:a16="http://schemas.microsoft.com/office/drawing/2014/main" id="{FBF1C0A3-8B01-27A3-EC29-FC62EA2BED67}"/>
+              </a:ext>
+            </a:extLst>
+          </p:cNvPr>
+          <p:cNvSpPr>
+            <a:spLocks noGrp="1"/>
+          </p:cNvSpPr>
+          <p:nvPr>
+            <p:ph type="ftr" sz="quarter" idx="11"/>
+          </p:nvPr>
+        </p:nvSpPr>
+        <p:spPr/>
+        <p:txBody>
+          <a:bodyPr/>
+          <a:lstStyle/>
+          <a:p>
+            <a:r>
+              <a:rPr lang="en-US" sz="1200" kern="1200">
+                <a:solidFill>
+                  <a:schemeClr val="tx1">
+                    <a:tint val="75000"/>
+                  </a:schemeClr>
+                </a:solidFill>
+                <a:latin typeface="+mn-lt"/>
+                <a:ea typeface="+mn-ea"/>
+                <a:cs typeface="+mn-cs"/>
+              </a:rPr>
+              <a:t>Workshop in Data Science|Team 003| Final Presentation</a:t>
+            </a:r>
+            <a:endParaRPr lang="en-US" sz="1200" kern="1200" dirty="0">
+              <a:solidFill>
+                <a:schemeClr val="tx1">
+                  <a:tint val="75000"/>
+                </a:schemeClr>
+              </a:solidFill>
+              <a:latin typeface="+mn-lt"/>
+              <a:ea typeface="+mn-ea"/>
+              <a:cs typeface="+mn-cs"/>
+            </a:endParaRPr>
+          </a:p>
+        </p:txBody>
+      </p:sp>
+      <p:sp>
+        <p:nvSpPr>
+          <p:cNvPr id="4" name="מציין מיקום של מספר שקופית 3">
+            <a:extLst>
+              <a:ext uri="{FF2B5EF4-FFF2-40B4-BE49-F238E27FC236}">
+                <a16:creationId xmlns:a16="http://schemas.microsoft.com/office/drawing/2014/main" id="{B27DBA00-1FB2-40E1-000E-19075092A9F2}"/>
+              </a:ext>
+            </a:extLst>
+          </p:cNvPr>
+          <p:cNvSpPr>
+            <a:spLocks noGrp="1"/>
+          </p:cNvSpPr>
+          <p:nvPr>
+            <p:ph type="sldNum" sz="quarter" idx="12"/>
+          </p:nvPr>
+        </p:nvSpPr>
+        <p:spPr/>
+        <p:txBody>
+          <a:bodyPr/>
+          <a:lstStyle/>
+          <a:p>
+            <a:fld id="{C1FF6DA9-008F-8B48-92A6-B652298478BF}" type="slidenum">
+              <a:rPr lang="en-US" smtClean="0"/>
+              <a:t>10</a:t>
+            </a:fld>
+            <a:endParaRPr lang="en-US" dirty="0"/>
+          </a:p>
+        </p:txBody>
+      </p:sp>
+      <p:sp>
+        <p:nvSpPr>
+          <p:cNvPr id="5" name="כותרת 4">
+            <a:extLst>
+              <a:ext uri="{FF2B5EF4-FFF2-40B4-BE49-F238E27FC236}">
+                <a16:creationId xmlns:a16="http://schemas.microsoft.com/office/drawing/2014/main" id="{2BC53651-C2A8-A087-6C3A-ED929FDF1434}"/>
+              </a:ext>
+            </a:extLst>
+          </p:cNvPr>
+          <p:cNvSpPr>
+            <a:spLocks noGrp="1"/>
+          </p:cNvSpPr>
+          <p:nvPr>
+            <p:ph type="title"/>
+          </p:nvPr>
+        </p:nvSpPr>
+        <p:spPr/>
+        <p:txBody>
+          <a:bodyPr>
+            <a:normAutofit fontScale="90000"/>
+          </a:bodyPr>
+          <a:lstStyle/>
+          <a:p>
+            <a:r>
+              <a:rPr lang="en-US" dirty="0">
+                <a:solidFill>
+                  <a:srgbClr val="0F172A"/>
+                </a:solidFill>
+                <a:ea typeface="Calibri" panose="020F0502020204030204" pitchFamily="34" charset="0"/>
+              </a:rPr>
+              <a:t>Data &amp; feature engineering (block-based)</a:t>
+            </a:r>
+            <a:endParaRPr lang="he-IL" dirty="0"/>
+          </a:p>
+        </p:txBody>
+      </p:sp>
+      <p:sp>
+        <p:nvSpPr>
+          <p:cNvPr id="18" name="Text 13">
+            <a:extLst>
+              <a:ext uri="{FF2B5EF4-FFF2-40B4-BE49-F238E27FC236}">
+                <a16:creationId xmlns:a16="http://schemas.microsoft.com/office/drawing/2014/main" id="{99D1228F-69E5-4AEF-8898-58CCEEAAC8E8}"/>
+              </a:ext>
+            </a:extLst>
+          </p:cNvPr>
+          <p:cNvSpPr/>
+          <p:nvPr/>
+        </p:nvSpPr>
+        <p:spPr>
+          <a:xfrm>
+            <a:off x="548640" y="978408"/>
+            <a:ext cx="5669280" cy="365760"/>
+          </a:xfrm>
+          <a:prstGeom prst="rect">
+            <a:avLst/>
+          </a:prstGeom>
+          <a:noFill/>
+          <a:ln/>
+        </p:spPr>
+        <p:txBody>
+          <a:bodyPr wrap="square" rtlCol="0" anchor="ctr"/>
+          <a:lstStyle/>
+          <a:p>
+            <a:pPr marL="0" indent="0" algn="l" rtl="0">
+              <a:buNone/>
+            </a:pPr>
+            <a:r>
+              <a:rPr lang="en-US" sz="2000" b="1" dirty="0">
+                <a:solidFill>
+                  <a:srgbClr val="0F172A"/>
+                </a:solidFill>
+                <a:latin typeface="Calibri" pitchFamily="34" charset="0"/>
+                <a:ea typeface="Calibri" pitchFamily="34" charset="-122"/>
+                <a:cs typeface="Calibri" pitchFamily="34" charset="-120"/>
+              </a:rPr>
+              <a:t>Feature blocks</a:t>
+            </a:r>
+            <a:endParaRPr lang="en-US" sz="2000" dirty="0"/>
+          </a:p>
+        </p:txBody>
+      </p:sp>
+      <p:sp>
+        <p:nvSpPr>
+          <p:cNvPr id="19" name="Shape 14">
+            <a:extLst>
+              <a:ext uri="{FF2B5EF4-FFF2-40B4-BE49-F238E27FC236}">
+                <a16:creationId xmlns:a16="http://schemas.microsoft.com/office/drawing/2014/main" id="{BE78DAB1-6B15-7AB0-F66A-A8D9AC0AAD5D}"/>
+              </a:ext>
+            </a:extLst>
+          </p:cNvPr>
+          <p:cNvSpPr/>
+          <p:nvPr/>
+        </p:nvSpPr>
+        <p:spPr>
+          <a:xfrm>
+            <a:off x="548640" y="1498981"/>
+            <a:ext cx="5669280" cy="548640"/>
+          </a:xfrm>
+          <a:prstGeom prst="roundRect">
+            <a:avLst/>
+          </a:prstGeom>
+          <a:solidFill>
+            <a:srgbClr val="FFFFFF"/>
+          </a:solidFill>
+          <a:ln w="12700">
+            <a:solidFill>
+              <a:srgbClr val="E2E8F0"/>
+            </a:solidFill>
+            <a:prstDash val="solid"/>
+          </a:ln>
+        </p:spPr>
+        <p:txBody>
+          <a:bodyPr/>
+          <a:lstStyle/>
+          <a:p>
+            <a:pPr algn="l" rtl="0"/>
+            <a:endParaRPr lang="he-IL"/>
+          </a:p>
+        </p:txBody>
+      </p:sp>
+      <p:sp>
+        <p:nvSpPr>
+          <p:cNvPr id="20" name="Shape 15">
+            <a:extLst>
+              <a:ext uri="{FF2B5EF4-FFF2-40B4-BE49-F238E27FC236}">
+                <a16:creationId xmlns:a16="http://schemas.microsoft.com/office/drawing/2014/main" id="{1242BA8E-3ED1-C5C6-52DD-B2C1D7D8C4E3}"/>
+              </a:ext>
+            </a:extLst>
+          </p:cNvPr>
+          <p:cNvSpPr/>
+          <p:nvPr/>
+        </p:nvSpPr>
+        <p:spPr>
+          <a:xfrm>
+            <a:off x="548640" y="1498981"/>
+            <a:ext cx="109728" cy="548640"/>
+          </a:xfrm>
+          <a:prstGeom prst="rect">
+            <a:avLst/>
+          </a:prstGeom>
+          <a:solidFill>
+            <a:schemeClr val="tx2">
+              <a:lumMod val="75000"/>
+            </a:schemeClr>
+          </a:solidFill>
+          <a:ln w="12700">
+            <a:solidFill>
+              <a:schemeClr val="accent1"/>
+            </a:solidFill>
+            <a:prstDash val="solid"/>
+          </a:ln>
+        </p:spPr>
+        <p:txBody>
+          <a:bodyPr/>
+          <a:lstStyle/>
+          <a:p>
+            <a:pPr algn="l" rtl="0"/>
+            <a:endParaRPr lang="he-IL"/>
+          </a:p>
+        </p:txBody>
+      </p:sp>
+      <p:sp>
+        <p:nvSpPr>
+          <p:cNvPr id="21" name="Text 16">
+            <a:extLst>
+              <a:ext uri="{FF2B5EF4-FFF2-40B4-BE49-F238E27FC236}">
+                <a16:creationId xmlns:a16="http://schemas.microsoft.com/office/drawing/2014/main" id="{A4BCB0F2-3A46-32EA-DBEF-07A048A16D7A}"/>
+              </a:ext>
+            </a:extLst>
+          </p:cNvPr>
+          <p:cNvSpPr/>
+          <p:nvPr/>
+        </p:nvSpPr>
+        <p:spPr>
+          <a:xfrm>
+            <a:off x="777240" y="1608709"/>
+            <a:ext cx="1371600" cy="548640"/>
+          </a:xfrm>
+          <a:prstGeom prst="rect">
+            <a:avLst/>
+          </a:prstGeom>
+          <a:noFill/>
+          <a:ln/>
+        </p:spPr>
+        <p:txBody>
+          <a:bodyPr wrap="square" rtlCol="0" anchor="ctr"/>
+          <a:lstStyle/>
+          <a:p>
+            <a:pPr marL="0" indent="0" algn="l" rtl="0">
+              <a:buNone/>
+            </a:pPr>
+            <a:r>
+              <a:rPr lang="en-US" sz="1600" b="1" dirty="0">
+                <a:solidFill>
+                  <a:srgbClr val="0F172A"/>
+                </a:solidFill>
+                <a:latin typeface="Calibri" pitchFamily="34" charset="0"/>
+                <a:ea typeface="Calibri" pitchFamily="34" charset="-122"/>
+                <a:cs typeface="Calibri" pitchFamily="34" charset="-120"/>
+              </a:rPr>
+              <a:t>Trend</a:t>
+            </a:r>
+            <a:endParaRPr lang="en-US" sz="1600" dirty="0"/>
+          </a:p>
+        </p:txBody>
+      </p:sp>
+      <p:sp>
+        <p:nvSpPr>
+          <p:cNvPr id="22" name="Text 17">
+            <a:extLst>
+              <a:ext uri="{FF2B5EF4-FFF2-40B4-BE49-F238E27FC236}">
+                <a16:creationId xmlns:a16="http://schemas.microsoft.com/office/drawing/2014/main" id="{95069D4E-E24A-9BE9-5F91-B6B98AA8080E}"/>
+              </a:ext>
+            </a:extLst>
+          </p:cNvPr>
+          <p:cNvSpPr/>
+          <p:nvPr/>
+        </p:nvSpPr>
+        <p:spPr>
+          <a:xfrm>
+            <a:off x="2057400" y="1626997"/>
+            <a:ext cx="3931920" cy="548640"/>
+          </a:xfrm>
+          <a:prstGeom prst="rect">
+            <a:avLst/>
+          </a:prstGeom>
+          <a:noFill/>
+          <a:ln/>
+        </p:spPr>
+        <p:txBody>
+          <a:bodyPr wrap="square" rtlCol="0" anchor="ctr"/>
+          <a:lstStyle/>
+          <a:p>
+            <a:pPr marL="0" indent="0" algn="l" rtl="0">
+              <a:buNone/>
+            </a:pPr>
+            <a:r>
+              <a:rPr lang="en-US" sz="1400" dirty="0">
+                <a:solidFill>
+                  <a:srgbClr val="64748B"/>
+                </a:solidFill>
+                <a:latin typeface="Calibri" pitchFamily="34" charset="0"/>
+                <a:ea typeface="Calibri" pitchFamily="34" charset="-122"/>
+                <a:cs typeface="Calibri" pitchFamily="34" charset="-120"/>
+              </a:rPr>
+              <a:t>moving averages, slopes</a:t>
+            </a:r>
+            <a:endParaRPr lang="en-US" sz="1400" dirty="0"/>
+          </a:p>
+        </p:txBody>
+      </p:sp>
+      <p:sp>
+        <p:nvSpPr>
+          <p:cNvPr id="23" name="Shape 18">
+            <a:extLst>
+              <a:ext uri="{FF2B5EF4-FFF2-40B4-BE49-F238E27FC236}">
+                <a16:creationId xmlns:a16="http://schemas.microsoft.com/office/drawing/2014/main" id="{680FB919-F42B-51BF-5FFA-4AE5C6B1E98F}"/>
+              </a:ext>
+            </a:extLst>
+          </p:cNvPr>
+          <p:cNvSpPr/>
+          <p:nvPr/>
+        </p:nvSpPr>
+        <p:spPr>
+          <a:xfrm>
+            <a:off x="548640" y="2157349"/>
+            <a:ext cx="5669280" cy="548640"/>
+          </a:xfrm>
+          <a:prstGeom prst="roundRect">
+            <a:avLst/>
+          </a:prstGeom>
+          <a:solidFill>
+            <a:srgbClr val="FFFFFF"/>
+          </a:solidFill>
+          <a:ln w="12700">
+            <a:solidFill>
+              <a:srgbClr val="E2E8F0"/>
+            </a:solidFill>
+            <a:prstDash val="solid"/>
+          </a:ln>
+        </p:spPr>
+        <p:txBody>
+          <a:bodyPr/>
+          <a:lstStyle/>
+          <a:p>
+            <a:pPr algn="l" rtl="0"/>
+            <a:endParaRPr lang="he-IL"/>
+          </a:p>
+        </p:txBody>
+      </p:sp>
+      <p:sp>
+        <p:nvSpPr>
+          <p:cNvPr id="24" name="Shape 19">
+            <a:extLst>
+              <a:ext uri="{FF2B5EF4-FFF2-40B4-BE49-F238E27FC236}">
+                <a16:creationId xmlns:a16="http://schemas.microsoft.com/office/drawing/2014/main" id="{C30D07D5-E1AD-A476-38A4-CCA8507EDF2F}"/>
+              </a:ext>
+            </a:extLst>
+          </p:cNvPr>
+          <p:cNvSpPr/>
+          <p:nvPr/>
+        </p:nvSpPr>
+        <p:spPr>
+          <a:xfrm>
+            <a:off x="548640" y="2157349"/>
+            <a:ext cx="109728" cy="548640"/>
+          </a:xfrm>
+          <a:prstGeom prst="rect">
+            <a:avLst/>
+          </a:prstGeom>
+          <a:solidFill>
+            <a:schemeClr val="tx2">
+              <a:lumMod val="75000"/>
+            </a:schemeClr>
+          </a:solidFill>
+          <a:ln w="12700">
+            <a:solidFill>
+              <a:schemeClr val="accent1"/>
+            </a:solidFill>
+            <a:prstDash val="solid"/>
+          </a:ln>
+        </p:spPr>
+        <p:txBody>
+          <a:bodyPr/>
+          <a:lstStyle/>
+          <a:p>
+            <a:pPr algn="l" rtl="0"/>
+            <a:endParaRPr lang="he-IL"/>
+          </a:p>
+        </p:txBody>
+      </p:sp>
+      <p:sp>
+        <p:nvSpPr>
+          <p:cNvPr id="25" name="Text 20">
+            <a:extLst>
+              <a:ext uri="{FF2B5EF4-FFF2-40B4-BE49-F238E27FC236}">
+                <a16:creationId xmlns:a16="http://schemas.microsoft.com/office/drawing/2014/main" id="{3C3869B4-888D-833A-1972-5B097225FDC8}"/>
+              </a:ext>
+            </a:extLst>
+          </p:cNvPr>
+          <p:cNvSpPr/>
+          <p:nvPr/>
+        </p:nvSpPr>
+        <p:spPr>
+          <a:xfrm>
+            <a:off x="777240" y="2267077"/>
+            <a:ext cx="1371600" cy="548640"/>
+          </a:xfrm>
+          <a:prstGeom prst="rect">
+            <a:avLst/>
+          </a:prstGeom>
+          <a:noFill/>
+          <a:ln/>
+        </p:spPr>
+        <p:txBody>
+          <a:bodyPr wrap="square" rtlCol="0" anchor="ctr"/>
+          <a:lstStyle/>
+          <a:p>
+            <a:pPr marL="0" indent="0" algn="l" rtl="0">
+              <a:buNone/>
+            </a:pPr>
+            <a:r>
+              <a:rPr lang="en-US" sz="1600" b="1" dirty="0">
+                <a:solidFill>
+                  <a:srgbClr val="0F172A"/>
+                </a:solidFill>
+                <a:latin typeface="Calibri" pitchFamily="34" charset="0"/>
+                <a:ea typeface="Calibri" pitchFamily="34" charset="-122"/>
+                <a:cs typeface="Calibri" pitchFamily="34" charset="-120"/>
+              </a:rPr>
+              <a:t>Momentum</a:t>
+            </a:r>
+            <a:endParaRPr lang="en-US" sz="1600" dirty="0"/>
+          </a:p>
+        </p:txBody>
+      </p:sp>
+      <p:sp>
+        <p:nvSpPr>
+          <p:cNvPr id="26" name="Text 21">
+            <a:extLst>
+              <a:ext uri="{FF2B5EF4-FFF2-40B4-BE49-F238E27FC236}">
+                <a16:creationId xmlns:a16="http://schemas.microsoft.com/office/drawing/2014/main" id="{DC470D37-28B9-704F-7CB1-D5BC71BA6A46}"/>
+              </a:ext>
+            </a:extLst>
+          </p:cNvPr>
+          <p:cNvSpPr/>
+          <p:nvPr/>
+        </p:nvSpPr>
+        <p:spPr>
+          <a:xfrm>
+            <a:off x="2057400" y="2285365"/>
+            <a:ext cx="3931920" cy="548640"/>
+          </a:xfrm>
+          <a:prstGeom prst="rect">
+            <a:avLst/>
+          </a:prstGeom>
+          <a:noFill/>
+          <a:ln/>
+        </p:spPr>
+        <p:txBody>
+          <a:bodyPr wrap="square" rtlCol="0" anchor="ctr"/>
+          <a:lstStyle/>
+          <a:p>
+            <a:pPr marL="0" indent="0" algn="l" rtl="0">
+              <a:buNone/>
+            </a:pPr>
+            <a:r>
+              <a:rPr lang="en-US" sz="1400" dirty="0">
+                <a:solidFill>
+                  <a:srgbClr val="64748B"/>
+                </a:solidFill>
+                <a:latin typeface="Calibri" pitchFamily="34" charset="0"/>
+                <a:ea typeface="Calibri" pitchFamily="34" charset="-122"/>
+                <a:cs typeface="Calibri" pitchFamily="34" charset="-120"/>
+              </a:rPr>
+              <a:t>lagged returns, momentum</a:t>
+            </a:r>
+            <a:endParaRPr lang="en-US" sz="1400" dirty="0"/>
+          </a:p>
+        </p:txBody>
+      </p:sp>
+      <p:sp>
+        <p:nvSpPr>
+          <p:cNvPr id="27" name="Shape 22">
+            <a:extLst>
+              <a:ext uri="{FF2B5EF4-FFF2-40B4-BE49-F238E27FC236}">
+                <a16:creationId xmlns:a16="http://schemas.microsoft.com/office/drawing/2014/main" id="{7B74E9E4-EB24-6206-6F7D-9B411789B4AE}"/>
+              </a:ext>
+            </a:extLst>
+          </p:cNvPr>
+          <p:cNvSpPr/>
+          <p:nvPr/>
+        </p:nvSpPr>
+        <p:spPr>
+          <a:xfrm>
+            <a:off x="548640" y="2815717"/>
+            <a:ext cx="5669280" cy="548640"/>
+          </a:xfrm>
+          <a:prstGeom prst="roundRect">
+            <a:avLst/>
+          </a:prstGeom>
+          <a:solidFill>
+            <a:srgbClr val="FFFFFF"/>
+          </a:solidFill>
+          <a:ln w="12700">
+            <a:solidFill>
+              <a:srgbClr val="E2E8F0"/>
+            </a:solidFill>
+            <a:prstDash val="solid"/>
+          </a:ln>
+        </p:spPr>
+        <p:txBody>
+          <a:bodyPr/>
+          <a:lstStyle/>
+          <a:p>
+            <a:pPr algn="l" rtl="0"/>
+            <a:endParaRPr lang="he-IL"/>
+          </a:p>
+        </p:txBody>
+      </p:sp>
+      <p:sp>
+        <p:nvSpPr>
+          <p:cNvPr id="28" name="Shape 23">
+            <a:extLst>
+              <a:ext uri="{FF2B5EF4-FFF2-40B4-BE49-F238E27FC236}">
+                <a16:creationId xmlns:a16="http://schemas.microsoft.com/office/drawing/2014/main" id="{0FD9D9D4-A851-7B8D-B23C-9D1A5071DBD7}"/>
+              </a:ext>
+            </a:extLst>
+          </p:cNvPr>
+          <p:cNvSpPr/>
+          <p:nvPr/>
+        </p:nvSpPr>
+        <p:spPr>
+          <a:xfrm>
+            <a:off x="548640" y="2815717"/>
+            <a:ext cx="109728" cy="548640"/>
+          </a:xfrm>
+          <a:prstGeom prst="rect">
+            <a:avLst/>
+          </a:prstGeom>
+          <a:solidFill>
+            <a:schemeClr val="tx2">
+              <a:lumMod val="75000"/>
+            </a:schemeClr>
+          </a:solidFill>
+          <a:ln w="12700">
+            <a:solidFill>
+              <a:schemeClr val="accent1"/>
+            </a:solidFill>
+            <a:prstDash val="solid"/>
+          </a:ln>
+        </p:spPr>
+        <p:txBody>
+          <a:bodyPr/>
+          <a:lstStyle/>
+          <a:p>
+            <a:pPr algn="l" rtl="0"/>
+            <a:endParaRPr lang="he-IL"/>
+          </a:p>
+        </p:txBody>
+      </p:sp>
+      <p:sp>
+        <p:nvSpPr>
+          <p:cNvPr id="29" name="Text 24">
+            <a:extLst>
+              <a:ext uri="{FF2B5EF4-FFF2-40B4-BE49-F238E27FC236}">
+                <a16:creationId xmlns:a16="http://schemas.microsoft.com/office/drawing/2014/main" id="{106574CC-1C90-EDBF-0F69-28190FE793E3}"/>
+              </a:ext>
+            </a:extLst>
+          </p:cNvPr>
+          <p:cNvSpPr/>
+          <p:nvPr/>
+        </p:nvSpPr>
+        <p:spPr>
+          <a:xfrm>
+            <a:off x="777240" y="2925445"/>
+            <a:ext cx="1371600" cy="548640"/>
+          </a:xfrm>
+          <a:prstGeom prst="rect">
+            <a:avLst/>
+          </a:prstGeom>
+          <a:noFill/>
+          <a:ln/>
+        </p:spPr>
+        <p:txBody>
+          <a:bodyPr wrap="square" rtlCol="0" anchor="ctr"/>
+          <a:lstStyle/>
+          <a:p>
+            <a:pPr marL="0" indent="0" algn="l" rtl="0">
+              <a:buNone/>
+            </a:pPr>
+            <a:r>
+              <a:rPr lang="en-US" sz="1600" b="1" dirty="0">
+                <a:solidFill>
+                  <a:srgbClr val="0F172A"/>
+                </a:solidFill>
+                <a:latin typeface="Calibri" pitchFamily="34" charset="0"/>
+                <a:ea typeface="Calibri" pitchFamily="34" charset="-122"/>
+                <a:cs typeface="Calibri" pitchFamily="34" charset="-120"/>
+              </a:rPr>
+              <a:t>Volatility</a:t>
+            </a:r>
+            <a:endParaRPr lang="en-US" sz="1600" dirty="0"/>
+          </a:p>
+        </p:txBody>
+      </p:sp>
+      <p:sp>
+        <p:nvSpPr>
+          <p:cNvPr id="30" name="Text 25">
+            <a:extLst>
+              <a:ext uri="{FF2B5EF4-FFF2-40B4-BE49-F238E27FC236}">
+                <a16:creationId xmlns:a16="http://schemas.microsoft.com/office/drawing/2014/main" id="{63ECE157-33F0-C8CF-76BF-27E988D4566F}"/>
+              </a:ext>
+            </a:extLst>
+          </p:cNvPr>
+          <p:cNvSpPr/>
+          <p:nvPr/>
+        </p:nvSpPr>
+        <p:spPr>
+          <a:xfrm>
+            <a:off x="2057400" y="2943733"/>
+            <a:ext cx="3931920" cy="548640"/>
+          </a:xfrm>
+          <a:prstGeom prst="rect">
+            <a:avLst/>
+          </a:prstGeom>
+          <a:noFill/>
+          <a:ln/>
+        </p:spPr>
+        <p:txBody>
+          <a:bodyPr wrap="square" rtlCol="0" anchor="ctr"/>
+          <a:lstStyle/>
+          <a:p>
+            <a:pPr marL="0" indent="0" algn="l" rtl="0">
+              <a:buNone/>
+            </a:pPr>
+            <a:r>
+              <a:rPr lang="en-US" sz="1400" dirty="0">
+                <a:solidFill>
+                  <a:srgbClr val="64748B"/>
+                </a:solidFill>
+                <a:latin typeface="Calibri" pitchFamily="34" charset="0"/>
+                <a:ea typeface="Calibri" pitchFamily="34" charset="-122"/>
+                <a:cs typeface="Calibri" pitchFamily="34" charset="-120"/>
+              </a:rPr>
+              <a:t>rolling std, risk regime</a:t>
+            </a:r>
+            <a:endParaRPr lang="en-US" sz="1400" dirty="0"/>
+          </a:p>
+        </p:txBody>
+      </p:sp>
+      <p:sp>
+        <p:nvSpPr>
+          <p:cNvPr id="31" name="Shape 26">
+            <a:extLst>
+              <a:ext uri="{FF2B5EF4-FFF2-40B4-BE49-F238E27FC236}">
+                <a16:creationId xmlns:a16="http://schemas.microsoft.com/office/drawing/2014/main" id="{C22DD9DB-7052-4973-3145-779ECB859E25}"/>
+              </a:ext>
+            </a:extLst>
+          </p:cNvPr>
+          <p:cNvSpPr/>
+          <p:nvPr/>
+        </p:nvSpPr>
+        <p:spPr>
+          <a:xfrm>
+            <a:off x="548640" y="3474085"/>
+            <a:ext cx="5669280" cy="548640"/>
+          </a:xfrm>
+          <a:prstGeom prst="roundRect">
+            <a:avLst/>
+          </a:prstGeom>
+          <a:solidFill>
+            <a:srgbClr val="FFFFFF"/>
+          </a:solidFill>
+          <a:ln w="12700">
+            <a:solidFill>
+              <a:srgbClr val="E2E8F0"/>
+            </a:solidFill>
+            <a:prstDash val="solid"/>
+          </a:ln>
+        </p:spPr>
+        <p:txBody>
+          <a:bodyPr/>
+          <a:lstStyle/>
+          <a:p>
+            <a:pPr algn="l" rtl="0"/>
+            <a:endParaRPr lang="he-IL"/>
+          </a:p>
+        </p:txBody>
+      </p:sp>
+      <p:sp>
+        <p:nvSpPr>
+          <p:cNvPr id="32" name="Shape 27">
+            <a:extLst>
+              <a:ext uri="{FF2B5EF4-FFF2-40B4-BE49-F238E27FC236}">
+                <a16:creationId xmlns:a16="http://schemas.microsoft.com/office/drawing/2014/main" id="{2DDBA5F4-83F6-E803-57E1-9C1F6C01971D}"/>
+              </a:ext>
+            </a:extLst>
+          </p:cNvPr>
+          <p:cNvSpPr/>
+          <p:nvPr/>
+        </p:nvSpPr>
+        <p:spPr>
+          <a:xfrm>
+            <a:off x="548640" y="3474085"/>
+            <a:ext cx="109728" cy="548640"/>
+          </a:xfrm>
+          <a:prstGeom prst="rect">
+            <a:avLst/>
+          </a:prstGeom>
+          <a:solidFill>
+            <a:schemeClr val="tx2">
+              <a:lumMod val="75000"/>
+            </a:schemeClr>
+          </a:solidFill>
+          <a:ln w="12700">
+            <a:solidFill>
+              <a:schemeClr val="accent1"/>
+            </a:solidFill>
+            <a:prstDash val="solid"/>
+          </a:ln>
+        </p:spPr>
+        <p:txBody>
+          <a:bodyPr/>
+          <a:lstStyle/>
+          <a:p>
+            <a:pPr algn="l" rtl="0"/>
+            <a:endParaRPr lang="he-IL"/>
+          </a:p>
+        </p:txBody>
+      </p:sp>
+      <p:sp>
+        <p:nvSpPr>
+          <p:cNvPr id="33" name="Text 28">
+            <a:extLst>
+              <a:ext uri="{FF2B5EF4-FFF2-40B4-BE49-F238E27FC236}">
+                <a16:creationId xmlns:a16="http://schemas.microsoft.com/office/drawing/2014/main" id="{ADDE3C70-3DDB-BA75-D258-4464642E69F1}"/>
+              </a:ext>
+            </a:extLst>
+          </p:cNvPr>
+          <p:cNvSpPr/>
+          <p:nvPr/>
+        </p:nvSpPr>
+        <p:spPr>
+          <a:xfrm>
+            <a:off x="777240" y="3583813"/>
+            <a:ext cx="1371600" cy="548640"/>
+          </a:xfrm>
+          <a:prstGeom prst="rect">
+            <a:avLst/>
+          </a:prstGeom>
+          <a:noFill/>
+          <a:ln/>
+        </p:spPr>
+        <p:txBody>
+          <a:bodyPr wrap="square" rtlCol="0" anchor="ctr"/>
+          <a:lstStyle/>
+          <a:p>
+            <a:pPr marL="0" indent="0" algn="l" rtl="0">
+              <a:buNone/>
+            </a:pPr>
+            <a:r>
+              <a:rPr lang="en-US" sz="1600" b="1" dirty="0">
+                <a:solidFill>
+                  <a:srgbClr val="0F172A"/>
+                </a:solidFill>
+                <a:latin typeface="Calibri" pitchFamily="34" charset="0"/>
+                <a:ea typeface="Calibri" pitchFamily="34" charset="-122"/>
+                <a:cs typeface="Calibri" pitchFamily="34" charset="-120"/>
+              </a:rPr>
+              <a:t>Macro</a:t>
+            </a:r>
+            <a:endParaRPr lang="en-US" sz="1600" dirty="0"/>
+          </a:p>
+        </p:txBody>
+      </p:sp>
+      <p:sp>
+        <p:nvSpPr>
+          <p:cNvPr id="34" name="Text 29">
+            <a:extLst>
+              <a:ext uri="{FF2B5EF4-FFF2-40B4-BE49-F238E27FC236}">
+                <a16:creationId xmlns:a16="http://schemas.microsoft.com/office/drawing/2014/main" id="{606FDEEE-E2C0-0F23-2508-5D2755624C65}"/>
+              </a:ext>
+            </a:extLst>
+          </p:cNvPr>
+          <p:cNvSpPr/>
+          <p:nvPr/>
+        </p:nvSpPr>
+        <p:spPr>
+          <a:xfrm>
+            <a:off x="2057400" y="3602101"/>
+            <a:ext cx="3931920" cy="548640"/>
+          </a:xfrm>
+          <a:prstGeom prst="rect">
+            <a:avLst/>
+          </a:prstGeom>
+          <a:noFill/>
+          <a:ln/>
+        </p:spPr>
+        <p:txBody>
+          <a:bodyPr wrap="square" rtlCol="0" anchor="ctr"/>
+          <a:lstStyle/>
+          <a:p>
+            <a:pPr marL="0" indent="0" algn="l" rtl="0">
+              <a:buNone/>
+            </a:pPr>
+            <a:r>
+              <a:rPr lang="en-US" sz="1400" dirty="0">
+                <a:solidFill>
+                  <a:srgbClr val="64748B"/>
+                </a:solidFill>
+                <a:latin typeface="Calibri" pitchFamily="34" charset="0"/>
+                <a:ea typeface="Calibri" pitchFamily="34" charset="-122"/>
+                <a:cs typeface="Calibri" pitchFamily="34" charset="-120"/>
+              </a:rPr>
+              <a:t>VIX, market index</a:t>
+            </a:r>
+            <a:endParaRPr lang="en-US" sz="1400" dirty="0"/>
+          </a:p>
+        </p:txBody>
+      </p:sp>
+      <p:sp>
+        <p:nvSpPr>
+          <p:cNvPr id="35" name="Shape 30">
+            <a:extLst>
+              <a:ext uri="{FF2B5EF4-FFF2-40B4-BE49-F238E27FC236}">
+                <a16:creationId xmlns:a16="http://schemas.microsoft.com/office/drawing/2014/main" id="{157F76B4-EBE5-67C8-73E8-2F2588A3A19C}"/>
+              </a:ext>
+            </a:extLst>
+          </p:cNvPr>
+          <p:cNvSpPr/>
+          <p:nvPr/>
+        </p:nvSpPr>
+        <p:spPr>
+          <a:xfrm>
+            <a:off x="548640" y="4132453"/>
+            <a:ext cx="5669280" cy="548640"/>
+          </a:xfrm>
+          <a:prstGeom prst="roundRect">
+            <a:avLst/>
+          </a:prstGeom>
+          <a:solidFill>
+            <a:srgbClr val="FFFFFF"/>
+          </a:solidFill>
+          <a:ln w="12700">
+            <a:solidFill>
+              <a:srgbClr val="E2E8F0"/>
+            </a:solidFill>
+            <a:prstDash val="solid"/>
+          </a:ln>
+        </p:spPr>
+        <p:txBody>
+          <a:bodyPr/>
+          <a:lstStyle/>
+          <a:p>
+            <a:pPr algn="l" rtl="0"/>
+            <a:endParaRPr lang="he-IL"/>
+          </a:p>
+        </p:txBody>
+      </p:sp>
+      <p:sp>
+        <p:nvSpPr>
+          <p:cNvPr id="36" name="Shape 31">
+            <a:extLst>
+              <a:ext uri="{FF2B5EF4-FFF2-40B4-BE49-F238E27FC236}">
+                <a16:creationId xmlns:a16="http://schemas.microsoft.com/office/drawing/2014/main" id="{8A28EBA8-AB04-B273-AE48-2E6E90035867}"/>
+              </a:ext>
+            </a:extLst>
+          </p:cNvPr>
+          <p:cNvSpPr/>
+          <p:nvPr/>
+        </p:nvSpPr>
+        <p:spPr>
+          <a:xfrm>
+            <a:off x="548640" y="4132453"/>
+            <a:ext cx="109728" cy="548640"/>
+          </a:xfrm>
+          <a:prstGeom prst="rect">
+            <a:avLst/>
+          </a:prstGeom>
+          <a:solidFill>
+            <a:schemeClr val="tx2">
+              <a:lumMod val="75000"/>
+            </a:schemeClr>
+          </a:solidFill>
+          <a:ln w="12700">
+            <a:solidFill>
+              <a:schemeClr val="accent1"/>
+            </a:solidFill>
+            <a:prstDash val="solid"/>
+          </a:ln>
+        </p:spPr>
+        <p:txBody>
+          <a:bodyPr/>
+          <a:lstStyle/>
+          <a:p>
+            <a:pPr algn="l" rtl="0"/>
+            <a:endParaRPr lang="he-IL"/>
+          </a:p>
+        </p:txBody>
+      </p:sp>
+      <p:sp>
+        <p:nvSpPr>
+          <p:cNvPr id="37" name="Text 32">
+            <a:extLst>
+              <a:ext uri="{FF2B5EF4-FFF2-40B4-BE49-F238E27FC236}">
+                <a16:creationId xmlns:a16="http://schemas.microsoft.com/office/drawing/2014/main" id="{18B0E3A8-5CF3-F01C-DF23-35A75ACBADE4}"/>
+              </a:ext>
+            </a:extLst>
+          </p:cNvPr>
+          <p:cNvSpPr/>
+          <p:nvPr/>
+        </p:nvSpPr>
+        <p:spPr>
+          <a:xfrm>
+            <a:off x="777240" y="4242181"/>
+            <a:ext cx="1371600" cy="548640"/>
+          </a:xfrm>
+          <a:prstGeom prst="rect">
+            <a:avLst/>
+          </a:prstGeom>
+          <a:noFill/>
+          <a:ln/>
+        </p:spPr>
+        <p:txBody>
+          <a:bodyPr wrap="square" rtlCol="0" anchor="ctr"/>
+          <a:lstStyle/>
+          <a:p>
+            <a:pPr marL="0" indent="0" algn="l" rtl="0">
+              <a:buNone/>
+            </a:pPr>
+            <a:r>
+              <a:rPr lang="en-US" sz="1600" b="1" dirty="0">
+                <a:solidFill>
+                  <a:srgbClr val="0F172A"/>
+                </a:solidFill>
+                <a:latin typeface="Calibri" pitchFamily="34" charset="0"/>
+                <a:ea typeface="Calibri" pitchFamily="34" charset="-122"/>
+                <a:cs typeface="Calibri" pitchFamily="34" charset="-120"/>
+              </a:rPr>
+              <a:t>Sentiment</a:t>
+            </a:r>
+            <a:endParaRPr lang="en-US" sz="1600" dirty="0"/>
+          </a:p>
+        </p:txBody>
+      </p:sp>
+      <p:sp>
+        <p:nvSpPr>
+          <p:cNvPr id="38" name="Text 33">
+            <a:extLst>
+              <a:ext uri="{FF2B5EF4-FFF2-40B4-BE49-F238E27FC236}">
+                <a16:creationId xmlns:a16="http://schemas.microsoft.com/office/drawing/2014/main" id="{BB4B723A-A3AF-EDD4-74D6-661837DBD1D5}"/>
+              </a:ext>
+            </a:extLst>
+          </p:cNvPr>
+          <p:cNvSpPr/>
+          <p:nvPr/>
+        </p:nvSpPr>
+        <p:spPr>
+          <a:xfrm>
+            <a:off x="2057400" y="5824728"/>
+            <a:ext cx="3931920" cy="548640"/>
+          </a:xfrm>
+          <a:prstGeom prst="rect">
+            <a:avLst/>
+          </a:prstGeom>
+          <a:noFill/>
+          <a:ln/>
+        </p:spPr>
+        <p:txBody>
+          <a:bodyPr wrap="square" rtlCol="0" anchor="ctr"/>
+          <a:lstStyle/>
+          <a:p>
+            <a:pPr marL="0" indent="0" algn="l" rtl="0">
+              <a:buNone/>
+            </a:pPr>
+            <a:r>
+              <a:rPr lang="en-US" sz="1400" dirty="0">
+                <a:solidFill>
+                  <a:srgbClr val="64748B"/>
+                </a:solidFill>
+                <a:latin typeface="Calibri" pitchFamily="34" charset="0"/>
+                <a:ea typeface="Calibri" pitchFamily="34" charset="-122"/>
+                <a:cs typeface="Calibri" pitchFamily="34" charset="-120"/>
+              </a:rPr>
+              <a:t>FinBERT headline tone</a:t>
+            </a:r>
+            <a:endParaRPr lang="en-US" sz="1400" dirty="0"/>
+          </a:p>
+        </p:txBody>
+      </p:sp>
+      <p:sp>
+        <p:nvSpPr>
+          <p:cNvPr id="39" name="Shape 34">
+            <a:extLst>
+              <a:ext uri="{FF2B5EF4-FFF2-40B4-BE49-F238E27FC236}">
+                <a16:creationId xmlns:a16="http://schemas.microsoft.com/office/drawing/2014/main" id="{9E9762A8-A263-93B1-CECC-F1FEBF98F71E}"/>
+              </a:ext>
+            </a:extLst>
+          </p:cNvPr>
+          <p:cNvSpPr/>
+          <p:nvPr/>
+        </p:nvSpPr>
+        <p:spPr>
+          <a:xfrm>
+            <a:off x="6477305" y="1486218"/>
+            <a:ext cx="5105095" cy="3703320"/>
+          </a:xfrm>
+          <a:prstGeom prst="roundRect">
+            <a:avLst/>
+          </a:prstGeom>
+          <a:solidFill>
+            <a:srgbClr val="F8FAFC"/>
+          </a:solidFill>
+          <a:ln w="12700">
+            <a:solidFill>
+              <a:srgbClr val="E2E8F0"/>
+            </a:solidFill>
+            <a:prstDash val="solid"/>
+          </a:ln>
+          <a:effectLst>
+            <a:outerShdw blurRad="38100" dist="12700" dir="2700000" algn="bl" rotWithShape="0">
+              <a:srgbClr val="000000">
+                <a:alpha val="12000"/>
+              </a:srgbClr>
+            </a:outerShdw>
+          </a:effectLst>
+        </p:spPr>
+        <p:txBody>
+          <a:bodyPr/>
+          <a:lstStyle/>
+          <a:p>
+            <a:pPr algn="l" rtl="0"/>
+            <a:endParaRPr lang="he-IL"/>
+          </a:p>
+        </p:txBody>
+      </p:sp>
+      <p:sp>
+        <p:nvSpPr>
+          <p:cNvPr id="40" name="Text 35">
+            <a:extLst>
+              <a:ext uri="{FF2B5EF4-FFF2-40B4-BE49-F238E27FC236}">
+                <a16:creationId xmlns:a16="http://schemas.microsoft.com/office/drawing/2014/main" id="{CB0625AF-0B4F-2906-B23F-FC4CE6D29DB6}"/>
+              </a:ext>
+            </a:extLst>
+          </p:cNvPr>
+          <p:cNvSpPr/>
+          <p:nvPr/>
+        </p:nvSpPr>
+        <p:spPr>
+          <a:xfrm>
+            <a:off x="6766560" y="1745869"/>
+            <a:ext cx="5212080" cy="274320"/>
+          </a:xfrm>
+          <a:prstGeom prst="rect">
+            <a:avLst/>
+          </a:prstGeom>
+          <a:noFill/>
+          <a:ln/>
+        </p:spPr>
+        <p:txBody>
+          <a:bodyPr wrap="square" rtlCol="0" anchor="ctr"/>
+          <a:lstStyle/>
+          <a:p>
+            <a:pPr marL="0" indent="0" algn="l" rtl="0">
+              <a:buNone/>
+            </a:pPr>
+            <a:r>
+              <a:rPr lang="en-US" sz="1800" b="1" dirty="0">
+                <a:solidFill>
+                  <a:srgbClr val="0F172A"/>
+                </a:solidFill>
+                <a:latin typeface="Calibri" pitchFamily="34" charset="0"/>
+                <a:ea typeface="Calibri" pitchFamily="34" charset="-122"/>
+                <a:cs typeface="Calibri" pitchFamily="34" charset="-120"/>
+              </a:rPr>
+              <a:t>Targets</a:t>
+            </a:r>
+            <a:endParaRPr lang="en-US" sz="1800" dirty="0"/>
+          </a:p>
+        </p:txBody>
+      </p:sp>
+      <p:sp>
+        <p:nvSpPr>
+          <p:cNvPr id="41" name="Text 36">
+            <a:extLst>
+              <a:ext uri="{FF2B5EF4-FFF2-40B4-BE49-F238E27FC236}">
+                <a16:creationId xmlns:a16="http://schemas.microsoft.com/office/drawing/2014/main" id="{FDD8D99D-132B-99C8-8022-751931B8B3EB}"/>
+              </a:ext>
+            </a:extLst>
+          </p:cNvPr>
+          <p:cNvSpPr/>
+          <p:nvPr/>
+        </p:nvSpPr>
+        <p:spPr>
+          <a:xfrm>
+            <a:off x="6812280" y="2180209"/>
+            <a:ext cx="5120640" cy="1097280"/>
+          </a:xfrm>
+          <a:prstGeom prst="rect">
+            <a:avLst/>
+          </a:prstGeom>
+          <a:noFill/>
+          <a:ln/>
+        </p:spPr>
+        <p:txBody>
+          <a:bodyPr wrap="square" rtlCol="0" anchor="t"/>
+          <a:lstStyle/>
+          <a:p>
+            <a:pPr marL="182880" indent="-182880" algn="l" rtl="0">
+              <a:spcAft>
+                <a:spcPts val="800"/>
+              </a:spcAft>
+              <a:buSzPct val="100000"/>
+              <a:buChar char="•"/>
+            </a:pPr>
+            <a:r>
+              <a:rPr lang="en-US" sz="1600" dirty="0">
+                <a:solidFill>
+                  <a:srgbClr val="111827"/>
+                </a:solidFill>
+                <a:latin typeface="Calibri" pitchFamily="34" charset="0"/>
+                <a:ea typeface="Calibri" pitchFamily="34" charset="-122"/>
+                <a:cs typeface="Calibri" pitchFamily="34" charset="-120"/>
+              </a:rPr>
+              <a:t>Regression: next-day log return</a:t>
+            </a:r>
+            <a:endParaRPr lang="en-US" sz="1600" dirty="0"/>
+          </a:p>
+          <a:p>
+            <a:pPr marL="182880" indent="-182880" algn="l" rtl="0">
+              <a:spcAft>
+                <a:spcPts val="800"/>
+              </a:spcAft>
+              <a:buSzPct val="100000"/>
+              <a:buChar char="•"/>
+            </a:pPr>
+            <a:r>
+              <a:rPr lang="en-US" sz="1600" dirty="0">
+                <a:solidFill>
+                  <a:srgbClr val="111827"/>
+                </a:solidFill>
+                <a:latin typeface="Calibri" pitchFamily="34" charset="0"/>
+                <a:ea typeface="Calibri" pitchFamily="34" charset="-122"/>
+                <a:cs typeface="Calibri" pitchFamily="34" charset="-120"/>
+              </a:rPr>
+              <a:t>Classification: direction (up/down)</a:t>
+            </a:r>
+            <a:endParaRPr lang="en-US" sz="1600" dirty="0"/>
+          </a:p>
+        </p:txBody>
+      </p:sp>
+      <p:sp>
+        <p:nvSpPr>
+          <p:cNvPr id="42" name="Text 37">
+            <a:extLst>
+              <a:ext uri="{FF2B5EF4-FFF2-40B4-BE49-F238E27FC236}">
+                <a16:creationId xmlns:a16="http://schemas.microsoft.com/office/drawing/2014/main" id="{2E532624-AD4A-CBD1-DE6D-0BC7B9E5A249}"/>
+              </a:ext>
+            </a:extLst>
+          </p:cNvPr>
+          <p:cNvSpPr/>
+          <p:nvPr/>
+        </p:nvSpPr>
+        <p:spPr>
+          <a:xfrm>
+            <a:off x="6812280" y="2998597"/>
+            <a:ext cx="4770120" cy="731520"/>
+          </a:xfrm>
+          <a:prstGeom prst="rect">
+            <a:avLst/>
+          </a:prstGeom>
+          <a:noFill/>
+          <a:ln/>
+        </p:spPr>
+        <p:txBody>
+          <a:bodyPr wrap="square" rtlCol="0" anchor="ctr"/>
+          <a:lstStyle/>
+          <a:p>
+            <a:pPr marL="0" indent="0" algn="l" rtl="0">
+              <a:buNone/>
+            </a:pPr>
+            <a:r>
+              <a:rPr lang="en-US" sz="1400" dirty="0">
+                <a:solidFill>
+                  <a:srgbClr val="64748B"/>
+                </a:solidFill>
+                <a:latin typeface="Calibri" pitchFamily="34" charset="0"/>
+                <a:ea typeface="Calibri" pitchFamily="34" charset="-122"/>
+                <a:cs typeface="Calibri" pitchFamily="34" charset="-120"/>
+              </a:rPr>
+              <a:t>Block design enables controlled comparisons (ablation-style).</a:t>
+            </a:r>
+            <a:endParaRPr lang="en-US" sz="1400" dirty="0"/>
+          </a:p>
+        </p:txBody>
+      </p:sp>
+    </p:spTree>
+    <p:extLst>
+      <p:ext uri="{BB962C8B-B14F-4D97-AF65-F5344CB8AC3E}">
+        <p14:creationId xmlns:p14="http://schemas.microsoft.com/office/powerpoint/2010/main" val="1897573739"/>
+      </p:ext>
+    </p:extLst>
+  </p:cSld>
+  <p:clrMapOvr>
+    <a:masterClrMapping/>
+  </p:clrMapOvr>
+</p:sld>
+</file>
+
+<file path=ppt/slides/slide11.xml><?xml version="1.0" encoding="utf-8"?>
+<p:sld xmlns:a="http://schemas.openxmlformats.org/drawingml/2006/main" xmlns:r="http://schemas.openxmlformats.org/officeDocument/2006/relationships" xmlns:p="http://schemas.openxmlformats.org/presentationml/2006/main">
+  <p:cSld>
+    <p:spTree>
+      <p:nvGrpSpPr>
+        <p:cNvPr id="1" name="">
+          <a:extLst>
+            <a:ext uri="{FF2B5EF4-FFF2-40B4-BE49-F238E27FC236}">
+              <a16:creationId xmlns:a16="http://schemas.microsoft.com/office/drawing/2014/main" id="{F355C819-D8BC-A41C-3053-3619F21D5FAA}"/>
+            </a:ext>
+          </a:extLst>
+        </p:cNvPr>
+        <p:cNvGrpSpPr/>
+        <p:nvPr/>
+      </p:nvGrpSpPr>
+      <p:grpSpPr>
+        <a:xfrm>
+          <a:off x="0" y="0"/>
+          <a:ext cx="0" cy="0"/>
+          <a:chOff x="0" y="0"/>
+          <a:chExt cx="0" cy="0"/>
+        </a:xfrm>
+      </p:grpSpPr>
+      <p:sp>
+        <p:nvSpPr>
+          <p:cNvPr id="2" name="מציין מיקום של תאריך 1">
+            <a:extLst>
+              <a:ext uri="{FF2B5EF4-FFF2-40B4-BE49-F238E27FC236}">
+                <a16:creationId xmlns:a16="http://schemas.microsoft.com/office/drawing/2014/main" id="{64BB56BF-01A4-A5BD-C8F1-AB23439E0516}"/>
+              </a:ext>
+            </a:extLst>
+          </p:cNvPr>
+          <p:cNvSpPr>
+            <a:spLocks noGrp="1"/>
+          </p:cNvSpPr>
+          <p:nvPr>
+            <p:ph type="dt" sz="half" idx="10"/>
+          </p:nvPr>
+        </p:nvSpPr>
+        <p:spPr/>
+        <p:txBody>
+          <a:bodyPr/>
+          <a:lstStyle/>
+          <a:p>
+            <a:fld id="{81A792BA-DE5A-904A-B48C-83C9489152F3}" type="datetime13">
+              <a:rPr lang="he-IL" smtClean="0"/>
+              <a:pPr/>
+              <a:t>17/1/2026</a:t>
+            </a:fld>
+            <a:endParaRPr lang="en-US" dirty="0">
+              <a:cs typeface="Calibri" panose="020F0502020204030204" pitchFamily="34" charset="0"/>
+            </a:endParaRPr>
+          </a:p>
+        </p:txBody>
+      </p:sp>
+      <p:sp>
+        <p:nvSpPr>
+          <p:cNvPr id="3" name="מציין מיקום של כותרת תחתונה 2">
+            <a:extLst>
+              <a:ext uri="{FF2B5EF4-FFF2-40B4-BE49-F238E27FC236}">
+                <a16:creationId xmlns:a16="http://schemas.microsoft.com/office/drawing/2014/main" id="{5FC3B9ED-B69F-6825-1FE4-7902963A9F4F}"/>
+              </a:ext>
+            </a:extLst>
+          </p:cNvPr>
+          <p:cNvSpPr>
+            <a:spLocks noGrp="1"/>
+          </p:cNvSpPr>
+          <p:nvPr>
+            <p:ph type="ftr" sz="quarter" idx="11"/>
+          </p:nvPr>
+        </p:nvSpPr>
+        <p:spPr/>
+        <p:txBody>
+          <a:bodyPr/>
+          <a:lstStyle/>
+          <a:p>
+            <a:r>
+              <a:rPr lang="en-US" sz="1200" kern="1200">
+                <a:solidFill>
+                  <a:schemeClr val="tx1">
+                    <a:tint val="75000"/>
+                  </a:schemeClr>
+                </a:solidFill>
+                <a:latin typeface="+mn-lt"/>
+                <a:ea typeface="+mn-ea"/>
+                <a:cs typeface="+mn-cs"/>
+              </a:rPr>
+              <a:t>Workshop in Data Science|Team 003| Final Presentation</a:t>
+            </a:r>
+            <a:endParaRPr lang="en-US" sz="1200" kern="1200" dirty="0">
+              <a:solidFill>
+                <a:schemeClr val="tx1">
+                  <a:tint val="75000"/>
+                </a:schemeClr>
+              </a:solidFill>
+              <a:latin typeface="+mn-lt"/>
+              <a:ea typeface="+mn-ea"/>
+              <a:cs typeface="+mn-cs"/>
+            </a:endParaRPr>
+          </a:p>
+        </p:txBody>
+      </p:sp>
+      <p:sp>
+        <p:nvSpPr>
+          <p:cNvPr id="4" name="מציין מיקום של מספר שקופית 3">
+            <a:extLst>
+              <a:ext uri="{FF2B5EF4-FFF2-40B4-BE49-F238E27FC236}">
+                <a16:creationId xmlns:a16="http://schemas.microsoft.com/office/drawing/2014/main" id="{09143A4D-2E2F-BDA0-D95A-A2394C8D08F0}"/>
+              </a:ext>
+            </a:extLst>
+          </p:cNvPr>
+          <p:cNvSpPr>
+            <a:spLocks noGrp="1"/>
+          </p:cNvSpPr>
+          <p:nvPr>
+            <p:ph type="sldNum" sz="quarter" idx="12"/>
+          </p:nvPr>
+        </p:nvSpPr>
+        <p:spPr/>
+        <p:txBody>
+          <a:bodyPr/>
+          <a:lstStyle/>
+          <a:p>
+            <a:fld id="{C1FF6DA9-008F-8B48-92A6-B652298478BF}" type="slidenum">
+              <a:rPr lang="en-US" smtClean="0"/>
+              <a:t>11</a:t>
+            </a:fld>
+            <a:endParaRPr lang="en-US" dirty="0"/>
+          </a:p>
+        </p:txBody>
+      </p:sp>
+      <p:sp>
+        <p:nvSpPr>
+          <p:cNvPr id="5" name="כותרת 4">
+            <a:extLst>
+              <a:ext uri="{FF2B5EF4-FFF2-40B4-BE49-F238E27FC236}">
+                <a16:creationId xmlns:a16="http://schemas.microsoft.com/office/drawing/2014/main" id="{E8AD9766-1F71-7FA3-A074-225F2655BC35}"/>
+              </a:ext>
+            </a:extLst>
+          </p:cNvPr>
+          <p:cNvSpPr>
+            <a:spLocks noGrp="1"/>
+          </p:cNvSpPr>
+          <p:nvPr>
+            <p:ph type="title"/>
+          </p:nvPr>
+        </p:nvSpPr>
+        <p:spPr/>
+        <p:txBody>
+          <a:bodyPr>
+            <a:normAutofit fontScale="90000"/>
+          </a:bodyPr>
+          <a:lstStyle/>
+          <a:p>
+            <a:r>
+              <a:rPr lang="en-US" dirty="0">
+                <a:solidFill>
+                  <a:srgbClr val="0F172A"/>
+                </a:solidFill>
+                <a:ea typeface="Calibri" panose="020F0502020204030204" pitchFamily="34" charset="0"/>
+              </a:rPr>
+              <a:t>Evaluation: the “no cheating” zone (walk-forward)</a:t>
+            </a:r>
+            <a:endParaRPr lang="he-IL" dirty="0"/>
+          </a:p>
+        </p:txBody>
+      </p:sp>
+      <p:sp>
+        <p:nvSpPr>
+          <p:cNvPr id="6" name="Shape 2">
+            <a:extLst>
+              <a:ext uri="{FF2B5EF4-FFF2-40B4-BE49-F238E27FC236}">
+                <a16:creationId xmlns:a16="http://schemas.microsoft.com/office/drawing/2014/main" id="{7395C914-DCEC-7642-7FCF-BCE233A4469F}"/>
+              </a:ext>
+            </a:extLst>
+          </p:cNvPr>
+          <p:cNvSpPr/>
+          <p:nvPr/>
+        </p:nvSpPr>
+        <p:spPr>
+          <a:xfrm>
+            <a:off x="548640" y="1143000"/>
+            <a:ext cx="11094415" cy="5120640"/>
+          </a:xfrm>
+          <a:prstGeom prst="roundRect">
+            <a:avLst/>
+          </a:prstGeom>
+          <a:solidFill>
+            <a:srgbClr val="F8FAFC"/>
+          </a:solidFill>
+          <a:ln w="12700">
+            <a:solidFill>
+              <a:srgbClr val="E2E8F0"/>
+            </a:solidFill>
+            <a:prstDash val="solid"/>
+          </a:ln>
+          <a:effectLst>
+            <a:outerShdw blurRad="38100" dist="12700" dir="2700000" algn="bl" rotWithShape="0">
+              <a:srgbClr val="000000">
+                <a:alpha val="12000"/>
+              </a:srgbClr>
+            </a:outerShdw>
+          </a:effectLst>
+        </p:spPr>
+        <p:txBody>
+          <a:bodyPr/>
+          <a:lstStyle/>
+          <a:p>
+            <a:pPr marL="0" algn="l" defTabSz="914400" rtl="0" eaLnBrk="1" latinLnBrk="0" hangingPunct="1"/>
+            <a:endParaRPr lang="he-IL"/>
+          </a:p>
+        </p:txBody>
+      </p:sp>
+      <p:sp>
+        <p:nvSpPr>
+          <p:cNvPr id="7" name="Text 3">
+            <a:extLst>
+              <a:ext uri="{FF2B5EF4-FFF2-40B4-BE49-F238E27FC236}">
+                <a16:creationId xmlns:a16="http://schemas.microsoft.com/office/drawing/2014/main" id="{41009FAB-BAE2-A5BC-3CC0-0D3DF22D197A}"/>
+              </a:ext>
+            </a:extLst>
+          </p:cNvPr>
+          <p:cNvSpPr/>
+          <p:nvPr/>
+        </p:nvSpPr>
+        <p:spPr>
+          <a:xfrm>
+            <a:off x="1005840" y="1463040"/>
+            <a:ext cx="914400" cy="365760"/>
+          </a:xfrm>
+          <a:prstGeom prst="rect">
+            <a:avLst/>
+          </a:prstGeom>
+          <a:noFill/>
+          <a:ln/>
+        </p:spPr>
+        <p:txBody>
+          <a:bodyPr wrap="square" rtlCol="0" anchor="ctr"/>
+          <a:lstStyle/>
+          <a:p>
+            <a:pPr marL="0" indent="0">
+              <a:buNone/>
+            </a:pPr>
+            <a:r>
+              <a:rPr lang="en-US" sz="1800" b="1" dirty="0">
+                <a:solidFill>
+                  <a:srgbClr val="0F172A"/>
+                </a:solidFill>
+                <a:latin typeface="Calibri" pitchFamily="34" charset="0"/>
+                <a:ea typeface="Calibri" pitchFamily="34" charset="-122"/>
+                <a:cs typeface="Calibri" pitchFamily="34" charset="-120"/>
+              </a:rPr>
+              <a:t>Why?</a:t>
+            </a:r>
+            <a:endParaRPr lang="en-US" sz="1800" dirty="0"/>
+          </a:p>
+        </p:txBody>
+      </p:sp>
+      <p:sp>
+        <p:nvSpPr>
+          <p:cNvPr id="8" name="Text 4">
+            <a:extLst>
+              <a:ext uri="{FF2B5EF4-FFF2-40B4-BE49-F238E27FC236}">
+                <a16:creationId xmlns:a16="http://schemas.microsoft.com/office/drawing/2014/main" id="{80B39BD6-AD6A-54B0-92BC-8B96ECEA70F9}"/>
+              </a:ext>
+            </a:extLst>
+          </p:cNvPr>
+          <p:cNvSpPr/>
+          <p:nvPr/>
+        </p:nvSpPr>
+        <p:spPr>
+          <a:xfrm>
+            <a:off x="-1295400" y="1508760"/>
+            <a:ext cx="9875520" cy="365760"/>
+          </a:xfrm>
+          <a:prstGeom prst="rect">
+            <a:avLst/>
+          </a:prstGeom>
+          <a:noFill/>
+          <a:ln/>
+        </p:spPr>
+        <p:txBody>
+          <a:bodyPr wrap="square" rtlCol="0" anchor="ctr"/>
+          <a:lstStyle/>
+          <a:p>
+            <a:pPr marL="0" indent="0">
+              <a:buNone/>
+            </a:pPr>
+            <a:r>
+              <a:rPr lang="en-US" sz="1600" dirty="0">
+                <a:solidFill>
+                  <a:srgbClr val="64748B"/>
+                </a:solidFill>
+                <a:latin typeface="Calibri" pitchFamily="34" charset="0"/>
+                <a:ea typeface="Calibri" pitchFamily="34" charset="-122"/>
+                <a:cs typeface="Calibri" pitchFamily="34" charset="-120"/>
+              </a:rPr>
+              <a:t>Random splits leak future information in time-series.</a:t>
+            </a:r>
+            <a:endParaRPr lang="en-US" sz="1600" dirty="0"/>
+          </a:p>
+        </p:txBody>
+      </p:sp>
+      <p:sp>
+        <p:nvSpPr>
+          <p:cNvPr id="9" name="Text 5">
+            <a:extLst>
+              <a:ext uri="{FF2B5EF4-FFF2-40B4-BE49-F238E27FC236}">
+                <a16:creationId xmlns:a16="http://schemas.microsoft.com/office/drawing/2014/main" id="{8C7247B7-4D8A-D2A2-8EA8-03F9A3E92754}"/>
+              </a:ext>
+            </a:extLst>
+          </p:cNvPr>
+          <p:cNvSpPr/>
+          <p:nvPr/>
+        </p:nvSpPr>
+        <p:spPr>
+          <a:xfrm>
+            <a:off x="1097280" y="1920240"/>
+            <a:ext cx="914400" cy="228600"/>
+          </a:xfrm>
+          <a:prstGeom prst="rect">
+            <a:avLst/>
+          </a:prstGeom>
+          <a:noFill/>
+          <a:ln/>
+        </p:spPr>
+        <p:txBody>
+          <a:bodyPr wrap="square" rtlCol="0" anchor="ctr"/>
+          <a:lstStyle/>
+          <a:p>
+            <a:pPr marL="0" indent="0">
+              <a:buNone/>
+            </a:pPr>
+            <a:r>
+              <a:rPr lang="en-US" sz="1400" dirty="0">
+                <a:solidFill>
+                  <a:srgbClr val="64748B"/>
+                </a:solidFill>
+                <a:latin typeface="Calibri" pitchFamily="34" charset="0"/>
+                <a:ea typeface="Calibri" pitchFamily="34" charset="-122"/>
+                <a:cs typeface="Calibri" pitchFamily="34" charset="-120"/>
+              </a:rPr>
+              <a:t>Fold 1</a:t>
+            </a:r>
+            <a:endParaRPr lang="en-US" sz="1400" dirty="0"/>
+          </a:p>
+        </p:txBody>
+      </p:sp>
+      <p:sp>
+        <p:nvSpPr>
+          <p:cNvPr id="10" name="Shape 6">
+            <a:extLst>
+              <a:ext uri="{FF2B5EF4-FFF2-40B4-BE49-F238E27FC236}">
+                <a16:creationId xmlns:a16="http://schemas.microsoft.com/office/drawing/2014/main" id="{A3A7400D-E752-357F-A59D-360A7DAB60BA}"/>
+              </a:ext>
+            </a:extLst>
+          </p:cNvPr>
+          <p:cNvSpPr/>
+          <p:nvPr/>
+        </p:nvSpPr>
+        <p:spPr>
+          <a:xfrm>
+            <a:off x="1097280" y="2240280"/>
+            <a:ext cx="6248210" cy="640080"/>
+          </a:xfrm>
+          <a:prstGeom prst="roundRect">
+            <a:avLst/>
+          </a:prstGeom>
+          <a:solidFill>
+            <a:srgbClr val="E0F2FE"/>
+          </a:solidFill>
+          <a:ln w="12700">
+            <a:solidFill>
+              <a:srgbClr val="E2E8F0"/>
+            </a:solidFill>
+            <a:prstDash val="solid"/>
+          </a:ln>
+        </p:spPr>
+        <p:txBody>
+          <a:bodyPr/>
+          <a:lstStyle/>
+          <a:p>
+            <a:endParaRPr lang="he-IL"/>
+          </a:p>
+        </p:txBody>
+      </p:sp>
+      <p:sp>
+        <p:nvSpPr>
+          <p:cNvPr id="11" name="Text 7">
+            <a:extLst>
+              <a:ext uri="{FF2B5EF4-FFF2-40B4-BE49-F238E27FC236}">
+                <a16:creationId xmlns:a16="http://schemas.microsoft.com/office/drawing/2014/main" id="{744A36C1-B7FF-CA12-7691-523D1ADDBF3B}"/>
+              </a:ext>
+            </a:extLst>
+          </p:cNvPr>
+          <p:cNvSpPr/>
+          <p:nvPr/>
+        </p:nvSpPr>
+        <p:spPr>
+          <a:xfrm>
+            <a:off x="1097280" y="2404872"/>
+            <a:ext cx="6248210" cy="640080"/>
+          </a:xfrm>
+          <a:prstGeom prst="rect">
+            <a:avLst/>
+          </a:prstGeom>
+          <a:noFill/>
+          <a:ln/>
+        </p:spPr>
+        <p:txBody>
+          <a:bodyPr wrap="square" rtlCol="0" anchor="ctr"/>
+          <a:lstStyle/>
+          <a:p>
+            <a:pPr marL="0" indent="0" algn="ctr">
+              <a:buNone/>
+            </a:pPr>
+            <a:r>
+              <a:rPr lang="en-US" sz="1200" dirty="0">
+                <a:solidFill>
+                  <a:srgbClr val="0F172A"/>
+                </a:solidFill>
+                <a:latin typeface="Calibri" pitchFamily="34" charset="0"/>
+                <a:ea typeface="Calibri" pitchFamily="34" charset="-122"/>
+                <a:cs typeface="Calibri" pitchFamily="34" charset="-120"/>
+              </a:rPr>
+              <a:t>Train</a:t>
+            </a:r>
+            <a:endParaRPr lang="en-US" sz="1200" dirty="0"/>
+          </a:p>
+        </p:txBody>
+      </p:sp>
+      <p:sp>
+        <p:nvSpPr>
+          <p:cNvPr id="12" name="Shape 8">
+            <a:extLst>
+              <a:ext uri="{FF2B5EF4-FFF2-40B4-BE49-F238E27FC236}">
+                <a16:creationId xmlns:a16="http://schemas.microsoft.com/office/drawing/2014/main" id="{AA8139F8-8F0F-D586-C4CC-351E9055AB7C}"/>
+              </a:ext>
+            </a:extLst>
+          </p:cNvPr>
+          <p:cNvSpPr/>
+          <p:nvPr/>
+        </p:nvSpPr>
+        <p:spPr>
+          <a:xfrm>
+            <a:off x="7512108" y="2240280"/>
+            <a:ext cx="1666189" cy="640080"/>
+          </a:xfrm>
+          <a:prstGeom prst="roundRect">
+            <a:avLst/>
+          </a:prstGeom>
+          <a:solidFill>
+            <a:srgbClr val="DCFCE7"/>
+          </a:solidFill>
+          <a:ln w="12700">
+            <a:solidFill>
+              <a:srgbClr val="E2E8F0"/>
+            </a:solidFill>
+            <a:prstDash val="solid"/>
+          </a:ln>
+        </p:spPr>
+        <p:txBody>
+          <a:bodyPr/>
+          <a:lstStyle/>
+          <a:p>
+            <a:endParaRPr lang="he-IL"/>
+          </a:p>
+        </p:txBody>
+      </p:sp>
+      <p:sp>
+        <p:nvSpPr>
+          <p:cNvPr id="13" name="Text 9">
+            <a:extLst>
+              <a:ext uri="{FF2B5EF4-FFF2-40B4-BE49-F238E27FC236}">
+                <a16:creationId xmlns:a16="http://schemas.microsoft.com/office/drawing/2014/main" id="{2F89F957-3985-D5B0-BBDB-56F4AA19EDC4}"/>
+              </a:ext>
+            </a:extLst>
+          </p:cNvPr>
+          <p:cNvSpPr/>
+          <p:nvPr/>
+        </p:nvSpPr>
+        <p:spPr>
+          <a:xfrm>
+            <a:off x="7512108" y="2404872"/>
+            <a:ext cx="1666189" cy="640080"/>
+          </a:xfrm>
+          <a:prstGeom prst="rect">
+            <a:avLst/>
+          </a:prstGeom>
+          <a:noFill/>
+          <a:ln/>
+        </p:spPr>
+        <p:txBody>
+          <a:bodyPr wrap="square" rtlCol="0" anchor="ctr"/>
+          <a:lstStyle/>
+          <a:p>
+            <a:pPr marL="0" indent="0" algn="ctr">
+              <a:buNone/>
+            </a:pPr>
+            <a:r>
+              <a:rPr lang="en-US" sz="1200" dirty="0">
+                <a:solidFill>
+                  <a:srgbClr val="0F172A"/>
+                </a:solidFill>
+                <a:latin typeface="Calibri" pitchFamily="34" charset="0"/>
+                <a:ea typeface="Calibri" pitchFamily="34" charset="-122"/>
+                <a:cs typeface="Calibri" pitchFamily="34" charset="-120"/>
+              </a:rPr>
+              <a:t>Test</a:t>
+            </a:r>
+            <a:endParaRPr lang="en-US" sz="1200" dirty="0"/>
+          </a:p>
+        </p:txBody>
+      </p:sp>
+      <p:sp>
+        <p:nvSpPr>
+          <p:cNvPr id="14" name="Shape 10">
+            <a:extLst>
+              <a:ext uri="{FF2B5EF4-FFF2-40B4-BE49-F238E27FC236}">
+                <a16:creationId xmlns:a16="http://schemas.microsoft.com/office/drawing/2014/main" id="{A52DE199-868A-BA98-351F-2F8F36C9074A}"/>
+              </a:ext>
+            </a:extLst>
+          </p:cNvPr>
+          <p:cNvSpPr/>
+          <p:nvPr/>
+        </p:nvSpPr>
+        <p:spPr>
+          <a:xfrm>
+            <a:off x="9344917" y="2240280"/>
+            <a:ext cx="1749499" cy="640080"/>
+          </a:xfrm>
+          <a:prstGeom prst="roundRect">
+            <a:avLst/>
+          </a:prstGeom>
+          <a:solidFill>
+            <a:srgbClr val="F1F5F9"/>
+          </a:solidFill>
+          <a:ln w="12700">
+            <a:solidFill>
+              <a:srgbClr val="E2E8F0"/>
+            </a:solidFill>
+            <a:prstDash val="solid"/>
+          </a:ln>
+        </p:spPr>
+        <p:txBody>
+          <a:bodyPr/>
+          <a:lstStyle/>
+          <a:p>
+            <a:endParaRPr lang="he-IL"/>
+          </a:p>
+        </p:txBody>
+      </p:sp>
+      <p:sp>
+        <p:nvSpPr>
+          <p:cNvPr id="15" name="Text 11">
+            <a:extLst>
+              <a:ext uri="{FF2B5EF4-FFF2-40B4-BE49-F238E27FC236}">
+                <a16:creationId xmlns:a16="http://schemas.microsoft.com/office/drawing/2014/main" id="{1C98A923-38CA-10D6-02B4-D6CE7AFB7DC7}"/>
+              </a:ext>
+            </a:extLst>
+          </p:cNvPr>
+          <p:cNvSpPr/>
+          <p:nvPr/>
+        </p:nvSpPr>
+        <p:spPr>
+          <a:xfrm>
+            <a:off x="9344917" y="2404872"/>
+            <a:ext cx="1749499" cy="640080"/>
+          </a:xfrm>
+          <a:prstGeom prst="rect">
+            <a:avLst/>
+          </a:prstGeom>
+          <a:noFill/>
+          <a:ln/>
+        </p:spPr>
+        <p:txBody>
+          <a:bodyPr wrap="square" rtlCol="0" anchor="ctr"/>
+          <a:lstStyle/>
+          <a:p>
+            <a:pPr marL="0" indent="0" algn="ctr">
+              <a:buNone/>
+            </a:pPr>
+            <a:r>
+              <a:rPr lang="en-US" sz="1200" dirty="0">
+                <a:solidFill>
+                  <a:srgbClr val="64748B"/>
+                </a:solidFill>
+                <a:latin typeface="Calibri" pitchFamily="34" charset="0"/>
+                <a:ea typeface="Calibri" pitchFamily="34" charset="-122"/>
+                <a:cs typeface="Calibri" pitchFamily="34" charset="-120"/>
+              </a:rPr>
+              <a:t>Future</a:t>
+            </a:r>
+            <a:endParaRPr lang="en-US" sz="1200" dirty="0"/>
+          </a:p>
+        </p:txBody>
+      </p:sp>
+      <p:sp>
+        <p:nvSpPr>
+          <p:cNvPr id="16" name="Text 12">
+            <a:extLst>
+              <a:ext uri="{FF2B5EF4-FFF2-40B4-BE49-F238E27FC236}">
+                <a16:creationId xmlns:a16="http://schemas.microsoft.com/office/drawing/2014/main" id="{5E6F795C-8545-1CF8-FC68-795A246A997C}"/>
+              </a:ext>
+            </a:extLst>
+          </p:cNvPr>
+          <p:cNvSpPr/>
+          <p:nvPr/>
+        </p:nvSpPr>
+        <p:spPr>
+          <a:xfrm>
+            <a:off x="1097280" y="2971800"/>
+            <a:ext cx="2286000" cy="228600"/>
+          </a:xfrm>
+          <a:prstGeom prst="rect">
+            <a:avLst/>
+          </a:prstGeom>
+          <a:noFill/>
+          <a:ln/>
+        </p:spPr>
+        <p:txBody>
+          <a:bodyPr wrap="square" rtlCol="0" anchor="ctr"/>
+          <a:lstStyle/>
+          <a:p>
+            <a:pPr marL="0" indent="0">
+              <a:buNone/>
+            </a:pPr>
+            <a:r>
+              <a:rPr lang="en-US" sz="1400" dirty="0">
+                <a:solidFill>
+                  <a:srgbClr val="64748B"/>
+                </a:solidFill>
+                <a:latin typeface="Calibri" pitchFamily="34" charset="0"/>
+                <a:ea typeface="Calibri" pitchFamily="34" charset="-122"/>
+                <a:cs typeface="Calibri" pitchFamily="34" charset="-120"/>
+              </a:rPr>
+              <a:t>Fold 2 (expands)</a:t>
+            </a:r>
+            <a:endParaRPr lang="en-US" sz="1400" dirty="0"/>
+          </a:p>
+        </p:txBody>
+      </p:sp>
+      <p:sp>
+        <p:nvSpPr>
+          <p:cNvPr id="17" name="Shape 13">
+            <a:extLst>
+              <a:ext uri="{FF2B5EF4-FFF2-40B4-BE49-F238E27FC236}">
+                <a16:creationId xmlns:a16="http://schemas.microsoft.com/office/drawing/2014/main" id="{8B8F2F8C-D1B4-24E2-8CA2-F16A195B1B2C}"/>
+              </a:ext>
+            </a:extLst>
+          </p:cNvPr>
+          <p:cNvSpPr/>
+          <p:nvPr/>
+        </p:nvSpPr>
+        <p:spPr>
+          <a:xfrm>
+            <a:off x="1097280" y="3291840"/>
+            <a:ext cx="7914399" cy="640080"/>
+          </a:xfrm>
+          <a:prstGeom prst="roundRect">
+            <a:avLst/>
+          </a:prstGeom>
+          <a:solidFill>
+            <a:srgbClr val="E0F2FE"/>
+          </a:solidFill>
+          <a:ln w="12700">
+            <a:solidFill>
+              <a:srgbClr val="E2E8F0"/>
+            </a:solidFill>
+            <a:prstDash val="solid"/>
+          </a:ln>
+        </p:spPr>
+        <p:txBody>
+          <a:bodyPr/>
+          <a:lstStyle/>
+          <a:p>
+            <a:endParaRPr lang="he-IL"/>
+          </a:p>
+        </p:txBody>
+      </p:sp>
+      <p:sp>
+        <p:nvSpPr>
+          <p:cNvPr id="18" name="Text 14">
+            <a:extLst>
+              <a:ext uri="{FF2B5EF4-FFF2-40B4-BE49-F238E27FC236}">
+                <a16:creationId xmlns:a16="http://schemas.microsoft.com/office/drawing/2014/main" id="{F16C4ED2-CCC6-340C-02D1-7F0DF5DD5232}"/>
+              </a:ext>
+            </a:extLst>
+          </p:cNvPr>
+          <p:cNvSpPr/>
+          <p:nvPr/>
+        </p:nvSpPr>
+        <p:spPr>
+          <a:xfrm>
+            <a:off x="1097280" y="3456432"/>
+            <a:ext cx="7914399" cy="640080"/>
+          </a:xfrm>
+          <a:prstGeom prst="rect">
+            <a:avLst/>
+          </a:prstGeom>
+          <a:noFill/>
+          <a:ln/>
+        </p:spPr>
+        <p:txBody>
+          <a:bodyPr wrap="square" rtlCol="0" anchor="ctr"/>
+          <a:lstStyle/>
+          <a:p>
+            <a:pPr marL="0" indent="0" algn="ctr">
+              <a:buNone/>
+            </a:pPr>
+            <a:r>
+              <a:rPr lang="en-US" sz="1200" dirty="0">
+                <a:solidFill>
+                  <a:srgbClr val="0F172A"/>
+                </a:solidFill>
+                <a:latin typeface="Calibri" pitchFamily="34" charset="0"/>
+                <a:ea typeface="Calibri" pitchFamily="34" charset="-122"/>
+                <a:cs typeface="Calibri" pitchFamily="34" charset="-120"/>
+              </a:rPr>
+              <a:t>Train</a:t>
+            </a:r>
+            <a:endParaRPr lang="en-US" sz="1200" dirty="0"/>
+          </a:p>
+        </p:txBody>
+      </p:sp>
+      <p:sp>
+        <p:nvSpPr>
+          <p:cNvPr id="19" name="Shape 15">
+            <a:extLst>
+              <a:ext uri="{FF2B5EF4-FFF2-40B4-BE49-F238E27FC236}">
+                <a16:creationId xmlns:a16="http://schemas.microsoft.com/office/drawing/2014/main" id="{DAEC530B-A739-4280-6E24-856391423735}"/>
+              </a:ext>
+            </a:extLst>
+          </p:cNvPr>
+          <p:cNvSpPr/>
+          <p:nvPr/>
+        </p:nvSpPr>
+        <p:spPr>
+          <a:xfrm>
+            <a:off x="9178298" y="3291840"/>
+            <a:ext cx="1666189" cy="640080"/>
+          </a:xfrm>
+          <a:prstGeom prst="roundRect">
+            <a:avLst/>
+          </a:prstGeom>
+          <a:solidFill>
+            <a:srgbClr val="DCFCE7"/>
+          </a:solidFill>
+          <a:ln w="12700">
+            <a:solidFill>
+              <a:srgbClr val="E2E8F0"/>
+            </a:solidFill>
+            <a:prstDash val="solid"/>
+          </a:ln>
+        </p:spPr>
+        <p:txBody>
+          <a:bodyPr/>
+          <a:lstStyle/>
+          <a:p>
+            <a:endParaRPr lang="he-IL"/>
+          </a:p>
+        </p:txBody>
+      </p:sp>
+      <p:sp>
+        <p:nvSpPr>
+          <p:cNvPr id="20" name="Text 16">
+            <a:extLst>
+              <a:ext uri="{FF2B5EF4-FFF2-40B4-BE49-F238E27FC236}">
+                <a16:creationId xmlns:a16="http://schemas.microsoft.com/office/drawing/2014/main" id="{4F9B4E87-AEC4-D03F-0B02-0BE874F6FCAA}"/>
+              </a:ext>
+            </a:extLst>
+          </p:cNvPr>
+          <p:cNvSpPr/>
+          <p:nvPr/>
+        </p:nvSpPr>
+        <p:spPr>
+          <a:xfrm>
+            <a:off x="9178298" y="3456432"/>
+            <a:ext cx="1666189" cy="640080"/>
+          </a:xfrm>
+          <a:prstGeom prst="rect">
+            <a:avLst/>
+          </a:prstGeom>
+          <a:noFill/>
+          <a:ln/>
+        </p:spPr>
+        <p:txBody>
+          <a:bodyPr wrap="square" rtlCol="0" anchor="ctr"/>
+          <a:lstStyle/>
+          <a:p>
+            <a:pPr marL="0" indent="0" algn="ctr">
+              <a:buNone/>
+            </a:pPr>
+            <a:r>
+              <a:rPr lang="en-US" sz="1200" dirty="0">
+                <a:solidFill>
+                  <a:srgbClr val="0F172A"/>
+                </a:solidFill>
+                <a:latin typeface="Calibri" pitchFamily="34" charset="0"/>
+                <a:ea typeface="Calibri" pitchFamily="34" charset="-122"/>
+                <a:cs typeface="Calibri" pitchFamily="34" charset="-120"/>
+              </a:rPr>
+              <a:t>Test</a:t>
+            </a:r>
+            <a:endParaRPr lang="en-US" sz="1200" dirty="0"/>
+          </a:p>
+        </p:txBody>
+      </p:sp>
+      <p:sp>
+        <p:nvSpPr>
+          <p:cNvPr id="21" name="Text 17">
+            <a:extLst>
+              <a:ext uri="{FF2B5EF4-FFF2-40B4-BE49-F238E27FC236}">
+                <a16:creationId xmlns:a16="http://schemas.microsoft.com/office/drawing/2014/main" id="{C2FF5DB4-343A-D949-FAE3-9D44E0D1BBC7}"/>
+              </a:ext>
+            </a:extLst>
+          </p:cNvPr>
+          <p:cNvSpPr/>
+          <p:nvPr/>
+        </p:nvSpPr>
+        <p:spPr>
+          <a:xfrm>
+            <a:off x="1097280" y="4251960"/>
+            <a:ext cx="9997135" cy="365760"/>
+          </a:xfrm>
+          <a:prstGeom prst="rect">
+            <a:avLst/>
+          </a:prstGeom>
+          <a:noFill/>
+          <a:ln/>
+        </p:spPr>
+        <p:txBody>
+          <a:bodyPr wrap="square" rtlCol="0" anchor="ctr"/>
+          <a:lstStyle/>
+          <a:p>
+            <a:pPr marL="0" indent="0" algn="l" rtl="0">
+              <a:buNone/>
+            </a:pPr>
+            <a:r>
+              <a:rPr lang="en-US" sz="1600" dirty="0">
+                <a:solidFill>
+                  <a:srgbClr val="0F172A"/>
+                </a:solidFill>
+                <a:latin typeface="Calibri" pitchFamily="34" charset="0"/>
+                <a:ea typeface="Calibri" pitchFamily="34" charset="-122"/>
+                <a:cs typeface="Calibri" pitchFamily="34" charset="-120"/>
+              </a:rPr>
+              <a:t>This mimics real deployment: train on past → predict immediate future.</a:t>
+            </a:r>
+            <a:endParaRPr lang="en-US" sz="1600" dirty="0"/>
+          </a:p>
+        </p:txBody>
+      </p:sp>
+      <p:sp>
+        <p:nvSpPr>
+          <p:cNvPr id="22" name="Text 18">
+            <a:extLst>
+              <a:ext uri="{FF2B5EF4-FFF2-40B4-BE49-F238E27FC236}">
+                <a16:creationId xmlns:a16="http://schemas.microsoft.com/office/drawing/2014/main" id="{75F89760-00D1-F28D-DF19-CBFF5BD911B2}"/>
+              </a:ext>
+            </a:extLst>
+          </p:cNvPr>
+          <p:cNvSpPr/>
+          <p:nvPr/>
+        </p:nvSpPr>
+        <p:spPr>
+          <a:xfrm>
+            <a:off x="1097280" y="4617720"/>
+            <a:ext cx="9997135" cy="320040"/>
+          </a:xfrm>
+          <a:prstGeom prst="rect">
+            <a:avLst/>
+          </a:prstGeom>
+          <a:noFill/>
+          <a:ln/>
+        </p:spPr>
+        <p:txBody>
+          <a:bodyPr wrap="square" rtlCol="0" anchor="ctr"/>
+          <a:lstStyle/>
+          <a:p>
+            <a:pPr marL="0" indent="0" algn="l" rtl="0">
+              <a:buNone/>
+            </a:pPr>
+            <a:r>
+              <a:rPr lang="en-US" sz="1400" dirty="0">
+                <a:solidFill>
+                  <a:srgbClr val="64748B"/>
+                </a:solidFill>
+                <a:latin typeface="Calibri" pitchFamily="34" charset="0"/>
+                <a:ea typeface="Calibri" pitchFamily="34" charset="-122"/>
+                <a:cs typeface="Calibri" pitchFamily="34" charset="-120"/>
+              </a:rPr>
+              <a:t>We aggregate results across folds (mean ± std) to assess stability.</a:t>
+            </a:r>
+            <a:endParaRPr lang="en-US" sz="1400" dirty="0"/>
+          </a:p>
+        </p:txBody>
+      </p:sp>
+    </p:spTree>
+    <p:extLst>
+      <p:ext uri="{BB962C8B-B14F-4D97-AF65-F5344CB8AC3E}">
+        <p14:creationId xmlns:p14="http://schemas.microsoft.com/office/powerpoint/2010/main" val="4011506032"/>
+      </p:ext>
+    </p:extLst>
+  </p:cSld>
+  <p:clrMapOvr>
+    <a:masterClrMapping/>
+  </p:clrMapOvr>
+</p:sld>
+</file>
+
+<file path=ppt/slides/slide12.xml><?xml version="1.0" encoding="utf-8"?>
+<p:sld xmlns:a="http://schemas.openxmlformats.org/drawingml/2006/main" xmlns:r="http://schemas.openxmlformats.org/officeDocument/2006/relationships" xmlns:p="http://schemas.openxmlformats.org/presentationml/2006/main">
+  <p:cSld>
+    <p:spTree>
+      <p:nvGrpSpPr>
         <p:cNvPr id="1" name=""/>
         <p:cNvGrpSpPr/>
         <p:nvPr/>
@@ -9181,7 +11532,7 @@
             <a:fld id="{81A792BA-DE5A-904A-B48C-83C9489152F3}" type="datetime13">
               <a:rPr lang="he-IL" smtClean="0"/>
               <a:pPr/>
-              <a:t>16/1/2026</a:t>
+              <a:t>17/1/2026</a:t>
             </a:fld>
             <a:endParaRPr lang="en-US" dirty="0">
               <a:cs typeface="Calibri" panose="020F0502020204030204" pitchFamily="34" charset="0"/>
@@ -9259,7 +11610,7 @@
           <a:p>
             <a:fld id="{C1FF6DA9-008F-8B48-92A6-B652298478BF}" type="slidenum">
               <a:rPr lang="en-US" smtClean="0"/>
-              <a:t>10</a:t>
+              <a:t>12</a:t>
             </a:fld>
             <a:endParaRPr lang="en-US" dirty="0"/>
           </a:p>
@@ -11225,7 +13576,7 @@
 </p:sld>
 </file>
 
-<file path=ppt/slides/slide11.xml><?xml version="1.0" encoding="utf-8"?>
+<file path=ppt/slides/slide13.xml><?xml version="1.0" encoding="utf-8"?>
 <p:sld xmlns:a="http://schemas.openxmlformats.org/drawingml/2006/main" xmlns:r="http://schemas.openxmlformats.org/officeDocument/2006/relationships" xmlns:p="http://schemas.openxmlformats.org/presentationml/2006/main">
   <p:cSld>
     <p:spTree>
@@ -11266,7 +13617,7 @@
             <a:fld id="{81A792BA-DE5A-904A-B48C-83C9489152F3}" type="datetime13">
               <a:rPr lang="he-IL" smtClean="0"/>
               <a:pPr/>
-              <a:t>16/1/2026</a:t>
+              <a:t>17/1/2026</a:t>
             </a:fld>
             <a:endParaRPr lang="en-US" dirty="0">
               <a:cs typeface="Calibri" panose="020F0502020204030204" pitchFamily="34" charset="0"/>
@@ -11344,7 +13695,7 @@
           <a:p>
             <a:fld id="{C1FF6DA9-008F-8B48-92A6-B652298478BF}" type="slidenum">
               <a:rPr lang="en-US" smtClean="0"/>
-              <a:t>11</a:t>
+              <a:t>13</a:t>
             </a:fld>
             <a:endParaRPr lang="en-US" dirty="0"/>
           </a:p>
@@ -11716,7 +14067,7 @@
 </p:sld>
 </file>
 
-<file path=ppt/slides/slide12.xml><?xml version="1.0" encoding="utf-8"?>
+<file path=ppt/slides/slide14.xml><?xml version="1.0" encoding="utf-8"?>
 <p:sld xmlns:a="http://schemas.openxmlformats.org/drawingml/2006/main" xmlns:r="http://schemas.openxmlformats.org/officeDocument/2006/relationships" xmlns:p="http://schemas.openxmlformats.org/presentationml/2006/main">
   <p:cSld>
     <p:spTree>
@@ -11763,7 +14114,7 @@
             <a:fld id="{81A792BA-DE5A-904A-B48C-83C9489152F3}" type="datetime13">
               <a:rPr lang="he-IL" smtClean="0"/>
               <a:pPr/>
-              <a:t>16/1/2026</a:t>
+              <a:t>17/1/2026</a:t>
             </a:fld>
             <a:endParaRPr lang="en-US" dirty="0">
               <a:cs typeface="Calibri" panose="020F0502020204030204" pitchFamily="34" charset="0"/>
@@ -11841,7 +14192,7 @@
           <a:p>
             <a:fld id="{C1FF6DA9-008F-8B48-92A6-B652298478BF}" type="slidenum">
               <a:rPr lang="en-US" smtClean="0"/>
-              <a:t>12</a:t>
+              <a:t>14</a:t>
             </a:fld>
             <a:endParaRPr lang="en-US" dirty="0"/>
           </a:p>
@@ -13775,7 +16126,7 @@
 </p:sld>
 </file>
 
-<file path=ppt/slides/slide13.xml><?xml version="1.0" encoding="utf-8"?>
+<file path=ppt/slides/slide15.xml><?xml version="1.0" encoding="utf-8"?>
 <p:sld xmlns:a="http://schemas.openxmlformats.org/drawingml/2006/main" xmlns:r="http://schemas.openxmlformats.org/officeDocument/2006/relationships" xmlns:p="http://schemas.openxmlformats.org/presentationml/2006/main">
   <p:cSld>
     <p:spTree>
@@ -13816,7 +16167,7 @@
             <a:fld id="{81A792BA-DE5A-904A-B48C-83C9489152F3}" type="datetime13">
               <a:rPr lang="he-IL" smtClean="0"/>
               <a:pPr/>
-              <a:t>16/1/2026</a:t>
+              <a:t>17/1/2026</a:t>
             </a:fld>
             <a:endParaRPr lang="en-US" dirty="0">
               <a:cs typeface="Calibri" panose="020F0502020204030204" pitchFamily="34" charset="0"/>
@@ -13894,7 +16245,7 @@
           <a:p>
             <a:fld id="{C1FF6DA9-008F-8B48-92A6-B652298478BF}" type="slidenum">
               <a:rPr lang="en-US" smtClean="0"/>
-              <a:t>13</a:t>
+              <a:t>15</a:t>
             </a:fld>
             <a:endParaRPr lang="en-US" dirty="0"/>
           </a:p>
@@ -13971,7 +16322,7 @@
 </p:sld>
 </file>
 
-<file path=ppt/slides/slide14.xml><?xml version="1.0" encoding="utf-8"?>
+<file path=ppt/slides/slide16.xml><?xml version="1.0" encoding="utf-8"?>
 <p:sld xmlns:a="http://schemas.openxmlformats.org/drawingml/2006/main" xmlns:r="http://schemas.openxmlformats.org/officeDocument/2006/relationships" xmlns:p="http://schemas.openxmlformats.org/presentationml/2006/main">
   <p:cSld>
     <p:spTree>
@@ -14011,7 +16362,7 @@
           <a:p>
             <a:fld id="{81A792BA-DE5A-904A-B48C-83C9489152F3}" type="datetime13">
               <a:rPr lang="he-IL" smtClean="0"/>
-              <a:t>16/1/2026</a:t>
+              <a:t>17/1/2026</a:t>
             </a:fld>
             <a:endParaRPr lang="en-US" dirty="0"/>
           </a:p>
@@ -14068,7 +16419,7 @@
           <a:p>
             <a:fld id="{C1FF6DA9-008F-8B48-92A6-B652298478BF}" type="slidenum">
               <a:rPr lang="en-US" smtClean="0"/>
-              <a:t>14</a:t>
+              <a:t>16</a:t>
             </a:fld>
             <a:endParaRPr lang="en-US"/>
           </a:p>
@@ -14129,7 +16480,7 @@
 </p:sld>
 </file>
 
-<file path=ppt/slides/slide15.xml><?xml version="1.0" encoding="utf-8"?>
+<file path=ppt/slides/slide17.xml><?xml version="1.0" encoding="utf-8"?>
 <p:sld xmlns:a="http://schemas.openxmlformats.org/drawingml/2006/main" xmlns:r="http://schemas.openxmlformats.org/officeDocument/2006/relationships" xmlns:p="http://schemas.openxmlformats.org/presentationml/2006/main">
   <p:cSld>
     <p:spTree>
@@ -14170,7 +16521,7 @@
             <a:fld id="{81A792BA-DE5A-904A-B48C-83C9489152F3}" type="datetime13">
               <a:rPr lang="he-IL" smtClean="0"/>
               <a:pPr/>
-              <a:t>16/1/2026</a:t>
+              <a:t>17/1/2026</a:t>
             </a:fld>
             <a:endParaRPr lang="en-US" dirty="0">
               <a:cs typeface="Calibri" panose="020F0502020204030204" pitchFamily="34" charset="0"/>
@@ -14248,7 +16599,7 @@
           <a:p>
             <a:fld id="{C1FF6DA9-008F-8B48-92A6-B652298478BF}" type="slidenum">
               <a:rPr lang="en-US" smtClean="0"/>
-              <a:t>15</a:t>
+              <a:t>17</a:t>
             </a:fld>
             <a:endParaRPr lang="en-US" dirty="0"/>
           </a:p>
@@ -14805,7 +17156,7 @@
             <a:fld id="{81A792BA-DE5A-904A-B48C-83C9489152F3}" type="datetime13">
               <a:rPr lang="he-IL" smtClean="0"/>
               <a:pPr/>
-              <a:t>16/1/2026</a:t>
+              <a:t>17/1/2026</a:t>
             </a:fld>
             <a:endParaRPr lang="en-US" dirty="0">
               <a:cs typeface="Calibri" panose="020F0502020204030204" pitchFamily="34" charset="0"/>
@@ -14939,7 +17290,7 @@
           <p:nvPr>
             <p:extLst>
               <p:ext uri="{D42A27DB-BD31-4B8C-83A1-F6EECF244321}">
-                <p14:modId xmlns:p14="http://schemas.microsoft.com/office/powerpoint/2010/main" val="2599976564"/>
+                <p14:modId xmlns:p14="http://schemas.microsoft.com/office/powerpoint/2010/main" val="3979034175"/>
               </p:ext>
             </p:extLst>
           </p:nvPr>
@@ -15008,7 +17359,7 @@
             <a:fld id="{81A792BA-DE5A-904A-B48C-83C9489152F3}" type="datetime13">
               <a:rPr lang="he-IL" smtClean="0"/>
               <a:pPr/>
-              <a:t>16/1/2026</a:t>
+              <a:t>17/1/2026</a:t>
             </a:fld>
             <a:endParaRPr lang="en-US" dirty="0">
               <a:cs typeface="Calibri" panose="020F0502020204030204" pitchFamily="34" charset="0"/>
@@ -15129,12 +17480,176 @@
           </a:p>
         </p:txBody>
       </p:sp>
-      <p:sp>
-        <p:nvSpPr>
-          <p:cNvPr id="7" name="תיבת טקסט 6">
+      <p:pic>
+        <p:nvPicPr>
+          <p:cNvPr id="40" name="תמונה 39">
             <a:extLst>
               <a:ext uri="{FF2B5EF4-FFF2-40B4-BE49-F238E27FC236}">
-                <a16:creationId xmlns:a16="http://schemas.microsoft.com/office/drawing/2014/main" id="{9D9AA386-BD8A-37B9-7261-6EADEB010331}"/>
+                <a16:creationId xmlns:a16="http://schemas.microsoft.com/office/drawing/2014/main" id="{6D6E5D03-8094-F2FF-C914-D35768DCAACE}"/>
+              </a:ext>
+            </a:extLst>
+          </p:cNvPr>
+          <p:cNvPicPr>
+            <a:picLocks noChangeAspect="1"/>
+          </p:cNvPicPr>
+          <p:nvPr/>
+        </p:nvPicPr>
+        <p:blipFill>
+          <a:blip r:embed="rId3"/>
+          <a:stretch>
+            <a:fillRect/>
+          </a:stretch>
+        </p:blipFill>
+        <p:spPr>
+          <a:xfrm>
+            <a:off x="6040985" y="3728278"/>
+            <a:ext cx="5297673" cy="2628073"/>
+          </a:xfrm>
+          <a:prstGeom prst="rect">
+            <a:avLst/>
+          </a:prstGeom>
+        </p:spPr>
+      </p:pic>
+      <p:sp>
+        <p:nvSpPr>
+          <p:cNvPr id="42" name="Rectangle 5">
+            <a:extLst>
+              <a:ext uri="{FF2B5EF4-FFF2-40B4-BE49-F238E27FC236}">
+                <a16:creationId xmlns:a16="http://schemas.microsoft.com/office/drawing/2014/main" id="{087D6C0A-9058-CDA1-150D-B9D00CD293FC}"/>
+              </a:ext>
+            </a:extLst>
+          </p:cNvPr>
+          <p:cNvSpPr/>
+          <p:nvPr/>
+        </p:nvSpPr>
+        <p:spPr>
+          <a:xfrm>
+            <a:off x="798328" y="889437"/>
+            <a:ext cx="10631672" cy="977081"/>
+          </a:xfrm>
+          <a:prstGeom prst="rect">
+            <a:avLst/>
+          </a:prstGeom>
+          <a:noFill/>
+          <a:ln>
+            <a:noFill/>
+          </a:ln>
+        </p:spPr>
+        <p:style>
+          <a:lnRef idx="2">
+            <a:schemeClr val="dk1"/>
+          </a:lnRef>
+          <a:fillRef idx="1">
+            <a:schemeClr val="lt1"/>
+          </a:fillRef>
+          <a:effectRef idx="0">
+            <a:schemeClr val="dk1"/>
+          </a:effectRef>
+          <a:fontRef idx="minor">
+            <a:schemeClr val="dk1"/>
+          </a:fontRef>
+        </p:style>
+        <p:txBody>
+          <a:bodyPr rtlCol="0" anchor="ctr"/>
+          <a:lstStyle/>
+          <a:p>
+            <a:pPr algn="l" rtl="0">
+              <a:lnSpc>
+                <a:spcPct val="150000"/>
+              </a:lnSpc>
+            </a:pPr>
+            <a:r>
+              <a:rPr lang="en-US" b="1" dirty="0">
+                <a:solidFill>
+                  <a:schemeClr val="tx1"/>
+                </a:solidFill>
+              </a:rPr>
+              <a:t>The Task</a:t>
+            </a:r>
+          </a:p>
+          <a:p>
+            <a:pPr algn="l" rtl="0">
+              <a:lnSpc>
+                <a:spcPct val="150000"/>
+              </a:lnSpc>
+            </a:pPr>
+            <a:r>
+              <a:rPr lang="en-US" dirty="0">
+                <a:solidFill>
+                  <a:schemeClr val="tx1"/>
+                </a:solidFill>
+              </a:rPr>
+              <a:t>Binary Classification based on the past data, predict if </a:t>
+            </a:r>
+            <a:r>
+              <a:rPr lang="en-US" b="1" i="1" dirty="0">
+                <a:solidFill>
+                  <a:schemeClr val="tx1"/>
+                </a:solidFill>
+              </a:rPr>
+              <a:t>A Stock</a:t>
+            </a:r>
+            <a:r>
+              <a:rPr lang="en-US" b="1" dirty="0">
+                <a:solidFill>
+                  <a:schemeClr val="tx1"/>
+                </a:solidFill>
+              </a:rPr>
+              <a:t> </a:t>
+            </a:r>
+            <a:r>
+              <a:rPr lang="en-US" dirty="0">
+                <a:solidFill>
+                  <a:schemeClr val="tx1"/>
+                </a:solidFill>
+              </a:rPr>
+              <a:t>stock will </a:t>
+            </a:r>
+            <a:r>
+              <a:rPr lang="en-US" b="1" dirty="0">
+                <a:solidFill>
+                  <a:schemeClr val="accent3">
+                    <a:lumMod val="75000"/>
+                  </a:schemeClr>
+                </a:solidFill>
+              </a:rPr>
+              <a:t>increase</a:t>
+            </a:r>
+            <a:r>
+              <a:rPr lang="en-US" dirty="0">
+                <a:solidFill>
+                  <a:schemeClr val="tx1"/>
+                </a:solidFill>
+              </a:rPr>
+              <a:t> or </a:t>
+            </a:r>
+            <a:r>
+              <a:rPr lang="en-US" b="1" dirty="0">
+                <a:solidFill>
+                  <a:schemeClr val="accent2">
+                    <a:lumMod val="75000"/>
+                  </a:schemeClr>
+                </a:solidFill>
+              </a:rPr>
+              <a:t>decrease</a:t>
+            </a:r>
+            <a:r>
+              <a:rPr lang="en-US" dirty="0">
+                <a:solidFill>
+                  <a:schemeClr val="tx1"/>
+                </a:solidFill>
+              </a:rPr>
+              <a:t> in the future</a:t>
+            </a:r>
+          </a:p>
+        </p:txBody>
+      </p:sp>
+      <p:sp>
+        <p:nvSpPr>
+          <p:cNvPr id="44" name="תיבת טקסט 43">
+            <a:extLst>
+              <a:ext uri="{FF2B5EF4-FFF2-40B4-BE49-F238E27FC236}">
+                <a16:creationId xmlns:a16="http://schemas.microsoft.com/office/drawing/2014/main" id="{1B706115-5B69-5A45-02DE-774F99A13DDD}"/>
               </a:ext>
             </a:extLst>
           </p:cNvPr>
@@ -15143,8 +17658,8 @@
         </p:nvSpPr>
         <p:spPr>
           <a:xfrm>
-            <a:off x="798328" y="1534176"/>
-            <a:ext cx="10540330" cy="464871"/>
+            <a:off x="9194182" y="2023033"/>
+            <a:ext cx="2014537" cy="646331"/>
           </a:xfrm>
           <a:prstGeom prst="rect">
             <a:avLst/>
@@ -15152,562 +17667,66 @@
           <a:noFill/>
         </p:spPr>
         <p:txBody>
-          <a:bodyPr wrap="square" anchor="ctr">
+          <a:bodyPr wrap="square">
             <a:spAutoFit/>
           </a:bodyPr>
           <a:lstStyle/>
           <a:p>
-            <a:pPr marL="342900" marR="0" lvl="0" indent="-342900" algn="l" defTabSz="914400" rtl="0" eaLnBrk="1" fontAlgn="auto" latinLnBrk="0" hangingPunct="1">
-              <a:lnSpc>
-                <a:spcPct val="150000"/>
-              </a:lnSpc>
-              <a:spcBef>
-                <a:spcPct val="20000"/>
-              </a:spcBef>
-              <a:spcAft>
-                <a:spcPts val="0"/>
-              </a:spcAft>
-              <a:buClrTx/>
-              <a:buSzTx/>
-              <a:buFont typeface="Arial" pitchFamily="34" charset="0"/>
-              <a:buChar char="•"/>
-              <a:tabLst/>
-              <a:defRPr sz="1800">
-                <a:solidFill>
-                  <a:srgbClr val="282828"/>
-                </a:solidFill>
-              </a:defRPr>
-            </a:pPr>
-            <a:r>
-              <a:rPr lang="en" dirty="0">
-                <a:solidFill>
-                  <a:srgbClr val="282828"/>
-                </a:solidFill>
-                <a:latin typeface="Calibri" panose="020F0502020204030204"/>
-              </a:rPr>
-              <a:t>What the project is about</a:t>
-            </a:r>
-          </a:p>
-        </p:txBody>
-      </p:sp>
-      <p:sp>
-        <p:nvSpPr>
-          <p:cNvPr id="6" name="Shape 2">
+            <a:pPr marL="0" algn="ctr" defTabSz="914400" rtl="0" eaLnBrk="1" latinLnBrk="0" hangingPunct="1"/>
+            <a:r>
+              <a:rPr lang="en" b="1" dirty="0"/>
+              <a:t>Main dataset</a:t>
+            </a:r>
+          </a:p>
+          <a:p>
+            <a:pPr marL="0" algn="ctr" defTabSz="914400" rtl="0" eaLnBrk="1" latinLnBrk="0" hangingPunct="1"/>
+            <a:r>
+              <a:rPr lang="en" dirty="0"/>
+              <a:t>Yahoo Finance’s API</a:t>
+            </a:r>
+          </a:p>
+        </p:txBody>
+      </p:sp>
+      <p:sp>
+        <p:nvSpPr>
+          <p:cNvPr id="46" name="תיבת טקסט 45">
             <a:extLst>
               <a:ext uri="{FF2B5EF4-FFF2-40B4-BE49-F238E27FC236}">
-                <a16:creationId xmlns:a16="http://schemas.microsoft.com/office/drawing/2014/main" id="{331E6802-53B6-9305-32C0-10F094954527}"/>
+                <a16:creationId xmlns:a16="http://schemas.microsoft.com/office/drawing/2014/main" id="{A6D38D72-DECD-71E1-041A-C0E4D41D02D2}"/>
               </a:ext>
             </a:extLst>
           </p:cNvPr>
-          <p:cNvSpPr/>
+          <p:cNvSpPr txBox="1"/>
           <p:nvPr/>
         </p:nvSpPr>
         <p:spPr>
           <a:xfrm>
-            <a:off x="975360" y="2778667"/>
-            <a:ext cx="2286000" cy="822960"/>
-          </a:xfrm>
-          <a:prstGeom prst="roundRect">
-            <a:avLst/>
-          </a:prstGeom>
-          <a:solidFill>
-            <a:srgbClr val="F8FAFC"/>
-          </a:solidFill>
-          <a:ln w="12700">
-            <a:solidFill>
-              <a:srgbClr val="E2E8F0"/>
-            </a:solidFill>
-            <a:prstDash val="solid"/>
-          </a:ln>
-        </p:spPr>
-        <p:txBody>
-          <a:bodyPr/>
-          <a:lstStyle/>
-          <a:p>
-            <a:pPr algn="l" rtl="0"/>
-            <a:endParaRPr lang="he-IL"/>
-          </a:p>
-        </p:txBody>
-      </p:sp>
-      <p:sp>
-        <p:nvSpPr>
-          <p:cNvPr id="8" name="Text 3">
-            <a:extLst>
-              <a:ext uri="{FF2B5EF4-FFF2-40B4-BE49-F238E27FC236}">
-                <a16:creationId xmlns:a16="http://schemas.microsoft.com/office/drawing/2014/main" id="{23A09766-922A-DC74-0427-74FE83D09B7D}"/>
-              </a:ext>
-            </a:extLst>
-          </p:cNvPr>
-          <p:cNvSpPr/>
-          <p:nvPr/>
-        </p:nvSpPr>
-        <p:spPr>
-          <a:xfrm>
-            <a:off x="975360" y="2888395"/>
-            <a:ext cx="2286000" cy="822960"/>
+            <a:off x="9194181" y="2925431"/>
+            <a:ext cx="2014537" cy="646331"/>
           </a:xfrm>
           <a:prstGeom prst="rect">
             <a:avLst/>
           </a:prstGeom>
           <a:noFill/>
-          <a:ln/>
         </p:spPr>
         <p:txBody>
-          <a:bodyPr wrap="square" rtlCol="0" anchor="ctr"/>
-          <a:lstStyle/>
-          <a:p>
-            <a:pPr marL="0" indent="0" algn="ctr" rtl="0">
-              <a:buNone/>
-            </a:pPr>
-            <a:r>
-              <a:rPr lang="en-US" sz="1400" dirty="0">
-                <a:solidFill>
-                  <a:srgbClr val="111827"/>
-                </a:solidFill>
-                <a:latin typeface="Calibri" pitchFamily="34" charset="0"/>
-                <a:ea typeface="Calibri" pitchFamily="34" charset="-122"/>
-                <a:cs typeface="Calibri" pitchFamily="34" charset="-120"/>
-              </a:rPr>
-              <a:t>Yahoo Finance</a:t>
-            </a:r>
-            <a:endParaRPr lang="en-US" sz="1400" dirty="0"/>
-          </a:p>
-          <a:p>
-            <a:pPr marL="0" indent="0" algn="ctr" rtl="0">
-              <a:buNone/>
-            </a:pPr>
-            <a:r>
-              <a:rPr lang="en-US" sz="1400" dirty="0">
-                <a:solidFill>
-                  <a:srgbClr val="111827"/>
-                </a:solidFill>
-                <a:latin typeface="Calibri" pitchFamily="34" charset="0"/>
-                <a:ea typeface="Calibri" pitchFamily="34" charset="-122"/>
-                <a:cs typeface="Calibri" pitchFamily="34" charset="-120"/>
-              </a:rPr>
-              <a:t>(OHLCV)</a:t>
-            </a:r>
-            <a:endParaRPr lang="en-US" sz="1400" dirty="0"/>
-          </a:p>
-        </p:txBody>
-      </p:sp>
-      <p:sp>
-        <p:nvSpPr>
-          <p:cNvPr id="9" name="Shape 4">
-            <a:extLst>
-              <a:ext uri="{FF2B5EF4-FFF2-40B4-BE49-F238E27FC236}">
-                <a16:creationId xmlns:a16="http://schemas.microsoft.com/office/drawing/2014/main" id="{A74ABAEA-CB8C-8A2E-0027-1B10B06677FD}"/>
-              </a:ext>
-            </a:extLst>
-          </p:cNvPr>
-          <p:cNvSpPr/>
-          <p:nvPr/>
-        </p:nvSpPr>
-        <p:spPr>
-          <a:xfrm>
-            <a:off x="3307080" y="3071275"/>
-            <a:ext cx="228600" cy="237744"/>
-          </a:xfrm>
-          <a:prstGeom prst="rightArrow">
-            <a:avLst/>
-          </a:prstGeom>
-          <a:solidFill>
-            <a:srgbClr val="64748B"/>
-          </a:solidFill>
-          <a:ln w="12700">
-            <a:solidFill>
-              <a:srgbClr val="64748B"/>
-            </a:solidFill>
-            <a:prstDash val="solid"/>
-          </a:ln>
-        </p:spPr>
-        <p:txBody>
-          <a:bodyPr/>
-          <a:lstStyle/>
-          <a:p>
-            <a:pPr algn="l" rtl="0"/>
-            <a:endParaRPr lang="he-IL"/>
-          </a:p>
-        </p:txBody>
-      </p:sp>
-      <p:sp>
-        <p:nvSpPr>
-          <p:cNvPr id="10" name="Shape 5">
-            <a:extLst>
-              <a:ext uri="{FF2B5EF4-FFF2-40B4-BE49-F238E27FC236}">
-                <a16:creationId xmlns:a16="http://schemas.microsoft.com/office/drawing/2014/main" id="{CF327FDC-F1A8-101F-CA85-F3F1F1FE91E5}"/>
-              </a:ext>
-            </a:extLst>
-          </p:cNvPr>
-          <p:cNvSpPr/>
-          <p:nvPr/>
-        </p:nvSpPr>
-        <p:spPr>
-          <a:xfrm>
-            <a:off x="3581400" y="2778667"/>
-            <a:ext cx="2286000" cy="822960"/>
-          </a:xfrm>
-          <a:prstGeom prst="roundRect">
-            <a:avLst/>
-          </a:prstGeom>
-          <a:solidFill>
-            <a:srgbClr val="F8FAFC"/>
-          </a:solidFill>
-          <a:ln w="12700">
-            <a:solidFill>
-              <a:srgbClr val="E2E8F0"/>
-            </a:solidFill>
-            <a:prstDash val="solid"/>
-          </a:ln>
-        </p:spPr>
-        <p:txBody>
-          <a:bodyPr/>
-          <a:lstStyle/>
-          <a:p>
-            <a:pPr marL="0" algn="r" defTabSz="914400" rtl="1" eaLnBrk="1" latinLnBrk="0" hangingPunct="1"/>
-            <a:endParaRPr lang="he-IL"/>
-          </a:p>
-        </p:txBody>
-      </p:sp>
-      <p:sp>
-        <p:nvSpPr>
-          <p:cNvPr id="11" name="Text 6">
-            <a:extLst>
-              <a:ext uri="{FF2B5EF4-FFF2-40B4-BE49-F238E27FC236}">
-                <a16:creationId xmlns:a16="http://schemas.microsoft.com/office/drawing/2014/main" id="{081EDCBA-0E88-A90E-63F8-80C1C74896B1}"/>
-              </a:ext>
-            </a:extLst>
-          </p:cNvPr>
-          <p:cNvSpPr/>
-          <p:nvPr/>
-        </p:nvSpPr>
-        <p:spPr>
-          <a:xfrm>
-            <a:off x="3581400" y="2888395"/>
-            <a:ext cx="2286000" cy="822960"/>
-          </a:xfrm>
-          <a:prstGeom prst="rect">
-            <a:avLst/>
-          </a:prstGeom>
-          <a:noFill/>
-          <a:ln/>
-        </p:spPr>
-        <p:txBody>
-          <a:bodyPr wrap="square" rtlCol="0" anchor="ctr"/>
-          <a:lstStyle/>
-          <a:p>
-            <a:pPr marL="0" indent="0" algn="ctr" rtl="0">
-              <a:buNone/>
-            </a:pPr>
-            <a:r>
-              <a:rPr lang="en-US" sz="1400" dirty="0">
-                <a:solidFill>
-                  <a:srgbClr val="111827"/>
-                </a:solidFill>
-                <a:latin typeface="Calibri" pitchFamily="34" charset="0"/>
-                <a:ea typeface="Calibri" pitchFamily="34" charset="-122"/>
-                <a:cs typeface="Calibri" pitchFamily="34" charset="-120"/>
-              </a:rPr>
-              <a:t>Google News</a:t>
-            </a:r>
-            <a:endParaRPr lang="en-US" sz="1400" dirty="0"/>
-          </a:p>
-          <a:p>
-            <a:pPr marL="0" indent="0" algn="ctr" rtl="0">
-              <a:buNone/>
-            </a:pPr>
-            <a:r>
-              <a:rPr lang="en-US" sz="1400" dirty="0">
-                <a:solidFill>
-                  <a:srgbClr val="111827"/>
-                </a:solidFill>
-                <a:latin typeface="Calibri" pitchFamily="34" charset="0"/>
-                <a:ea typeface="Calibri" pitchFamily="34" charset="-122"/>
-                <a:cs typeface="Calibri" pitchFamily="34" charset="-120"/>
-              </a:rPr>
-              <a:t>(headlines)</a:t>
-            </a:r>
-            <a:endParaRPr lang="en-US" sz="1400" dirty="0"/>
-          </a:p>
-        </p:txBody>
-      </p:sp>
-      <p:sp>
-        <p:nvSpPr>
-          <p:cNvPr id="12" name="Shape 7">
-            <a:extLst>
-              <a:ext uri="{FF2B5EF4-FFF2-40B4-BE49-F238E27FC236}">
-                <a16:creationId xmlns:a16="http://schemas.microsoft.com/office/drawing/2014/main" id="{D727155D-F3AE-976A-9B3B-E319E4357DA7}"/>
-              </a:ext>
-            </a:extLst>
-          </p:cNvPr>
-          <p:cNvSpPr/>
-          <p:nvPr/>
-        </p:nvSpPr>
-        <p:spPr>
-          <a:xfrm>
-            <a:off x="5913120" y="3071275"/>
-            <a:ext cx="228600" cy="237744"/>
-          </a:xfrm>
-          <a:prstGeom prst="rightArrow">
-            <a:avLst/>
-          </a:prstGeom>
-          <a:solidFill>
-            <a:srgbClr val="64748B"/>
-          </a:solidFill>
-          <a:ln w="12700">
-            <a:solidFill>
-              <a:srgbClr val="64748B"/>
-            </a:solidFill>
-            <a:prstDash val="solid"/>
-          </a:ln>
-        </p:spPr>
-        <p:txBody>
-          <a:bodyPr/>
-          <a:lstStyle/>
-          <a:p>
-            <a:pPr algn="l" rtl="0"/>
-            <a:endParaRPr lang="he-IL"/>
-          </a:p>
-        </p:txBody>
-      </p:sp>
-      <p:sp>
-        <p:nvSpPr>
-          <p:cNvPr id="13" name="Shape 8">
-            <a:extLst>
-              <a:ext uri="{FF2B5EF4-FFF2-40B4-BE49-F238E27FC236}">
-                <a16:creationId xmlns:a16="http://schemas.microsoft.com/office/drawing/2014/main" id="{4B2FCEC2-DEC7-C095-1B01-426EADB383FC}"/>
-              </a:ext>
-            </a:extLst>
-          </p:cNvPr>
-          <p:cNvSpPr/>
-          <p:nvPr/>
-        </p:nvSpPr>
-        <p:spPr>
-          <a:xfrm>
-            <a:off x="6187440" y="2778667"/>
-            <a:ext cx="2286000" cy="822960"/>
-          </a:xfrm>
-          <a:prstGeom prst="roundRect">
-            <a:avLst/>
-          </a:prstGeom>
-          <a:solidFill>
-            <a:srgbClr val="ECFEFF"/>
-          </a:solidFill>
-          <a:ln w="12700">
-            <a:solidFill>
-              <a:srgbClr val="E2E8F0"/>
-            </a:solidFill>
-            <a:prstDash val="solid"/>
-          </a:ln>
-        </p:spPr>
-        <p:txBody>
-          <a:bodyPr/>
-          <a:lstStyle/>
-          <a:p>
-            <a:pPr algn="l" rtl="0"/>
-            <a:endParaRPr lang="he-IL"/>
-          </a:p>
-        </p:txBody>
-      </p:sp>
-      <p:sp>
-        <p:nvSpPr>
-          <p:cNvPr id="14" name="Text 9">
-            <a:extLst>
-              <a:ext uri="{FF2B5EF4-FFF2-40B4-BE49-F238E27FC236}">
-                <a16:creationId xmlns:a16="http://schemas.microsoft.com/office/drawing/2014/main" id="{C4A5AE3D-3230-A901-9E8F-B8C8BE453535}"/>
-              </a:ext>
-            </a:extLst>
-          </p:cNvPr>
-          <p:cNvSpPr/>
-          <p:nvPr/>
-        </p:nvSpPr>
-        <p:spPr>
-          <a:xfrm>
-            <a:off x="6187440" y="2888395"/>
-            <a:ext cx="2286000" cy="822960"/>
-          </a:xfrm>
-          <a:prstGeom prst="rect">
-            <a:avLst/>
-          </a:prstGeom>
-          <a:noFill/>
-          <a:ln/>
-        </p:spPr>
-        <p:txBody>
-          <a:bodyPr wrap="square" rtlCol="0" anchor="ctr"/>
-          <a:lstStyle/>
-          <a:p>
-            <a:pPr marL="0" indent="0" algn="ctr" rtl="0">
-              <a:buNone/>
-            </a:pPr>
-            <a:r>
-              <a:rPr lang="en-US" sz="1400" dirty="0">
-                <a:solidFill>
-                  <a:srgbClr val="111827"/>
-                </a:solidFill>
-                <a:latin typeface="Calibri" pitchFamily="34" charset="0"/>
-                <a:ea typeface="Calibri" pitchFamily="34" charset="-122"/>
-                <a:cs typeface="Calibri" pitchFamily="34" charset="-120"/>
-              </a:rPr>
-              <a:t>FinBERT</a:t>
-            </a:r>
-            <a:endParaRPr lang="en-US" sz="1400" dirty="0"/>
-          </a:p>
-          <a:p>
-            <a:pPr marL="0" indent="0" algn="ctr" rtl="0">
-              <a:buNone/>
-            </a:pPr>
-            <a:r>
-              <a:rPr lang="en-US" sz="1400" dirty="0">
-                <a:solidFill>
-                  <a:srgbClr val="111827"/>
-                </a:solidFill>
-                <a:latin typeface="Calibri" pitchFamily="34" charset="0"/>
-                <a:ea typeface="Calibri" pitchFamily="34" charset="-122"/>
-                <a:cs typeface="Calibri" pitchFamily="34" charset="-120"/>
-              </a:rPr>
-              <a:t>Sentiment</a:t>
-            </a:r>
-            <a:endParaRPr lang="en-US" sz="1400" dirty="0"/>
-          </a:p>
-        </p:txBody>
-      </p:sp>
-      <p:sp>
-        <p:nvSpPr>
-          <p:cNvPr id="15" name="Shape 10">
-            <a:extLst>
-              <a:ext uri="{FF2B5EF4-FFF2-40B4-BE49-F238E27FC236}">
-                <a16:creationId xmlns:a16="http://schemas.microsoft.com/office/drawing/2014/main" id="{854D070D-E181-B9CA-F5FD-BCD774E63695}"/>
-              </a:ext>
-            </a:extLst>
-          </p:cNvPr>
-          <p:cNvSpPr/>
-          <p:nvPr/>
-        </p:nvSpPr>
-        <p:spPr>
-          <a:xfrm>
-            <a:off x="8519160" y="3071275"/>
-            <a:ext cx="228600" cy="237744"/>
-          </a:xfrm>
-          <a:prstGeom prst="rightArrow">
-            <a:avLst/>
-          </a:prstGeom>
-          <a:solidFill>
-            <a:srgbClr val="64748B"/>
-          </a:solidFill>
-          <a:ln w="12700">
-            <a:solidFill>
-              <a:srgbClr val="64748B"/>
-            </a:solidFill>
-            <a:prstDash val="solid"/>
-          </a:ln>
-        </p:spPr>
-        <p:txBody>
-          <a:bodyPr/>
-          <a:lstStyle/>
-          <a:p>
-            <a:pPr algn="l" rtl="0"/>
-            <a:endParaRPr lang="he-IL"/>
-          </a:p>
-        </p:txBody>
-      </p:sp>
-      <p:sp>
-        <p:nvSpPr>
-          <p:cNvPr id="16" name="Shape 11">
-            <a:extLst>
-              <a:ext uri="{FF2B5EF4-FFF2-40B4-BE49-F238E27FC236}">
-                <a16:creationId xmlns:a16="http://schemas.microsoft.com/office/drawing/2014/main" id="{54EA37F9-F007-4C01-4E3F-A1E38D7B723F}"/>
-              </a:ext>
-            </a:extLst>
-          </p:cNvPr>
-          <p:cNvSpPr/>
-          <p:nvPr/>
-        </p:nvSpPr>
-        <p:spPr>
-          <a:xfrm>
-            <a:off x="8793480" y="2778667"/>
-            <a:ext cx="2286000" cy="822960"/>
-          </a:xfrm>
-          <a:prstGeom prst="roundRect">
-            <a:avLst/>
-          </a:prstGeom>
-          <a:solidFill>
-            <a:srgbClr val="EEF2FF"/>
-          </a:solidFill>
-          <a:ln w="12700">
-            <a:solidFill>
-              <a:srgbClr val="E2E8F0"/>
-            </a:solidFill>
-            <a:prstDash val="solid"/>
-          </a:ln>
-        </p:spPr>
-        <p:txBody>
-          <a:bodyPr/>
-          <a:lstStyle/>
-          <a:p>
-            <a:pPr marL="0" algn="r" defTabSz="914400" rtl="1" eaLnBrk="1" latinLnBrk="0" hangingPunct="1"/>
-            <a:endParaRPr lang="he-IL"/>
-          </a:p>
-        </p:txBody>
-      </p:sp>
-      <p:sp>
-        <p:nvSpPr>
-          <p:cNvPr id="17" name="Text 12">
-            <a:extLst>
-              <a:ext uri="{FF2B5EF4-FFF2-40B4-BE49-F238E27FC236}">
-                <a16:creationId xmlns:a16="http://schemas.microsoft.com/office/drawing/2014/main" id="{162924C9-46F6-A389-85E7-E99A2A462F90}"/>
-              </a:ext>
-            </a:extLst>
-          </p:cNvPr>
-          <p:cNvSpPr/>
-          <p:nvPr/>
-        </p:nvSpPr>
-        <p:spPr>
-          <a:xfrm>
-            <a:off x="8793480" y="2888395"/>
-            <a:ext cx="2286000" cy="822960"/>
-          </a:xfrm>
-          <a:prstGeom prst="rect">
-            <a:avLst/>
-          </a:prstGeom>
-          <a:noFill/>
-          <a:ln/>
-        </p:spPr>
-        <p:txBody>
-          <a:bodyPr wrap="square" rtlCol="0" anchor="ctr"/>
-          <a:lstStyle/>
-          <a:p>
-            <a:pPr marL="0" indent="0" algn="ctr" rtl="0">
-              <a:buNone/>
-            </a:pPr>
-            <a:r>
-              <a:rPr lang="en-US" sz="1400" dirty="0">
-                <a:solidFill>
-                  <a:srgbClr val="111827"/>
-                </a:solidFill>
-                <a:latin typeface="Calibri" pitchFamily="34" charset="0"/>
-                <a:ea typeface="Calibri" pitchFamily="34" charset="-122"/>
-                <a:cs typeface="Calibri" pitchFamily="34" charset="-120"/>
-              </a:rPr>
-              <a:t>Feature Blocks</a:t>
-            </a:r>
-            <a:endParaRPr lang="en-US" sz="1400" dirty="0"/>
-          </a:p>
-          <a:p>
-            <a:pPr marL="0" indent="0" algn="ctr" rtl="0">
-              <a:buNone/>
-            </a:pPr>
-            <a:r>
-              <a:rPr lang="en-US" sz="1400" dirty="0">
-                <a:solidFill>
-                  <a:srgbClr val="111827"/>
-                </a:solidFill>
-                <a:latin typeface="Calibri" pitchFamily="34" charset="0"/>
-                <a:ea typeface="Calibri" pitchFamily="34" charset="-122"/>
-                <a:cs typeface="Calibri" pitchFamily="34" charset="-120"/>
-              </a:rPr>
-              <a:t>+ Target</a:t>
-            </a:r>
-            <a:endParaRPr lang="en-US" sz="1400" dirty="0"/>
+          <a:bodyPr wrap="square">
+            <a:spAutoFit/>
+          </a:bodyPr>
+          <a:lstStyle/>
+          <a:p>
+            <a:pPr marL="0" algn="ctr" defTabSz="914400" rtl="0" eaLnBrk="1" latinLnBrk="0" hangingPunct="1"/>
+            <a:r>
+              <a:rPr lang="en" b="1" dirty="0"/>
+              <a:t>Additional dataset</a:t>
+            </a:r>
+          </a:p>
+          <a:p>
+            <a:pPr marL="0" algn="ctr" defTabSz="914400" rtl="0" eaLnBrk="1" latinLnBrk="0" hangingPunct="1"/>
+            <a:r>
+              <a:rPr lang="en" dirty="0"/>
+              <a:t>News</a:t>
+            </a:r>
           </a:p>
         </p:txBody>
       </p:sp>
@@ -15765,7 +17784,7 @@
             <a:fld id="{81A792BA-DE5A-904A-B48C-83C9489152F3}" type="datetime13">
               <a:rPr lang="he-IL" smtClean="0"/>
               <a:pPr/>
-              <a:t>16/1/2026</a:t>
+              <a:t>17/1/2026</a:t>
             </a:fld>
             <a:endParaRPr lang="en-US" dirty="0">
               <a:cs typeface="Calibri" panose="020F0502020204030204" pitchFamily="34" charset="0"/>
@@ -15890,11 +17909,7 @@
           <a:p>
             <a:r>
               <a:rPr lang="en-US" dirty="0"/>
-              <a:t>Project </a:t>
-            </a:r>
-            <a:r>
-              <a:rPr lang="en-US" dirty="0" err="1"/>
-              <a:t>Rodemap</a:t>
+              <a:t>Project Roadmap</a:t>
             </a:r>
             <a:endParaRPr lang="he-IL" dirty="0"/>
           </a:p>
@@ -15919,6 +17934,7 @@
             <a:chOff x="1800752" y="726534"/>
             <a:chExt cx="8551619" cy="2777589"/>
           </a:xfrm>
+          <a:effectLst/>
         </p:grpSpPr>
         <p:pic>
           <p:nvPicPr>
@@ -16036,7 +18052,7 @@
               </a:bodyPr>
               <a:lstStyle/>
               <a:p>
-                <a:pPr marL="171450" indent="-171450" algn="r" defTabSz="457200" rtl="1" eaLnBrk="1" latinLnBrk="0" hangingPunct="1">
+                <a:pPr marL="171450" indent="-171450" algn="l" defTabSz="457200" rtl="0" eaLnBrk="1" latinLnBrk="0" hangingPunct="1">
                   <a:buFont typeface="Arial" panose="020B0604020202020204" pitchFamily="34" charset="0"/>
                   <a:buChar char="•"/>
                 </a:pPr>
@@ -16547,6 +18563,7 @@
                 <a:prstGeom prst="rect">
                   <a:avLst/>
                 </a:prstGeom>
+                <a:effectLst/>
               </p:spPr>
               <p:txBody>
                 <a:bodyPr lIns="25400" tIns="25400" rIns="25400" bIns="25400" rtlCol="0" anchor="ctr"/>
@@ -16976,6 +18993,7 @@
                     </a:path>
                   </a:pathLst>
                 </a:custGeom>
+                <a:effectLst/>
               </p:spPr>
               <p:style>
                 <a:lnRef idx="2">
@@ -17124,6 +19142,7 @@
               <a:prstGeom prst="rect">
                 <a:avLst/>
               </a:prstGeom>
+              <a:effectLst/>
             </p:spPr>
             <p:txBody>
               <a:bodyPr wrap="square" lIns="0" tIns="0" rIns="0" bIns="0" rtlCol="0" anchor="ctr">
@@ -17176,6 +19195,7 @@
               <a:prstGeom prst="rect">
                 <a:avLst/>
               </a:prstGeom>
+              <a:effectLst/>
             </p:spPr>
             <p:txBody>
               <a:bodyPr wrap="square" lIns="0" tIns="0" rIns="0" bIns="0" rtlCol="0" anchor="ctr">
@@ -17528,6 +19548,7 @@
                 <a:prstGeom prst="rect">
                   <a:avLst/>
                 </a:prstGeom>
+                <a:effectLst/>
               </p:spPr>
               <p:txBody>
                 <a:bodyPr lIns="25400" tIns="25400" rIns="25400" bIns="25400" rtlCol="0" anchor="ctr"/>
@@ -17678,7 +19699,7 @@
             </a:bodyPr>
             <a:lstStyle/>
             <a:p>
-              <a:pPr marL="0" algn="r" defTabSz="457200" rtl="1" eaLnBrk="1" latinLnBrk="0" hangingPunct="1"/>
+              <a:pPr marL="0" algn="l" defTabSz="457200" rtl="0" eaLnBrk="1" latinLnBrk="0" hangingPunct="1"/>
               <a:endParaRPr lang="en" sz="1600" b="1" u="sng" dirty="0">
                 <a:solidFill>
                   <a:srgbClr val="475569"/>
@@ -17721,6 +19742,156 @@
       </p:grpSpPr>
       <p:sp>
         <p:nvSpPr>
+          <p:cNvPr id="20" name="תיבת טקסט 19">
+            <a:extLst>
+              <a:ext uri="{FF2B5EF4-FFF2-40B4-BE49-F238E27FC236}">
+                <a16:creationId xmlns:a16="http://schemas.microsoft.com/office/drawing/2014/main" id="{09BD8DA2-91FA-4205-0BC3-A1D5B62F00DE}"/>
+              </a:ext>
+            </a:extLst>
+          </p:cNvPr>
+          <p:cNvSpPr txBox="1"/>
+          <p:nvPr/>
+        </p:nvSpPr>
+        <p:spPr>
+          <a:xfrm>
+            <a:off x="798328" y="1011315"/>
+            <a:ext cx="10729058" cy="2542363"/>
+          </a:xfrm>
+          <a:prstGeom prst="rect">
+            <a:avLst/>
+          </a:prstGeom>
+          <a:noFill/>
+        </p:spPr>
+        <p:txBody>
+          <a:bodyPr wrap="square">
+            <a:spAutoFit/>
+          </a:bodyPr>
+          <a:lstStyle/>
+          <a:p>
+            <a:pPr algn="l" rtl="0">
+              <a:lnSpc>
+                <a:spcPct val="150000"/>
+              </a:lnSpc>
+            </a:pPr>
+            <a:r>
+              <a:rPr lang="en" b="1" u="sng" dirty="0"/>
+              <a:t>Foundations &amp; Baseline (Pre-Checkpoint)</a:t>
+            </a:r>
+          </a:p>
+          <a:p>
+            <a:pPr marL="285750" indent="-285750" algn="l" rtl="0">
+              <a:lnSpc>
+                <a:spcPct val="150000"/>
+              </a:lnSpc>
+              <a:buFont typeface="Arial" panose="020B0604020202020204" pitchFamily="34" charset="0"/>
+              <a:buChar char="•"/>
+            </a:pPr>
+            <a:r>
+              <a:rPr lang="en" b="1" dirty="0"/>
+              <a:t>Problem Formulation: </a:t>
+            </a:r>
+            <a:r>
+              <a:rPr lang="en" dirty="0"/>
+              <a:t>Defined Multi-Task objectives (Regression &amp; Classification) and KPIs.</a:t>
+            </a:r>
+            <a:endParaRPr lang="he-IL" dirty="0"/>
+          </a:p>
+          <a:p>
+            <a:pPr marL="285750" indent="-285750" algn="l" rtl="0">
+              <a:lnSpc>
+                <a:spcPct val="150000"/>
+              </a:lnSpc>
+              <a:buFont typeface="Arial" panose="020B0604020202020204" pitchFamily="34" charset="0"/>
+              <a:buChar char="•"/>
+            </a:pPr>
+            <a:r>
+              <a:rPr lang="en" b="1" dirty="0"/>
+              <a:t>Core Infrastructure: </a:t>
+            </a:r>
+            <a:r>
+              <a:rPr lang="en" dirty="0"/>
+              <a:t>Initialized repository and modular code architecture (</a:t>
+            </a:r>
+            <a:r>
+              <a:rPr lang="en" dirty="0" err="1"/>
+              <a:t>src</a:t>
+            </a:r>
+            <a:r>
+              <a:rPr lang="en" dirty="0"/>
+              <a:t>).</a:t>
+            </a:r>
+          </a:p>
+          <a:p>
+            <a:pPr marL="285750" indent="-285750" algn="l" rtl="0">
+              <a:lnSpc>
+                <a:spcPct val="150000"/>
+              </a:lnSpc>
+              <a:buFont typeface="Arial" panose="020B0604020202020204" pitchFamily="34" charset="0"/>
+              <a:buChar char="•"/>
+            </a:pPr>
+            <a:r>
+              <a:rPr lang="en" b="1" dirty="0"/>
+              <a:t>EDA </a:t>
+            </a:r>
+            <a:r>
+              <a:rPr lang="en-US" b="1" dirty="0"/>
+              <a:t>and</a:t>
+            </a:r>
+            <a:r>
+              <a:rPr lang="en" b="1" dirty="0"/>
+              <a:t> Profiling: </a:t>
+            </a:r>
+            <a:r>
+              <a:rPr lang="en" dirty="0"/>
+              <a:t>Exploratory Data Analysis and statistical profiling of returns.</a:t>
+            </a:r>
+          </a:p>
+          <a:p>
+            <a:pPr marL="285750" indent="-285750" algn="l" rtl="0">
+              <a:lnSpc>
+                <a:spcPct val="150000"/>
+              </a:lnSpc>
+              <a:buFont typeface="Arial" panose="020B0604020202020204" pitchFamily="34" charset="0"/>
+              <a:buChar char="•"/>
+            </a:pPr>
+            <a:r>
+              <a:rPr lang="en" b="1" dirty="0"/>
+              <a:t>Resource Refinement: </a:t>
+            </a:r>
+            <a:r>
+              <a:rPr lang="en" dirty="0"/>
+              <a:t>Optimized news scraping and </a:t>
+            </a:r>
+            <a:r>
+              <a:rPr lang="en" dirty="0" err="1"/>
+              <a:t>FinBERT</a:t>
+            </a:r>
+            <a:r>
+              <a:rPr lang="en" dirty="0"/>
+              <a:t> preprocessing pipelines.</a:t>
+            </a:r>
+          </a:p>
+          <a:p>
+            <a:pPr marL="285750" indent="-285750" algn="l" rtl="0">
+              <a:lnSpc>
+                <a:spcPct val="150000"/>
+              </a:lnSpc>
+              <a:buFont typeface="Arial" panose="020B0604020202020204" pitchFamily="34" charset="0"/>
+              <a:buChar char="•"/>
+            </a:pPr>
+            <a:r>
+              <a:rPr lang="en" b="1" dirty="0"/>
+              <a:t>Baseline Engineering: </a:t>
+            </a:r>
+            <a:r>
+              <a:rPr lang="en" dirty="0"/>
+              <a:t>Constructed primary OHLCV lags and technical indicators.</a:t>
+            </a:r>
+          </a:p>
+        </p:txBody>
+      </p:sp>
+      <p:sp>
+        <p:nvSpPr>
           <p:cNvPr id="2" name="מציין מיקום של תאריך 1">
             <a:extLst>
               <a:ext uri="{FF2B5EF4-FFF2-40B4-BE49-F238E27FC236}">
@@ -17743,7 +19914,7 @@
             <a:fld id="{81A792BA-DE5A-904A-B48C-83C9489152F3}" type="datetime13">
               <a:rPr lang="he-IL" smtClean="0"/>
               <a:pPr/>
-              <a:t>16/1/2026</a:t>
+              <a:t>17/1/2026</a:t>
             </a:fld>
             <a:endParaRPr lang="en-US" dirty="0">
               <a:cs typeface="Calibri" panose="020F0502020204030204" pitchFamily="34" charset="0"/>
@@ -17850,240 +20021,23 @@
           </a:bodyPr>
           <a:lstStyle/>
           <a:p>
-            <a:pPr algn="l" defTabSz="457200" rtl="0" eaLnBrk="1" latinLnBrk="0" hangingPunct="1">
-              <a:spcBef>
-                <a:spcPct val="0"/>
-              </a:spcBef>
-              <a:buNone/>
-            </a:pPr>
             <a:r>
               <a:rPr lang="en-US" dirty="0"/>
-              <a:t>Progress</a:t>
+              <a:t>Progress and </a:t>
+            </a:r>
+            <a:r>
+              <a:rPr lang="en" dirty="0"/>
+              <a:t>Technical Milestones</a:t>
+            </a:r>
+            <a:r>
+              <a:rPr lang="he-IL" dirty="0"/>
+              <a:t> </a:t>
+            </a:r>
+            <a:r>
+              <a:rPr lang="en-US" dirty="0"/>
+              <a:t>(1)</a:t>
             </a:r>
             <a:endParaRPr lang="he-IL" dirty="0"/>
-          </a:p>
-        </p:txBody>
-      </p:sp>
-      <p:sp>
-        <p:nvSpPr>
-          <p:cNvPr id="7" name="תיבת טקסט 6">
-            <a:extLst>
-              <a:ext uri="{FF2B5EF4-FFF2-40B4-BE49-F238E27FC236}">
-                <a16:creationId xmlns:a16="http://schemas.microsoft.com/office/drawing/2014/main" id="{36926420-0C48-1EA5-A5F6-0BD7CF8F1A86}"/>
-              </a:ext>
-            </a:extLst>
-          </p:cNvPr>
-          <p:cNvSpPr txBox="1"/>
-          <p:nvPr/>
-        </p:nvSpPr>
-        <p:spPr>
-          <a:xfrm>
-            <a:off x="3598333" y="3544071"/>
-            <a:ext cx="6096000" cy="1034129"/>
-          </a:xfrm>
-          <a:prstGeom prst="rect">
-            <a:avLst/>
-          </a:prstGeom>
-          <a:noFill/>
-        </p:spPr>
-        <p:txBody>
-          <a:bodyPr wrap="square">
-            <a:spAutoFit/>
-          </a:bodyPr>
-          <a:lstStyle/>
-          <a:p>
-            <a:pPr marL="342900" marR="0" lvl="0" indent="-342900" algn="l" defTabSz="914400" rtl="0" eaLnBrk="1" fontAlgn="auto" latinLnBrk="0" hangingPunct="1">
-              <a:lnSpc>
-                <a:spcPct val="100000"/>
-              </a:lnSpc>
-              <a:spcBef>
-                <a:spcPct val="20000"/>
-              </a:spcBef>
-              <a:spcAft>
-                <a:spcPts val="0"/>
-              </a:spcAft>
-              <a:buClrTx/>
-              <a:buSzTx/>
-              <a:buFont typeface="Arial" pitchFamily="34" charset="0"/>
-              <a:buChar char="•"/>
-              <a:tabLst/>
-              <a:defRPr sz="1800">
-                <a:solidFill>
-                  <a:srgbClr val="282828"/>
-                </a:solidFill>
-              </a:defRPr>
-            </a:pPr>
-            <a:r>
-              <a:rPr kumimoji="0" lang="en" sz="1800" b="0" i="0" u="none" strike="noStrike" kern="1200" cap="none" spc="0" normalizeH="0" baseline="0" noProof="0" dirty="0">
-                <a:ln>
-                  <a:noFill/>
-                </a:ln>
-                <a:solidFill>
-                  <a:srgbClr val="282828"/>
-                </a:solidFill>
-                <a:effectLst/>
-                <a:uLnTx/>
-                <a:uFillTx/>
-                <a:latin typeface="Calibri" panose="020F0502020204030204"/>
-                <a:ea typeface="+mn-ea"/>
-                <a:cs typeface="+mn-cs"/>
-              </a:rPr>
-              <a:t>Feature engineering: block-based design</a:t>
-            </a:r>
-          </a:p>
-          <a:p>
-            <a:pPr marL="342900" marR="0" lvl="0" indent="-342900" algn="l" defTabSz="914400" rtl="0" eaLnBrk="1" fontAlgn="auto" latinLnBrk="0" hangingPunct="1">
-              <a:lnSpc>
-                <a:spcPct val="100000"/>
-              </a:lnSpc>
-              <a:spcBef>
-                <a:spcPct val="20000"/>
-              </a:spcBef>
-              <a:spcAft>
-                <a:spcPts val="0"/>
-              </a:spcAft>
-              <a:buClrTx/>
-              <a:buSzTx/>
-              <a:buFont typeface="Arial" pitchFamily="34" charset="0"/>
-              <a:buChar char="•"/>
-              <a:tabLst/>
-              <a:defRPr sz="1800">
-                <a:solidFill>
-                  <a:srgbClr val="282828"/>
-                </a:solidFill>
-              </a:defRPr>
-            </a:pPr>
-            <a:r>
-              <a:rPr kumimoji="0" lang="en" sz="1800" b="0" i="0" u="none" strike="noStrike" kern="1200" cap="none" spc="0" normalizeH="0" baseline="0" noProof="0" dirty="0">
-                <a:ln>
-                  <a:noFill/>
-                </a:ln>
-                <a:solidFill>
-                  <a:srgbClr val="282828"/>
-                </a:solidFill>
-                <a:effectLst/>
-                <a:uLnTx/>
-                <a:uFillTx/>
-                <a:latin typeface="Calibri" panose="020F0502020204030204"/>
-                <a:ea typeface="+mn-ea"/>
-                <a:cs typeface="+mn-cs"/>
-              </a:rPr>
-              <a:t>Modeling: broader comparison of classical ML models</a:t>
-            </a:r>
-          </a:p>
-          <a:p>
-            <a:pPr marL="342900" marR="0" lvl="0" indent="-342900" algn="l" defTabSz="914400" rtl="0" eaLnBrk="1" fontAlgn="auto" latinLnBrk="0" hangingPunct="1">
-              <a:lnSpc>
-                <a:spcPct val="100000"/>
-              </a:lnSpc>
-              <a:spcBef>
-                <a:spcPct val="20000"/>
-              </a:spcBef>
-              <a:spcAft>
-                <a:spcPts val="0"/>
-              </a:spcAft>
-              <a:buClrTx/>
-              <a:buSzTx/>
-              <a:buFont typeface="Arial" pitchFamily="34" charset="0"/>
-              <a:buChar char="•"/>
-              <a:tabLst/>
-              <a:defRPr sz="1800">
-                <a:solidFill>
-                  <a:srgbClr val="282828"/>
-                </a:solidFill>
-              </a:defRPr>
-            </a:pPr>
-            <a:r>
-              <a:rPr kumimoji="0" lang="en" sz="1800" b="0" i="0" u="none" strike="noStrike" kern="1200" cap="none" spc="0" normalizeH="0" baseline="0" noProof="0" dirty="0">
-                <a:ln>
-                  <a:noFill/>
-                </a:ln>
-                <a:solidFill>
-                  <a:srgbClr val="282828"/>
-                </a:solidFill>
-                <a:effectLst/>
-                <a:uLnTx/>
-                <a:uFillTx/>
-                <a:latin typeface="Calibri" panose="020F0502020204030204"/>
-                <a:ea typeface="+mn-ea"/>
-                <a:cs typeface="+mn-cs"/>
-              </a:rPr>
-              <a:t>Validation: strict expanding-window walk-forward</a:t>
-            </a:r>
-          </a:p>
-        </p:txBody>
-      </p:sp>
-      <p:sp>
-        <p:nvSpPr>
-          <p:cNvPr id="9" name="תיבת טקסט 8">
-            <a:extLst>
-              <a:ext uri="{FF2B5EF4-FFF2-40B4-BE49-F238E27FC236}">
-                <a16:creationId xmlns:a16="http://schemas.microsoft.com/office/drawing/2014/main" id="{88EF8DE4-C99C-FEFA-B757-3350F28825AB}"/>
-              </a:ext>
-            </a:extLst>
-          </p:cNvPr>
-          <p:cNvSpPr txBox="1"/>
-          <p:nvPr/>
-        </p:nvSpPr>
-        <p:spPr>
-          <a:xfrm>
-            <a:off x="550333" y="3876469"/>
-            <a:ext cx="6096000" cy="369332"/>
-          </a:xfrm>
-          <a:prstGeom prst="rect">
-            <a:avLst/>
-          </a:prstGeom>
-          <a:noFill/>
-        </p:spPr>
-        <p:txBody>
-          <a:bodyPr wrap="square">
-            <a:spAutoFit/>
-          </a:bodyPr>
-          <a:lstStyle/>
-          <a:p>
-            <a:pPr marL="0" algn="l" defTabSz="914400" rtl="0" eaLnBrk="1" latinLnBrk="0" hangingPunct="1"/>
-            <a:r>
-              <a:rPr lang="en" b="1" dirty="0"/>
-              <a:t>Changes Since Checkpoint</a:t>
-            </a:r>
-            <a:endParaRPr lang="he-IL" b="1" dirty="0"/>
-          </a:p>
-        </p:txBody>
-      </p:sp>
-      <p:sp>
-        <p:nvSpPr>
-          <p:cNvPr id="10" name="תיבת טקסט 9">
-            <a:extLst>
-              <a:ext uri="{FF2B5EF4-FFF2-40B4-BE49-F238E27FC236}">
-                <a16:creationId xmlns:a16="http://schemas.microsoft.com/office/drawing/2014/main" id="{53B64FF9-9726-38F9-6F21-7BBD3644232B}"/>
-              </a:ext>
-            </a:extLst>
-          </p:cNvPr>
-          <p:cNvSpPr txBox="1"/>
-          <p:nvPr/>
-        </p:nvSpPr>
-        <p:spPr>
-          <a:xfrm>
-            <a:off x="609600" y="1086083"/>
-            <a:ext cx="6096000" cy="369332"/>
-          </a:xfrm>
-          <a:prstGeom prst="rect">
-            <a:avLst/>
-          </a:prstGeom>
-          <a:noFill/>
-        </p:spPr>
-        <p:txBody>
-          <a:bodyPr wrap="square">
-            <a:spAutoFit/>
-          </a:bodyPr>
-          <a:lstStyle/>
-          <a:p>
-            <a:pPr marL="0" algn="l" defTabSz="914400" rtl="0" eaLnBrk="1" latinLnBrk="0" hangingPunct="1"/>
-            <a:r>
-              <a:rPr lang="en" b="1" dirty="0"/>
-              <a:t>Before checkpoint</a:t>
-            </a:r>
-            <a:endParaRPr lang="he-IL" b="1" dirty="0"/>
           </a:p>
         </p:txBody>
       </p:sp>
@@ -18105,6 +20059,892 @@
   <p:cSld>
     <p:spTree>
       <p:nvGrpSpPr>
+        <p:cNvPr id="1" name="">
+          <a:extLst>
+            <a:ext uri="{FF2B5EF4-FFF2-40B4-BE49-F238E27FC236}">
+              <a16:creationId xmlns:a16="http://schemas.microsoft.com/office/drawing/2014/main" id="{766441A5-EB19-5B68-8D06-6AFBA57BF5E5}"/>
+            </a:ext>
+          </a:extLst>
+        </p:cNvPr>
+        <p:cNvGrpSpPr/>
+        <p:nvPr/>
+      </p:nvGrpSpPr>
+      <p:grpSpPr>
+        <a:xfrm>
+          <a:off x="0" y="0"/>
+          <a:ext cx="0" cy="0"/>
+          <a:chOff x="0" y="0"/>
+          <a:chExt cx="0" cy="0"/>
+        </a:xfrm>
+      </p:grpSpPr>
+      <p:sp>
+        <p:nvSpPr>
+          <p:cNvPr id="2" name="מציין מיקום של תאריך 1">
+            <a:extLst>
+              <a:ext uri="{FF2B5EF4-FFF2-40B4-BE49-F238E27FC236}">
+                <a16:creationId xmlns:a16="http://schemas.microsoft.com/office/drawing/2014/main" id="{D9CDC91F-4144-123D-BC1A-19C23E8471C3}"/>
+              </a:ext>
+            </a:extLst>
+          </p:cNvPr>
+          <p:cNvSpPr>
+            <a:spLocks noGrp="1"/>
+          </p:cNvSpPr>
+          <p:nvPr>
+            <p:ph type="dt" sz="half" idx="10"/>
+          </p:nvPr>
+        </p:nvSpPr>
+        <p:spPr/>
+        <p:txBody>
+          <a:bodyPr/>
+          <a:lstStyle/>
+          <a:p>
+            <a:fld id="{81A792BA-DE5A-904A-B48C-83C9489152F3}" type="datetime13">
+              <a:rPr lang="he-IL" smtClean="0"/>
+              <a:pPr/>
+              <a:t>17/1/2026</a:t>
+            </a:fld>
+            <a:endParaRPr lang="en-US" dirty="0">
+              <a:cs typeface="Calibri" panose="020F0502020204030204" pitchFamily="34" charset="0"/>
+            </a:endParaRPr>
+          </a:p>
+        </p:txBody>
+      </p:sp>
+      <p:sp>
+        <p:nvSpPr>
+          <p:cNvPr id="3" name="מציין מיקום של כותרת תחתונה 2">
+            <a:extLst>
+              <a:ext uri="{FF2B5EF4-FFF2-40B4-BE49-F238E27FC236}">
+                <a16:creationId xmlns:a16="http://schemas.microsoft.com/office/drawing/2014/main" id="{9F095DB6-FE45-F73D-6718-E4A573E47788}"/>
+              </a:ext>
+            </a:extLst>
+          </p:cNvPr>
+          <p:cNvSpPr>
+            <a:spLocks noGrp="1"/>
+          </p:cNvSpPr>
+          <p:nvPr>
+            <p:ph type="ftr" sz="quarter" idx="11"/>
+          </p:nvPr>
+        </p:nvSpPr>
+        <p:spPr/>
+        <p:txBody>
+          <a:bodyPr/>
+          <a:lstStyle/>
+          <a:p>
+            <a:r>
+              <a:rPr lang="en-US" sz="1200" kern="1200">
+                <a:solidFill>
+                  <a:schemeClr val="tx1">
+                    <a:tint val="75000"/>
+                  </a:schemeClr>
+                </a:solidFill>
+                <a:latin typeface="+mn-lt"/>
+                <a:ea typeface="+mn-ea"/>
+                <a:cs typeface="+mn-cs"/>
+              </a:rPr>
+              <a:t>Workshop in Data Science|Team 003| Final Presentation</a:t>
+            </a:r>
+            <a:endParaRPr lang="en-US" sz="1200" kern="1200" dirty="0">
+              <a:solidFill>
+                <a:schemeClr val="tx1">
+                  <a:tint val="75000"/>
+                </a:schemeClr>
+              </a:solidFill>
+              <a:latin typeface="+mn-lt"/>
+              <a:ea typeface="+mn-ea"/>
+              <a:cs typeface="+mn-cs"/>
+            </a:endParaRPr>
+          </a:p>
+        </p:txBody>
+      </p:sp>
+      <p:sp>
+        <p:nvSpPr>
+          <p:cNvPr id="4" name="מציין מיקום של מספר שקופית 3">
+            <a:extLst>
+              <a:ext uri="{FF2B5EF4-FFF2-40B4-BE49-F238E27FC236}">
+                <a16:creationId xmlns:a16="http://schemas.microsoft.com/office/drawing/2014/main" id="{64770200-014C-3B45-0B99-25FFE00EC309}"/>
+              </a:ext>
+            </a:extLst>
+          </p:cNvPr>
+          <p:cNvSpPr>
+            <a:spLocks noGrp="1"/>
+          </p:cNvSpPr>
+          <p:nvPr>
+            <p:ph type="sldNum" sz="quarter" idx="12"/>
+          </p:nvPr>
+        </p:nvSpPr>
+        <p:spPr/>
+        <p:txBody>
+          <a:bodyPr/>
+          <a:lstStyle/>
+          <a:p>
+            <a:fld id="{C1FF6DA9-008F-8B48-92A6-B652298478BF}" type="slidenum">
+              <a:rPr lang="en-US" smtClean="0"/>
+              <a:t>6</a:t>
+            </a:fld>
+            <a:endParaRPr lang="en-US" dirty="0"/>
+          </a:p>
+        </p:txBody>
+      </p:sp>
+      <p:sp>
+        <p:nvSpPr>
+          <p:cNvPr id="5" name="כותרת 4">
+            <a:extLst>
+              <a:ext uri="{FF2B5EF4-FFF2-40B4-BE49-F238E27FC236}">
+                <a16:creationId xmlns:a16="http://schemas.microsoft.com/office/drawing/2014/main" id="{65625F20-D571-AC50-5A85-CB6B593432BE}"/>
+              </a:ext>
+            </a:extLst>
+          </p:cNvPr>
+          <p:cNvSpPr>
+            <a:spLocks noGrp="1"/>
+          </p:cNvSpPr>
+          <p:nvPr>
+            <p:ph type="title"/>
+          </p:nvPr>
+        </p:nvSpPr>
+        <p:spPr/>
+        <p:txBody>
+          <a:bodyPr>
+            <a:normAutofit fontScale="90000"/>
+          </a:bodyPr>
+          <a:lstStyle/>
+          <a:p>
+            <a:r>
+              <a:rPr lang="en-US" dirty="0"/>
+              <a:t>Progress and </a:t>
+            </a:r>
+            <a:r>
+              <a:rPr lang="en" dirty="0"/>
+              <a:t>Technical Milestones (2)</a:t>
+            </a:r>
+            <a:endParaRPr lang="he-IL" dirty="0"/>
+          </a:p>
+        </p:txBody>
+      </p:sp>
+      <p:sp>
+        <p:nvSpPr>
+          <p:cNvPr id="7" name="תיבת טקסט 6">
+            <a:extLst>
+              <a:ext uri="{FF2B5EF4-FFF2-40B4-BE49-F238E27FC236}">
+                <a16:creationId xmlns:a16="http://schemas.microsoft.com/office/drawing/2014/main" id="{82638DB8-00E8-AD64-CD16-31C81FA337E2}"/>
+              </a:ext>
+            </a:extLst>
+          </p:cNvPr>
+          <p:cNvSpPr txBox="1"/>
+          <p:nvPr/>
+        </p:nvSpPr>
+        <p:spPr>
+          <a:xfrm>
+            <a:off x="669125" y="1058247"/>
+            <a:ext cx="10853749" cy="2957861"/>
+          </a:xfrm>
+          <a:prstGeom prst="rect">
+            <a:avLst/>
+          </a:prstGeom>
+          <a:noFill/>
+        </p:spPr>
+        <p:txBody>
+          <a:bodyPr wrap="square">
+            <a:spAutoFit/>
+          </a:bodyPr>
+          <a:lstStyle/>
+          <a:p>
+            <a:pPr algn="l" rtl="0">
+              <a:lnSpc>
+                <a:spcPct val="150000"/>
+              </a:lnSpc>
+            </a:pPr>
+            <a:r>
+              <a:rPr lang="en" b="1" u="sng" dirty="0"/>
+              <a:t>Advanced Engineering &amp; Optimization (Post-Checkpoint)</a:t>
+            </a:r>
+          </a:p>
+          <a:p>
+            <a:pPr marL="285750" indent="-285750" algn="l" rtl="0">
+              <a:lnSpc>
+                <a:spcPct val="150000"/>
+              </a:lnSpc>
+              <a:buFont typeface="Arial" panose="020B0604020202020204" pitchFamily="34" charset="0"/>
+              <a:buChar char="•"/>
+            </a:pPr>
+            <a:r>
+              <a:rPr lang="en" b="1" dirty="0"/>
+              <a:t>Specialized Estimators: </a:t>
+            </a:r>
+            <a:r>
+              <a:rPr lang="en" dirty="0"/>
+              <a:t>Developed dedicated model architectures for continuous and discrete prediction.</a:t>
+            </a:r>
+          </a:p>
+          <a:p>
+            <a:pPr marL="285750" indent="-285750" algn="l" rtl="0">
+              <a:lnSpc>
+                <a:spcPct val="150000"/>
+              </a:lnSpc>
+              <a:buFont typeface="Arial" panose="020B0604020202020204" pitchFamily="34" charset="0"/>
+              <a:buChar char="•"/>
+            </a:pPr>
+            <a:r>
+              <a:rPr lang="en" b="1" dirty="0"/>
+              <a:t>Intelligent Feature Selection: </a:t>
+            </a:r>
+            <a:r>
+              <a:rPr lang="en" dirty="0"/>
+              <a:t>Implemented Forward Selection to isolate signal from market noise.</a:t>
+            </a:r>
+            <a:endParaRPr lang="he-IL" dirty="0"/>
+          </a:p>
+          <a:p>
+            <a:pPr marL="285750" indent="-285750" algn="l" rtl="0">
+              <a:lnSpc>
+                <a:spcPct val="150000"/>
+              </a:lnSpc>
+              <a:buFont typeface="Arial" panose="020B0604020202020204" pitchFamily="34" charset="0"/>
+              <a:buChar char="•"/>
+            </a:pPr>
+            <a:r>
+              <a:rPr lang="en" b="1" dirty="0"/>
+              <a:t>Smart Pipelines:  </a:t>
+            </a:r>
+            <a:r>
+              <a:rPr lang="en" dirty="0"/>
+              <a:t>Built automated, leakage-free processing for time-series cleaning and modeling.</a:t>
+            </a:r>
+            <a:endParaRPr lang="he-IL" dirty="0"/>
+          </a:p>
+          <a:p>
+            <a:pPr marL="285750" indent="-285750" algn="l" rtl="0">
+              <a:lnSpc>
+                <a:spcPct val="150000"/>
+              </a:lnSpc>
+              <a:buFont typeface="Arial" panose="020B0604020202020204" pitchFamily="34" charset="0"/>
+              <a:buChar char="•"/>
+            </a:pPr>
+            <a:r>
+              <a:rPr lang="en" b="1" dirty="0"/>
+              <a:t>Advanced Engineering: </a:t>
+            </a:r>
+            <a:r>
+              <a:rPr lang="en" dirty="0"/>
+              <a:t>Integrated full feature blocks and refined sentiment feature alignment.</a:t>
+            </a:r>
+          </a:p>
+          <a:p>
+            <a:pPr marL="285750" indent="-285750" algn="l" rtl="0">
+              <a:lnSpc>
+                <a:spcPct val="150000"/>
+              </a:lnSpc>
+              <a:buFont typeface="Arial" panose="020B0604020202020204" pitchFamily="34" charset="0"/>
+              <a:buChar char="•"/>
+            </a:pPr>
+            <a:r>
+              <a:rPr lang="en" b="1" dirty="0"/>
+              <a:t>"Model Zoo" Benchmarking: </a:t>
+            </a:r>
+            <a:r>
+              <a:rPr lang="en" dirty="0"/>
+              <a:t>Evaluated Linear, Tree-based ensembles, and Boosting algorithms.</a:t>
+            </a:r>
+            <a:endParaRPr lang="he-IL" dirty="0"/>
+          </a:p>
+          <a:p>
+            <a:pPr marL="285750" indent="-285750" algn="l" rtl="0">
+              <a:lnSpc>
+                <a:spcPct val="150000"/>
+              </a:lnSpc>
+              <a:buFont typeface="Arial" panose="020B0604020202020204" pitchFamily="34" charset="0"/>
+              <a:buChar char="•"/>
+            </a:pPr>
+            <a:r>
+              <a:rPr lang="en" b="1" dirty="0"/>
+              <a:t>Model Deep-Dives: </a:t>
+            </a:r>
+            <a:r>
+              <a:rPr lang="en" dirty="0"/>
+              <a:t>Granular hyperparameter tuning and error analysis to maximize predictive accuracy.</a:t>
+            </a:r>
+          </a:p>
+        </p:txBody>
+      </p:sp>
+    </p:spTree>
+    <p:extLst>
+      <p:ext uri="{BB962C8B-B14F-4D97-AF65-F5344CB8AC3E}">
+        <p14:creationId xmlns:p14="http://schemas.microsoft.com/office/powerpoint/2010/main" val="2381906513"/>
+      </p:ext>
+    </p:extLst>
+  </p:cSld>
+  <p:clrMapOvr>
+    <a:masterClrMapping/>
+  </p:clrMapOvr>
+</p:sld>
+</file>
+
+<file path=ppt/slides/slide7.xml><?xml version="1.0" encoding="utf-8"?>
+<p:sld xmlns:a="http://schemas.openxmlformats.org/drawingml/2006/main" xmlns:r="http://schemas.openxmlformats.org/officeDocument/2006/relationships" xmlns:p="http://schemas.openxmlformats.org/presentationml/2006/main">
+  <p:cSld>
+    <p:spTree>
+      <p:nvGrpSpPr>
+        <p:cNvPr id="1" name="">
+          <a:extLst>
+            <a:ext uri="{FF2B5EF4-FFF2-40B4-BE49-F238E27FC236}">
+              <a16:creationId xmlns:a16="http://schemas.microsoft.com/office/drawing/2014/main" id="{06ACFC96-B1D3-E823-EA1B-ABFEC742E8E6}"/>
+            </a:ext>
+          </a:extLst>
+        </p:cNvPr>
+        <p:cNvGrpSpPr/>
+        <p:nvPr/>
+      </p:nvGrpSpPr>
+      <p:grpSpPr>
+        <a:xfrm>
+          <a:off x="0" y="0"/>
+          <a:ext cx="0" cy="0"/>
+          <a:chOff x="0" y="0"/>
+          <a:chExt cx="0" cy="0"/>
+        </a:xfrm>
+      </p:grpSpPr>
+      <p:sp>
+        <p:nvSpPr>
+          <p:cNvPr id="2" name="מציין מיקום של תאריך 1">
+            <a:extLst>
+              <a:ext uri="{FF2B5EF4-FFF2-40B4-BE49-F238E27FC236}">
+                <a16:creationId xmlns:a16="http://schemas.microsoft.com/office/drawing/2014/main" id="{8118498F-E8FD-5622-3985-A0AA2C32ACD0}"/>
+              </a:ext>
+            </a:extLst>
+          </p:cNvPr>
+          <p:cNvSpPr>
+            <a:spLocks noGrp="1"/>
+          </p:cNvSpPr>
+          <p:nvPr>
+            <p:ph type="dt" sz="half" idx="10"/>
+          </p:nvPr>
+        </p:nvSpPr>
+        <p:spPr/>
+        <p:txBody>
+          <a:bodyPr/>
+          <a:lstStyle/>
+          <a:p>
+            <a:fld id="{81A792BA-DE5A-904A-B48C-83C9489152F3}" type="datetime13">
+              <a:rPr lang="he-IL" smtClean="0"/>
+              <a:pPr/>
+              <a:t>17/1/2026</a:t>
+            </a:fld>
+            <a:endParaRPr lang="en-US" dirty="0">
+              <a:cs typeface="Calibri" panose="020F0502020204030204" pitchFamily="34" charset="0"/>
+            </a:endParaRPr>
+          </a:p>
+        </p:txBody>
+      </p:sp>
+      <p:sp>
+        <p:nvSpPr>
+          <p:cNvPr id="3" name="מציין מיקום של כותרת תחתונה 2">
+            <a:extLst>
+              <a:ext uri="{FF2B5EF4-FFF2-40B4-BE49-F238E27FC236}">
+                <a16:creationId xmlns:a16="http://schemas.microsoft.com/office/drawing/2014/main" id="{CF0236D2-3FFB-2CB8-08FF-E850D7C51FE8}"/>
+              </a:ext>
+            </a:extLst>
+          </p:cNvPr>
+          <p:cNvSpPr>
+            <a:spLocks noGrp="1"/>
+          </p:cNvSpPr>
+          <p:nvPr>
+            <p:ph type="ftr" sz="quarter" idx="11"/>
+          </p:nvPr>
+        </p:nvSpPr>
+        <p:spPr/>
+        <p:txBody>
+          <a:bodyPr/>
+          <a:lstStyle/>
+          <a:p>
+            <a:r>
+              <a:rPr lang="en-US" sz="1200" kern="1200">
+                <a:solidFill>
+                  <a:schemeClr val="tx1">
+                    <a:tint val="75000"/>
+                  </a:schemeClr>
+                </a:solidFill>
+                <a:latin typeface="+mn-lt"/>
+                <a:ea typeface="+mn-ea"/>
+                <a:cs typeface="+mn-cs"/>
+              </a:rPr>
+              <a:t>Workshop in Data Science|Team 003| Final Presentation</a:t>
+            </a:r>
+            <a:endParaRPr lang="en-US" sz="1200" kern="1200" dirty="0">
+              <a:solidFill>
+                <a:schemeClr val="tx1">
+                  <a:tint val="75000"/>
+                </a:schemeClr>
+              </a:solidFill>
+              <a:latin typeface="+mn-lt"/>
+              <a:ea typeface="+mn-ea"/>
+              <a:cs typeface="+mn-cs"/>
+            </a:endParaRPr>
+          </a:p>
+        </p:txBody>
+      </p:sp>
+      <p:sp>
+        <p:nvSpPr>
+          <p:cNvPr id="4" name="מציין מיקום של מספר שקופית 3">
+            <a:extLst>
+              <a:ext uri="{FF2B5EF4-FFF2-40B4-BE49-F238E27FC236}">
+                <a16:creationId xmlns:a16="http://schemas.microsoft.com/office/drawing/2014/main" id="{4F464B33-C26D-8009-643D-2A5AA37DBB68}"/>
+              </a:ext>
+            </a:extLst>
+          </p:cNvPr>
+          <p:cNvSpPr>
+            <a:spLocks noGrp="1"/>
+          </p:cNvSpPr>
+          <p:nvPr>
+            <p:ph type="sldNum" sz="quarter" idx="12"/>
+          </p:nvPr>
+        </p:nvSpPr>
+        <p:spPr/>
+        <p:txBody>
+          <a:bodyPr/>
+          <a:lstStyle/>
+          <a:p>
+            <a:fld id="{C1FF6DA9-008F-8B48-92A6-B652298478BF}" type="slidenum">
+              <a:rPr lang="en-US" smtClean="0"/>
+              <a:t>7</a:t>
+            </a:fld>
+            <a:endParaRPr lang="en-US" dirty="0"/>
+          </a:p>
+        </p:txBody>
+      </p:sp>
+      <p:sp>
+        <p:nvSpPr>
+          <p:cNvPr id="5" name="כותרת 4">
+            <a:extLst>
+              <a:ext uri="{FF2B5EF4-FFF2-40B4-BE49-F238E27FC236}">
+                <a16:creationId xmlns:a16="http://schemas.microsoft.com/office/drawing/2014/main" id="{59FE3D31-736C-BDC3-67C1-3357E8545DC2}"/>
+              </a:ext>
+            </a:extLst>
+          </p:cNvPr>
+          <p:cNvSpPr>
+            <a:spLocks noGrp="1"/>
+          </p:cNvSpPr>
+          <p:nvPr>
+            <p:ph type="title"/>
+          </p:nvPr>
+        </p:nvSpPr>
+        <p:spPr/>
+        <p:txBody>
+          <a:bodyPr>
+            <a:normAutofit fontScale="90000"/>
+          </a:bodyPr>
+          <a:lstStyle/>
+          <a:p>
+            <a:pPr algn="l" defTabSz="457200" rtl="0" eaLnBrk="1" latinLnBrk="0" hangingPunct="1">
+              <a:spcBef>
+                <a:spcPct val="0"/>
+              </a:spcBef>
+              <a:buNone/>
+            </a:pPr>
+            <a:r>
+              <a:rPr lang="en-US" dirty="0"/>
+              <a:t>Progress</a:t>
+            </a:r>
+            <a:endParaRPr lang="he-IL" dirty="0"/>
+          </a:p>
+        </p:txBody>
+      </p:sp>
+      <p:sp>
+        <p:nvSpPr>
+          <p:cNvPr id="17" name="תיבת טקסט 16">
+            <a:extLst>
+              <a:ext uri="{FF2B5EF4-FFF2-40B4-BE49-F238E27FC236}">
+                <a16:creationId xmlns:a16="http://schemas.microsoft.com/office/drawing/2014/main" id="{1E276E91-731F-CAC3-3AE7-C8797C7CE1CF}"/>
+              </a:ext>
+            </a:extLst>
+          </p:cNvPr>
+          <p:cNvSpPr txBox="1"/>
+          <p:nvPr/>
+        </p:nvSpPr>
+        <p:spPr>
+          <a:xfrm>
+            <a:off x="609600" y="935974"/>
+            <a:ext cx="11707091" cy="4896853"/>
+          </a:xfrm>
+          <a:prstGeom prst="rect">
+            <a:avLst/>
+          </a:prstGeom>
+          <a:noFill/>
+        </p:spPr>
+        <p:txBody>
+          <a:bodyPr wrap="square">
+            <a:spAutoFit/>
+          </a:bodyPr>
+          <a:lstStyle/>
+          <a:p>
+            <a:pPr algn="l" rtl="0">
+              <a:lnSpc>
+                <a:spcPct val="150000"/>
+              </a:lnSpc>
+              <a:spcAft>
+                <a:spcPts val="600"/>
+              </a:spcAft>
+              <a:buNone/>
+            </a:pPr>
+            <a:r>
+              <a:rPr lang="en" b="1" dirty="0">
+                <a:solidFill>
+                  <a:srgbClr val="1F1F1F"/>
+                </a:solidFill>
+                <a:effectLst/>
+                <a:latin typeface="Calibri" panose="020F0502020204030204" pitchFamily="34" charset="0"/>
+                <a:cs typeface="Calibri" panose="020F0502020204030204" pitchFamily="34" charset="0"/>
+              </a:rPr>
+              <a:t>Stage I: Foundations (Pre-Checkpoint)</a:t>
+            </a:r>
+            <a:endParaRPr lang="en" dirty="0">
+              <a:solidFill>
+                <a:srgbClr val="1F1F1F"/>
+              </a:solidFill>
+              <a:effectLst/>
+              <a:latin typeface="Calibri" panose="020F0502020204030204" pitchFamily="34" charset="0"/>
+              <a:cs typeface="Calibri" panose="020F0502020204030204" pitchFamily="34" charset="0"/>
+            </a:endParaRPr>
+          </a:p>
+          <a:p>
+            <a:pPr marL="285750" indent="-285750" algn="l" rtl="0">
+              <a:lnSpc>
+                <a:spcPct val="150000"/>
+              </a:lnSpc>
+              <a:spcAft>
+                <a:spcPts val="600"/>
+              </a:spcAft>
+              <a:buFont typeface="Arial" panose="020B0604020202020204" pitchFamily="34" charset="0"/>
+              <a:buChar char="•"/>
+            </a:pPr>
+            <a:r>
+              <a:rPr lang="en" b="1" dirty="0">
+                <a:solidFill>
+                  <a:srgbClr val="1F1F1F"/>
+                </a:solidFill>
+                <a:effectLst/>
+                <a:latin typeface="Calibri" panose="020F0502020204030204" pitchFamily="34" charset="0"/>
+                <a:cs typeface="Calibri" panose="020F0502020204030204" pitchFamily="34" charset="0"/>
+              </a:rPr>
+              <a:t>Scope Definition:</a:t>
+            </a:r>
+            <a:r>
+              <a:rPr lang="en" dirty="0">
+                <a:solidFill>
+                  <a:srgbClr val="1F1F1F"/>
+                </a:solidFill>
+                <a:effectLst/>
+                <a:latin typeface="Calibri" panose="020F0502020204030204" pitchFamily="34" charset="0"/>
+                <a:cs typeface="Calibri" panose="020F0502020204030204" pitchFamily="34" charset="0"/>
+              </a:rPr>
+              <a:t> Focused on major Tech indices (AAPL, MSFT, AMZN, GOOG).</a:t>
+            </a:r>
+          </a:p>
+          <a:p>
+            <a:pPr marL="285750" indent="-285750" algn="l" rtl="0">
+              <a:lnSpc>
+                <a:spcPct val="150000"/>
+              </a:lnSpc>
+              <a:spcAft>
+                <a:spcPts val="600"/>
+              </a:spcAft>
+              <a:buFont typeface="Arial" panose="020B0604020202020204" pitchFamily="34" charset="0"/>
+              <a:buChar char="•"/>
+            </a:pPr>
+            <a:r>
+              <a:rPr lang="en" b="1" dirty="0">
+                <a:solidFill>
+                  <a:srgbClr val="1F1F1F"/>
+                </a:solidFill>
+                <a:effectLst/>
+                <a:latin typeface="Calibri" panose="020F0502020204030204" pitchFamily="34" charset="0"/>
+                <a:cs typeface="Calibri" panose="020F0502020204030204" pitchFamily="34" charset="0"/>
+              </a:rPr>
+              <a:t>Data Infrastructure:</a:t>
+            </a:r>
+            <a:r>
+              <a:rPr lang="en" dirty="0">
+                <a:solidFill>
+                  <a:srgbClr val="1F1F1F"/>
+                </a:solidFill>
+                <a:effectLst/>
+                <a:latin typeface="Calibri" panose="020F0502020204030204" pitchFamily="34" charset="0"/>
+                <a:cs typeface="Calibri" panose="020F0502020204030204" pitchFamily="34" charset="0"/>
+              </a:rPr>
+              <a:t> Built automated pipelines for fetching OHLCV market data &amp; Google News headlines.</a:t>
+            </a:r>
+          </a:p>
+          <a:p>
+            <a:pPr marL="285750" indent="-285750" algn="l" rtl="0">
+              <a:lnSpc>
+                <a:spcPct val="150000"/>
+              </a:lnSpc>
+              <a:spcAft>
+                <a:spcPts val="600"/>
+              </a:spcAft>
+              <a:buFont typeface="Arial" panose="020B0604020202020204" pitchFamily="34" charset="0"/>
+              <a:buChar char="•"/>
+            </a:pPr>
+            <a:r>
+              <a:rPr lang="en" b="1" dirty="0">
+                <a:solidFill>
+                  <a:srgbClr val="1F1F1F"/>
+                </a:solidFill>
+                <a:effectLst/>
+                <a:latin typeface="Calibri" panose="020F0502020204030204" pitchFamily="34" charset="0"/>
+                <a:cs typeface="Calibri" panose="020F0502020204030204" pitchFamily="34" charset="0"/>
+              </a:rPr>
+              <a:t>Initial Analysis:</a:t>
+            </a:r>
+            <a:r>
+              <a:rPr lang="en" dirty="0">
+                <a:solidFill>
+                  <a:srgbClr val="1F1F1F"/>
+                </a:solidFill>
+                <a:effectLst/>
+                <a:latin typeface="Calibri" panose="020F0502020204030204" pitchFamily="34" charset="0"/>
+                <a:cs typeface="Calibri" panose="020F0502020204030204" pitchFamily="34" charset="0"/>
+              </a:rPr>
+              <a:t> Conducted EDA (Exploratory Data Analysis) on price distributions and volatility.</a:t>
+            </a:r>
+          </a:p>
+          <a:p>
+            <a:pPr algn="l" rtl="0">
+              <a:lnSpc>
+                <a:spcPct val="150000"/>
+              </a:lnSpc>
+              <a:spcAft>
+                <a:spcPts val="600"/>
+              </a:spcAft>
+            </a:pPr>
+            <a:endParaRPr lang="en" dirty="0">
+              <a:solidFill>
+                <a:srgbClr val="1F1F1F"/>
+              </a:solidFill>
+              <a:effectLst/>
+              <a:latin typeface="Calibri" panose="020F0502020204030204" pitchFamily="34" charset="0"/>
+              <a:cs typeface="Calibri" panose="020F0502020204030204" pitchFamily="34" charset="0"/>
+            </a:endParaRPr>
+          </a:p>
+          <a:p>
+            <a:pPr algn="l" rtl="0">
+              <a:lnSpc>
+                <a:spcPct val="150000"/>
+              </a:lnSpc>
+              <a:spcAft>
+                <a:spcPts val="600"/>
+              </a:spcAft>
+              <a:buNone/>
+            </a:pPr>
+            <a:r>
+              <a:rPr lang="en" b="1" dirty="0">
+                <a:solidFill>
+                  <a:srgbClr val="1F1F1F"/>
+                </a:solidFill>
+                <a:effectLst/>
+                <a:latin typeface="Calibri" panose="020F0502020204030204" pitchFamily="34" charset="0"/>
+                <a:cs typeface="Calibri" panose="020F0502020204030204" pitchFamily="34" charset="0"/>
+              </a:rPr>
+              <a:t>Stage II: Advanced Engineering (Post-Checkpoint)</a:t>
+            </a:r>
+          </a:p>
+          <a:p>
+            <a:pPr marL="285750" indent="-285750" algn="l" rtl="0">
+              <a:lnSpc>
+                <a:spcPct val="150000"/>
+              </a:lnSpc>
+              <a:spcAft>
+                <a:spcPts val="600"/>
+              </a:spcAft>
+              <a:buFont typeface="Arial" panose="020B0604020202020204" pitchFamily="34" charset="0"/>
+              <a:buChar char="•"/>
+            </a:pPr>
+            <a:r>
+              <a:rPr lang="en" b="1" dirty="0">
+                <a:solidFill>
+                  <a:srgbClr val="1F1F1F"/>
+                </a:solidFill>
+                <a:effectLst/>
+                <a:latin typeface="Calibri" panose="020F0502020204030204" pitchFamily="34" charset="0"/>
+                <a:cs typeface="Calibri" panose="020F0502020204030204" pitchFamily="34" charset="0"/>
+              </a:rPr>
+              <a:t>Feature Architecture:</a:t>
+            </a:r>
+            <a:r>
+              <a:rPr lang="en" dirty="0">
+                <a:solidFill>
+                  <a:srgbClr val="1F1F1F"/>
+                </a:solidFill>
+                <a:effectLst/>
+                <a:latin typeface="Calibri" panose="020F0502020204030204" pitchFamily="34" charset="0"/>
+                <a:cs typeface="Calibri" panose="020F0502020204030204" pitchFamily="34" charset="0"/>
+              </a:rPr>
+              <a:t> Developed modular "Feature Blocks" (Momentum, Volatility) &amp; integrated </a:t>
+            </a:r>
+            <a:r>
+              <a:rPr lang="en" b="1" dirty="0" err="1">
+                <a:solidFill>
+                  <a:srgbClr val="1F1F1F"/>
+                </a:solidFill>
+                <a:effectLst/>
+                <a:latin typeface="Calibri" panose="020F0502020204030204" pitchFamily="34" charset="0"/>
+                <a:cs typeface="Calibri" panose="020F0502020204030204" pitchFamily="34" charset="0"/>
+              </a:rPr>
+              <a:t>FinBERT</a:t>
+            </a:r>
+            <a:r>
+              <a:rPr lang="en" dirty="0">
+                <a:solidFill>
+                  <a:srgbClr val="1F1F1F"/>
+                </a:solidFill>
+                <a:effectLst/>
+                <a:latin typeface="Calibri" panose="020F0502020204030204" pitchFamily="34" charset="0"/>
+                <a:cs typeface="Calibri" panose="020F0502020204030204" pitchFamily="34" charset="0"/>
+              </a:rPr>
+              <a:t> for Sentiment.</a:t>
+            </a:r>
+          </a:p>
+          <a:p>
+            <a:pPr marL="285750" indent="-285750" algn="l" rtl="0">
+              <a:lnSpc>
+                <a:spcPct val="150000"/>
+              </a:lnSpc>
+              <a:spcAft>
+                <a:spcPts val="600"/>
+              </a:spcAft>
+              <a:buFont typeface="Arial" panose="020B0604020202020204" pitchFamily="34" charset="0"/>
+              <a:buChar char="•"/>
+            </a:pPr>
+            <a:r>
+              <a:rPr lang="en" b="1" dirty="0">
+                <a:solidFill>
+                  <a:srgbClr val="1F1F1F"/>
+                </a:solidFill>
+                <a:effectLst/>
+                <a:latin typeface="Calibri" panose="020F0502020204030204" pitchFamily="34" charset="0"/>
+                <a:cs typeface="Calibri" panose="020F0502020204030204" pitchFamily="34" charset="0"/>
+              </a:rPr>
+              <a:t>Leakage-Free Pipelines:</a:t>
+            </a:r>
+            <a:r>
+              <a:rPr lang="en" dirty="0">
+                <a:solidFill>
+                  <a:srgbClr val="1F1F1F"/>
+                </a:solidFill>
+                <a:effectLst/>
+                <a:latin typeface="Calibri" panose="020F0502020204030204" pitchFamily="34" charset="0"/>
+                <a:cs typeface="Calibri" panose="020F0502020204030204" pitchFamily="34" charset="0"/>
+              </a:rPr>
+              <a:t> Engineered custom transformers for time-series cleaning and scaling without look-ahead bias.</a:t>
+            </a:r>
+          </a:p>
+          <a:p>
+            <a:pPr marL="285750" indent="-285750" algn="l" rtl="0">
+              <a:lnSpc>
+                <a:spcPct val="150000"/>
+              </a:lnSpc>
+              <a:spcAft>
+                <a:spcPts val="600"/>
+              </a:spcAft>
+              <a:buFont typeface="Arial" panose="020B0604020202020204" pitchFamily="34" charset="0"/>
+              <a:buChar char="•"/>
+            </a:pPr>
+            <a:r>
+              <a:rPr lang="en" b="1" dirty="0">
+                <a:solidFill>
+                  <a:srgbClr val="1F1F1F"/>
+                </a:solidFill>
+                <a:effectLst/>
+                <a:latin typeface="Calibri" panose="020F0502020204030204" pitchFamily="34" charset="0"/>
+                <a:cs typeface="Calibri" panose="020F0502020204030204" pitchFamily="34" charset="0"/>
+              </a:rPr>
+              <a:t>Rigorous Validation:</a:t>
+            </a:r>
+            <a:r>
+              <a:rPr lang="en" dirty="0">
+                <a:solidFill>
+                  <a:srgbClr val="1F1F1F"/>
+                </a:solidFill>
+                <a:effectLst/>
+                <a:latin typeface="Calibri" panose="020F0502020204030204" pitchFamily="34" charset="0"/>
+                <a:cs typeface="Calibri" panose="020F0502020204030204" pitchFamily="34" charset="0"/>
+              </a:rPr>
+              <a:t> Implemented strict </a:t>
+            </a:r>
+            <a:r>
+              <a:rPr lang="en" b="1" dirty="0">
+                <a:solidFill>
+                  <a:srgbClr val="1F1F1F"/>
+                </a:solidFill>
+                <a:effectLst/>
+                <a:latin typeface="Calibri" panose="020F0502020204030204" pitchFamily="34" charset="0"/>
+                <a:cs typeface="Calibri" panose="020F0502020204030204" pitchFamily="34" charset="0"/>
+              </a:rPr>
+              <a:t>Walk-Forward Validation</a:t>
+            </a:r>
+            <a:r>
+              <a:rPr lang="en" dirty="0">
+                <a:solidFill>
+                  <a:srgbClr val="1F1F1F"/>
+                </a:solidFill>
+                <a:effectLst/>
+                <a:latin typeface="Calibri" panose="020F0502020204030204" pitchFamily="34" charset="0"/>
+                <a:cs typeface="Calibri" panose="020F0502020204030204" pitchFamily="34" charset="0"/>
+              </a:rPr>
+              <a:t> (Expanding Window) to mimic real trading.</a:t>
+            </a:r>
+          </a:p>
+          <a:p>
+            <a:pPr marL="285750" indent="-285750" algn="l" rtl="0">
+              <a:lnSpc>
+                <a:spcPct val="150000"/>
+              </a:lnSpc>
+              <a:spcAft>
+                <a:spcPts val="600"/>
+              </a:spcAft>
+              <a:buFont typeface="Arial" panose="020B0604020202020204" pitchFamily="34" charset="0"/>
+              <a:buChar char="•"/>
+            </a:pPr>
+            <a:r>
+              <a:rPr lang="en" b="1" dirty="0">
+                <a:solidFill>
+                  <a:srgbClr val="1F1F1F"/>
+                </a:solidFill>
+                <a:effectLst/>
+                <a:latin typeface="Calibri" panose="020F0502020204030204" pitchFamily="34" charset="0"/>
+                <a:cs typeface="Calibri" panose="020F0502020204030204" pitchFamily="34" charset="0"/>
+              </a:rPr>
+              <a:t>Optimization:</a:t>
+            </a:r>
+            <a:r>
+              <a:rPr lang="en" dirty="0">
+                <a:solidFill>
+                  <a:srgbClr val="1F1F1F"/>
+                </a:solidFill>
+                <a:effectLst/>
+                <a:latin typeface="Calibri" panose="020F0502020204030204" pitchFamily="34" charset="0"/>
+                <a:cs typeface="Calibri" panose="020F0502020204030204" pitchFamily="34" charset="0"/>
+              </a:rPr>
+              <a:t> Executed Feature Selection experiments and tuned ML models (Random Forest vs. Baselines).</a:t>
+            </a:r>
+          </a:p>
+        </p:txBody>
+      </p:sp>
+    </p:spTree>
+    <p:extLst>
+      <p:ext uri="{BB962C8B-B14F-4D97-AF65-F5344CB8AC3E}">
+        <p14:creationId xmlns:p14="http://schemas.microsoft.com/office/powerpoint/2010/main" val="3945136058"/>
+      </p:ext>
+    </p:extLst>
+  </p:cSld>
+  <p:clrMapOvr>
+    <a:masterClrMapping/>
+  </p:clrMapOvr>
+</p:sld>
+</file>
+
+<file path=ppt/slides/slide8.xml><?xml version="1.0" encoding="utf-8"?>
+<p:sld xmlns:a="http://schemas.openxmlformats.org/drawingml/2006/main" xmlns:r="http://schemas.openxmlformats.org/officeDocument/2006/relationships" xmlns:p="http://schemas.openxmlformats.org/presentationml/2006/main">
+  <p:cSld>
+    <p:spTree>
+      <p:nvGrpSpPr>
         <p:cNvPr id="1" name=""/>
         <p:cNvGrpSpPr/>
         <p:nvPr/>
@@ -18141,7 +20981,7 @@
             <a:fld id="{81A792BA-DE5A-904A-B48C-83C9489152F3}" type="datetime13">
               <a:rPr lang="he-IL" smtClean="0"/>
               <a:pPr/>
-              <a:t>16/1/2026</a:t>
+              <a:t>17/1/2026</a:t>
             </a:fld>
             <a:endParaRPr lang="en-US" dirty="0">
               <a:cs typeface="Calibri" panose="020F0502020204030204" pitchFamily="34" charset="0"/>
@@ -18219,7 +21059,7 @@
           <a:p>
             <a:fld id="{C1FF6DA9-008F-8B48-92A6-B652298478BF}" type="slidenum">
               <a:rPr lang="en-US" smtClean="0"/>
-              <a:t>6</a:t>
+              <a:t>8</a:t>
             </a:fld>
             <a:endParaRPr lang="en-US" dirty="0"/>
           </a:p>
@@ -18273,7 +21113,7 @@
 </p:sld>
 </file>
 
-<file path=ppt/slides/slide7.xml><?xml version="1.0" encoding="utf-8"?>
+<file path=ppt/slides/slide9.xml><?xml version="1.0" encoding="utf-8"?>
 <p:sld xmlns:a="http://schemas.openxmlformats.org/drawingml/2006/main" xmlns:r="http://schemas.openxmlformats.org/officeDocument/2006/relationships" xmlns:p="http://schemas.openxmlformats.org/presentationml/2006/main">
   <p:cSld>
     <p:spTree>
@@ -18320,7 +21160,7 @@
             <a:fld id="{81A792BA-DE5A-904A-B48C-83C9489152F3}" type="datetime13">
               <a:rPr lang="he-IL" smtClean="0"/>
               <a:pPr/>
-              <a:t>16/1/2026</a:t>
+              <a:t>17/1/2026</a:t>
             </a:fld>
             <a:endParaRPr lang="en-US" dirty="0">
               <a:cs typeface="Calibri" panose="020F0502020204030204" pitchFamily="34" charset="0"/>
@@ -18398,7 +21238,7 @@
           <a:p>
             <a:fld id="{C1FF6DA9-008F-8B48-92A6-B652298478BF}" type="slidenum">
               <a:rPr lang="en-US" smtClean="0"/>
-              <a:t>7</a:t>
+              <a:t>9</a:t>
             </a:fld>
             <a:endParaRPr lang="en-US" dirty="0"/>
           </a:p>
@@ -18966,2198 +21806,6 @@
     <p:extLst>
       <p:ext uri="{BB962C8B-B14F-4D97-AF65-F5344CB8AC3E}">
         <p14:creationId xmlns:p14="http://schemas.microsoft.com/office/powerpoint/2010/main" val="2426171341"/>
-      </p:ext>
-    </p:extLst>
-  </p:cSld>
-  <p:clrMapOvr>
-    <a:masterClrMapping/>
-  </p:clrMapOvr>
-</p:sld>
-</file>
-
-<file path=ppt/slides/slide8.xml><?xml version="1.0" encoding="utf-8"?>
-<p:sld xmlns:a="http://schemas.openxmlformats.org/drawingml/2006/main" xmlns:r="http://schemas.openxmlformats.org/officeDocument/2006/relationships" xmlns:p="http://schemas.openxmlformats.org/presentationml/2006/main">
-  <p:cSld>
-    <p:spTree>
-      <p:nvGrpSpPr>
-        <p:cNvPr id="1" name="">
-          <a:extLst>
-            <a:ext uri="{FF2B5EF4-FFF2-40B4-BE49-F238E27FC236}">
-              <a16:creationId xmlns:a16="http://schemas.microsoft.com/office/drawing/2014/main" id="{10D8440C-C2C2-47B2-5463-18EEDB50686A}"/>
-            </a:ext>
-          </a:extLst>
-        </p:cNvPr>
-        <p:cNvGrpSpPr/>
-        <p:nvPr/>
-      </p:nvGrpSpPr>
-      <p:grpSpPr>
-        <a:xfrm>
-          <a:off x="0" y="0"/>
-          <a:ext cx="0" cy="0"/>
-          <a:chOff x="0" y="0"/>
-          <a:chExt cx="0" cy="0"/>
-        </a:xfrm>
-      </p:grpSpPr>
-      <p:sp>
-        <p:nvSpPr>
-          <p:cNvPr id="2" name="מציין מיקום של תאריך 1">
-            <a:extLst>
-              <a:ext uri="{FF2B5EF4-FFF2-40B4-BE49-F238E27FC236}">
-                <a16:creationId xmlns:a16="http://schemas.microsoft.com/office/drawing/2014/main" id="{471033F1-27D9-0B14-C65F-6E6F0F396357}"/>
-              </a:ext>
-            </a:extLst>
-          </p:cNvPr>
-          <p:cNvSpPr>
-            <a:spLocks noGrp="1"/>
-          </p:cNvSpPr>
-          <p:nvPr>
-            <p:ph type="dt" sz="half" idx="10"/>
-          </p:nvPr>
-        </p:nvSpPr>
-        <p:spPr/>
-        <p:txBody>
-          <a:bodyPr/>
-          <a:lstStyle/>
-          <a:p>
-            <a:fld id="{81A792BA-DE5A-904A-B48C-83C9489152F3}" type="datetime13">
-              <a:rPr lang="he-IL" smtClean="0"/>
-              <a:pPr/>
-              <a:t>16/1/2026</a:t>
-            </a:fld>
-            <a:endParaRPr lang="en-US" dirty="0">
-              <a:cs typeface="Calibri" panose="020F0502020204030204" pitchFamily="34" charset="0"/>
-            </a:endParaRPr>
-          </a:p>
-        </p:txBody>
-      </p:sp>
-      <p:sp>
-        <p:nvSpPr>
-          <p:cNvPr id="3" name="מציין מיקום של כותרת תחתונה 2">
-            <a:extLst>
-              <a:ext uri="{FF2B5EF4-FFF2-40B4-BE49-F238E27FC236}">
-                <a16:creationId xmlns:a16="http://schemas.microsoft.com/office/drawing/2014/main" id="{FBF1C0A3-8B01-27A3-EC29-FC62EA2BED67}"/>
-              </a:ext>
-            </a:extLst>
-          </p:cNvPr>
-          <p:cNvSpPr>
-            <a:spLocks noGrp="1"/>
-          </p:cNvSpPr>
-          <p:nvPr>
-            <p:ph type="ftr" sz="quarter" idx="11"/>
-          </p:nvPr>
-        </p:nvSpPr>
-        <p:spPr/>
-        <p:txBody>
-          <a:bodyPr/>
-          <a:lstStyle/>
-          <a:p>
-            <a:r>
-              <a:rPr lang="en-US" sz="1200" kern="1200">
-                <a:solidFill>
-                  <a:schemeClr val="tx1">
-                    <a:tint val="75000"/>
-                  </a:schemeClr>
-                </a:solidFill>
-                <a:latin typeface="+mn-lt"/>
-                <a:ea typeface="+mn-ea"/>
-                <a:cs typeface="+mn-cs"/>
-              </a:rPr>
-              <a:t>Workshop in Data Science|Team 003| Final Presentation</a:t>
-            </a:r>
-            <a:endParaRPr lang="en-US" sz="1200" kern="1200" dirty="0">
-              <a:solidFill>
-                <a:schemeClr val="tx1">
-                  <a:tint val="75000"/>
-                </a:schemeClr>
-              </a:solidFill>
-              <a:latin typeface="+mn-lt"/>
-              <a:ea typeface="+mn-ea"/>
-              <a:cs typeface="+mn-cs"/>
-            </a:endParaRPr>
-          </a:p>
-        </p:txBody>
-      </p:sp>
-      <p:sp>
-        <p:nvSpPr>
-          <p:cNvPr id="4" name="מציין מיקום של מספר שקופית 3">
-            <a:extLst>
-              <a:ext uri="{FF2B5EF4-FFF2-40B4-BE49-F238E27FC236}">
-                <a16:creationId xmlns:a16="http://schemas.microsoft.com/office/drawing/2014/main" id="{B27DBA00-1FB2-40E1-000E-19075092A9F2}"/>
-              </a:ext>
-            </a:extLst>
-          </p:cNvPr>
-          <p:cNvSpPr>
-            <a:spLocks noGrp="1"/>
-          </p:cNvSpPr>
-          <p:nvPr>
-            <p:ph type="sldNum" sz="quarter" idx="12"/>
-          </p:nvPr>
-        </p:nvSpPr>
-        <p:spPr/>
-        <p:txBody>
-          <a:bodyPr/>
-          <a:lstStyle/>
-          <a:p>
-            <a:fld id="{C1FF6DA9-008F-8B48-92A6-B652298478BF}" type="slidenum">
-              <a:rPr lang="en-US" smtClean="0"/>
-              <a:t>8</a:t>
-            </a:fld>
-            <a:endParaRPr lang="en-US" dirty="0"/>
-          </a:p>
-        </p:txBody>
-      </p:sp>
-      <p:sp>
-        <p:nvSpPr>
-          <p:cNvPr id="5" name="כותרת 4">
-            <a:extLst>
-              <a:ext uri="{FF2B5EF4-FFF2-40B4-BE49-F238E27FC236}">
-                <a16:creationId xmlns:a16="http://schemas.microsoft.com/office/drawing/2014/main" id="{2BC53651-C2A8-A087-6C3A-ED929FDF1434}"/>
-              </a:ext>
-            </a:extLst>
-          </p:cNvPr>
-          <p:cNvSpPr>
-            <a:spLocks noGrp="1"/>
-          </p:cNvSpPr>
-          <p:nvPr>
-            <p:ph type="title"/>
-          </p:nvPr>
-        </p:nvSpPr>
-        <p:spPr/>
-        <p:txBody>
-          <a:bodyPr>
-            <a:normAutofit fontScale="90000"/>
-          </a:bodyPr>
-          <a:lstStyle/>
-          <a:p>
-            <a:r>
-              <a:rPr lang="en-US" dirty="0">
-                <a:solidFill>
-                  <a:srgbClr val="0F172A"/>
-                </a:solidFill>
-                <a:ea typeface="Calibri" panose="020F0502020204030204" pitchFamily="34" charset="0"/>
-              </a:rPr>
-              <a:t>Data &amp; feature engineering (block-based)</a:t>
-            </a:r>
-            <a:endParaRPr lang="he-IL" dirty="0"/>
-          </a:p>
-        </p:txBody>
-      </p:sp>
-      <p:sp>
-        <p:nvSpPr>
-          <p:cNvPr id="18" name="Text 13">
-            <a:extLst>
-              <a:ext uri="{FF2B5EF4-FFF2-40B4-BE49-F238E27FC236}">
-                <a16:creationId xmlns:a16="http://schemas.microsoft.com/office/drawing/2014/main" id="{99D1228F-69E5-4AEF-8898-58CCEEAAC8E8}"/>
-              </a:ext>
-            </a:extLst>
-          </p:cNvPr>
-          <p:cNvSpPr/>
-          <p:nvPr/>
-        </p:nvSpPr>
-        <p:spPr>
-          <a:xfrm>
-            <a:off x="548640" y="978408"/>
-            <a:ext cx="5669280" cy="365760"/>
-          </a:xfrm>
-          <a:prstGeom prst="rect">
-            <a:avLst/>
-          </a:prstGeom>
-          <a:noFill/>
-          <a:ln/>
-        </p:spPr>
-        <p:txBody>
-          <a:bodyPr wrap="square" rtlCol="0" anchor="ctr"/>
-          <a:lstStyle/>
-          <a:p>
-            <a:pPr marL="0" indent="0" algn="l" rtl="0">
-              <a:buNone/>
-            </a:pPr>
-            <a:r>
-              <a:rPr lang="en-US" sz="2000" b="1" dirty="0">
-                <a:solidFill>
-                  <a:srgbClr val="0F172A"/>
-                </a:solidFill>
-                <a:latin typeface="Calibri" pitchFamily="34" charset="0"/>
-                <a:ea typeface="Calibri" pitchFamily="34" charset="-122"/>
-                <a:cs typeface="Calibri" pitchFamily="34" charset="-120"/>
-              </a:rPr>
-              <a:t>Feature blocks</a:t>
-            </a:r>
-            <a:endParaRPr lang="en-US" sz="2000" dirty="0"/>
-          </a:p>
-        </p:txBody>
-      </p:sp>
-      <p:sp>
-        <p:nvSpPr>
-          <p:cNvPr id="19" name="Shape 14">
-            <a:extLst>
-              <a:ext uri="{FF2B5EF4-FFF2-40B4-BE49-F238E27FC236}">
-                <a16:creationId xmlns:a16="http://schemas.microsoft.com/office/drawing/2014/main" id="{BE78DAB1-6B15-7AB0-F66A-A8D9AC0AAD5D}"/>
-              </a:ext>
-            </a:extLst>
-          </p:cNvPr>
-          <p:cNvSpPr/>
-          <p:nvPr/>
-        </p:nvSpPr>
-        <p:spPr>
-          <a:xfrm>
-            <a:off x="548640" y="1498981"/>
-            <a:ext cx="5669280" cy="548640"/>
-          </a:xfrm>
-          <a:prstGeom prst="roundRect">
-            <a:avLst/>
-          </a:prstGeom>
-          <a:solidFill>
-            <a:srgbClr val="FFFFFF"/>
-          </a:solidFill>
-          <a:ln w="12700">
-            <a:solidFill>
-              <a:srgbClr val="E2E8F0"/>
-            </a:solidFill>
-            <a:prstDash val="solid"/>
-          </a:ln>
-        </p:spPr>
-        <p:txBody>
-          <a:bodyPr/>
-          <a:lstStyle/>
-          <a:p>
-            <a:pPr algn="l" rtl="0"/>
-            <a:endParaRPr lang="he-IL"/>
-          </a:p>
-        </p:txBody>
-      </p:sp>
-      <p:sp>
-        <p:nvSpPr>
-          <p:cNvPr id="20" name="Shape 15">
-            <a:extLst>
-              <a:ext uri="{FF2B5EF4-FFF2-40B4-BE49-F238E27FC236}">
-                <a16:creationId xmlns:a16="http://schemas.microsoft.com/office/drawing/2014/main" id="{1242BA8E-3ED1-C5C6-52DD-B2C1D7D8C4E3}"/>
-              </a:ext>
-            </a:extLst>
-          </p:cNvPr>
-          <p:cNvSpPr/>
-          <p:nvPr/>
-        </p:nvSpPr>
-        <p:spPr>
-          <a:xfrm>
-            <a:off x="548640" y="1498981"/>
-            <a:ext cx="109728" cy="548640"/>
-          </a:xfrm>
-          <a:prstGeom prst="rect">
-            <a:avLst/>
-          </a:prstGeom>
-          <a:solidFill>
-            <a:schemeClr val="tx2">
-              <a:lumMod val="75000"/>
-            </a:schemeClr>
-          </a:solidFill>
-          <a:ln w="12700">
-            <a:solidFill>
-              <a:schemeClr val="accent1"/>
-            </a:solidFill>
-            <a:prstDash val="solid"/>
-          </a:ln>
-        </p:spPr>
-        <p:txBody>
-          <a:bodyPr/>
-          <a:lstStyle/>
-          <a:p>
-            <a:pPr algn="l" rtl="0"/>
-            <a:endParaRPr lang="he-IL"/>
-          </a:p>
-        </p:txBody>
-      </p:sp>
-      <p:sp>
-        <p:nvSpPr>
-          <p:cNvPr id="21" name="Text 16">
-            <a:extLst>
-              <a:ext uri="{FF2B5EF4-FFF2-40B4-BE49-F238E27FC236}">
-                <a16:creationId xmlns:a16="http://schemas.microsoft.com/office/drawing/2014/main" id="{A4BCB0F2-3A46-32EA-DBEF-07A048A16D7A}"/>
-              </a:ext>
-            </a:extLst>
-          </p:cNvPr>
-          <p:cNvSpPr/>
-          <p:nvPr/>
-        </p:nvSpPr>
-        <p:spPr>
-          <a:xfrm>
-            <a:off x="777240" y="1608709"/>
-            <a:ext cx="1371600" cy="548640"/>
-          </a:xfrm>
-          <a:prstGeom prst="rect">
-            <a:avLst/>
-          </a:prstGeom>
-          <a:noFill/>
-          <a:ln/>
-        </p:spPr>
-        <p:txBody>
-          <a:bodyPr wrap="square" rtlCol="0" anchor="ctr"/>
-          <a:lstStyle/>
-          <a:p>
-            <a:pPr marL="0" indent="0" algn="l" rtl="0">
-              <a:buNone/>
-            </a:pPr>
-            <a:r>
-              <a:rPr lang="en-US" sz="1600" b="1" dirty="0">
-                <a:solidFill>
-                  <a:srgbClr val="0F172A"/>
-                </a:solidFill>
-                <a:latin typeface="Calibri" pitchFamily="34" charset="0"/>
-                <a:ea typeface="Calibri" pitchFamily="34" charset="-122"/>
-                <a:cs typeface="Calibri" pitchFamily="34" charset="-120"/>
-              </a:rPr>
-              <a:t>Trend</a:t>
-            </a:r>
-            <a:endParaRPr lang="en-US" sz="1600" dirty="0"/>
-          </a:p>
-        </p:txBody>
-      </p:sp>
-      <p:sp>
-        <p:nvSpPr>
-          <p:cNvPr id="22" name="Text 17">
-            <a:extLst>
-              <a:ext uri="{FF2B5EF4-FFF2-40B4-BE49-F238E27FC236}">
-                <a16:creationId xmlns:a16="http://schemas.microsoft.com/office/drawing/2014/main" id="{95069D4E-E24A-9BE9-5F91-B6B98AA8080E}"/>
-              </a:ext>
-            </a:extLst>
-          </p:cNvPr>
-          <p:cNvSpPr/>
-          <p:nvPr/>
-        </p:nvSpPr>
-        <p:spPr>
-          <a:xfrm>
-            <a:off x="2057400" y="1626997"/>
-            <a:ext cx="3931920" cy="548640"/>
-          </a:xfrm>
-          <a:prstGeom prst="rect">
-            <a:avLst/>
-          </a:prstGeom>
-          <a:noFill/>
-          <a:ln/>
-        </p:spPr>
-        <p:txBody>
-          <a:bodyPr wrap="square" rtlCol="0" anchor="ctr"/>
-          <a:lstStyle/>
-          <a:p>
-            <a:pPr marL="0" indent="0" algn="l" rtl="0">
-              <a:buNone/>
-            </a:pPr>
-            <a:r>
-              <a:rPr lang="en-US" sz="1400" dirty="0">
-                <a:solidFill>
-                  <a:srgbClr val="64748B"/>
-                </a:solidFill>
-                <a:latin typeface="Calibri" pitchFamily="34" charset="0"/>
-                <a:ea typeface="Calibri" pitchFamily="34" charset="-122"/>
-                <a:cs typeface="Calibri" pitchFamily="34" charset="-120"/>
-              </a:rPr>
-              <a:t>moving averages, slopes</a:t>
-            </a:r>
-            <a:endParaRPr lang="en-US" sz="1400" dirty="0"/>
-          </a:p>
-        </p:txBody>
-      </p:sp>
-      <p:sp>
-        <p:nvSpPr>
-          <p:cNvPr id="23" name="Shape 18">
-            <a:extLst>
-              <a:ext uri="{FF2B5EF4-FFF2-40B4-BE49-F238E27FC236}">
-                <a16:creationId xmlns:a16="http://schemas.microsoft.com/office/drawing/2014/main" id="{680FB919-F42B-51BF-5FFA-4AE5C6B1E98F}"/>
-              </a:ext>
-            </a:extLst>
-          </p:cNvPr>
-          <p:cNvSpPr/>
-          <p:nvPr/>
-        </p:nvSpPr>
-        <p:spPr>
-          <a:xfrm>
-            <a:off x="548640" y="2157349"/>
-            <a:ext cx="5669280" cy="548640"/>
-          </a:xfrm>
-          <a:prstGeom prst="roundRect">
-            <a:avLst/>
-          </a:prstGeom>
-          <a:solidFill>
-            <a:srgbClr val="FFFFFF"/>
-          </a:solidFill>
-          <a:ln w="12700">
-            <a:solidFill>
-              <a:srgbClr val="E2E8F0"/>
-            </a:solidFill>
-            <a:prstDash val="solid"/>
-          </a:ln>
-        </p:spPr>
-        <p:txBody>
-          <a:bodyPr/>
-          <a:lstStyle/>
-          <a:p>
-            <a:pPr algn="l" rtl="0"/>
-            <a:endParaRPr lang="he-IL"/>
-          </a:p>
-        </p:txBody>
-      </p:sp>
-      <p:sp>
-        <p:nvSpPr>
-          <p:cNvPr id="24" name="Shape 19">
-            <a:extLst>
-              <a:ext uri="{FF2B5EF4-FFF2-40B4-BE49-F238E27FC236}">
-                <a16:creationId xmlns:a16="http://schemas.microsoft.com/office/drawing/2014/main" id="{C30D07D5-E1AD-A476-38A4-CCA8507EDF2F}"/>
-              </a:ext>
-            </a:extLst>
-          </p:cNvPr>
-          <p:cNvSpPr/>
-          <p:nvPr/>
-        </p:nvSpPr>
-        <p:spPr>
-          <a:xfrm>
-            <a:off x="548640" y="2157349"/>
-            <a:ext cx="109728" cy="548640"/>
-          </a:xfrm>
-          <a:prstGeom prst="rect">
-            <a:avLst/>
-          </a:prstGeom>
-          <a:solidFill>
-            <a:schemeClr val="tx2">
-              <a:lumMod val="75000"/>
-            </a:schemeClr>
-          </a:solidFill>
-          <a:ln w="12700">
-            <a:solidFill>
-              <a:schemeClr val="accent1"/>
-            </a:solidFill>
-            <a:prstDash val="solid"/>
-          </a:ln>
-        </p:spPr>
-        <p:txBody>
-          <a:bodyPr/>
-          <a:lstStyle/>
-          <a:p>
-            <a:pPr algn="l" rtl="0"/>
-            <a:endParaRPr lang="he-IL"/>
-          </a:p>
-        </p:txBody>
-      </p:sp>
-      <p:sp>
-        <p:nvSpPr>
-          <p:cNvPr id="25" name="Text 20">
-            <a:extLst>
-              <a:ext uri="{FF2B5EF4-FFF2-40B4-BE49-F238E27FC236}">
-                <a16:creationId xmlns:a16="http://schemas.microsoft.com/office/drawing/2014/main" id="{3C3869B4-888D-833A-1972-5B097225FDC8}"/>
-              </a:ext>
-            </a:extLst>
-          </p:cNvPr>
-          <p:cNvSpPr/>
-          <p:nvPr/>
-        </p:nvSpPr>
-        <p:spPr>
-          <a:xfrm>
-            <a:off x="777240" y="2267077"/>
-            <a:ext cx="1371600" cy="548640"/>
-          </a:xfrm>
-          <a:prstGeom prst="rect">
-            <a:avLst/>
-          </a:prstGeom>
-          <a:noFill/>
-          <a:ln/>
-        </p:spPr>
-        <p:txBody>
-          <a:bodyPr wrap="square" rtlCol="0" anchor="ctr"/>
-          <a:lstStyle/>
-          <a:p>
-            <a:pPr marL="0" indent="0" algn="l" rtl="0">
-              <a:buNone/>
-            </a:pPr>
-            <a:r>
-              <a:rPr lang="en-US" sz="1600" b="1" dirty="0">
-                <a:solidFill>
-                  <a:srgbClr val="0F172A"/>
-                </a:solidFill>
-                <a:latin typeface="Calibri" pitchFamily="34" charset="0"/>
-                <a:ea typeface="Calibri" pitchFamily="34" charset="-122"/>
-                <a:cs typeface="Calibri" pitchFamily="34" charset="-120"/>
-              </a:rPr>
-              <a:t>Momentum</a:t>
-            </a:r>
-            <a:endParaRPr lang="en-US" sz="1600" dirty="0"/>
-          </a:p>
-        </p:txBody>
-      </p:sp>
-      <p:sp>
-        <p:nvSpPr>
-          <p:cNvPr id="26" name="Text 21">
-            <a:extLst>
-              <a:ext uri="{FF2B5EF4-FFF2-40B4-BE49-F238E27FC236}">
-                <a16:creationId xmlns:a16="http://schemas.microsoft.com/office/drawing/2014/main" id="{DC470D37-28B9-704F-7CB1-D5BC71BA6A46}"/>
-              </a:ext>
-            </a:extLst>
-          </p:cNvPr>
-          <p:cNvSpPr/>
-          <p:nvPr/>
-        </p:nvSpPr>
-        <p:spPr>
-          <a:xfrm>
-            <a:off x="2057400" y="2285365"/>
-            <a:ext cx="3931920" cy="548640"/>
-          </a:xfrm>
-          <a:prstGeom prst="rect">
-            <a:avLst/>
-          </a:prstGeom>
-          <a:noFill/>
-          <a:ln/>
-        </p:spPr>
-        <p:txBody>
-          <a:bodyPr wrap="square" rtlCol="0" anchor="ctr"/>
-          <a:lstStyle/>
-          <a:p>
-            <a:pPr marL="0" indent="0" algn="l" rtl="0">
-              <a:buNone/>
-            </a:pPr>
-            <a:r>
-              <a:rPr lang="en-US" sz="1400" dirty="0">
-                <a:solidFill>
-                  <a:srgbClr val="64748B"/>
-                </a:solidFill>
-                <a:latin typeface="Calibri" pitchFamily="34" charset="0"/>
-                <a:ea typeface="Calibri" pitchFamily="34" charset="-122"/>
-                <a:cs typeface="Calibri" pitchFamily="34" charset="-120"/>
-              </a:rPr>
-              <a:t>lagged returns, momentum</a:t>
-            </a:r>
-            <a:endParaRPr lang="en-US" sz="1400" dirty="0"/>
-          </a:p>
-        </p:txBody>
-      </p:sp>
-      <p:sp>
-        <p:nvSpPr>
-          <p:cNvPr id="27" name="Shape 22">
-            <a:extLst>
-              <a:ext uri="{FF2B5EF4-FFF2-40B4-BE49-F238E27FC236}">
-                <a16:creationId xmlns:a16="http://schemas.microsoft.com/office/drawing/2014/main" id="{7B74E9E4-EB24-6206-6F7D-9B411789B4AE}"/>
-              </a:ext>
-            </a:extLst>
-          </p:cNvPr>
-          <p:cNvSpPr/>
-          <p:nvPr/>
-        </p:nvSpPr>
-        <p:spPr>
-          <a:xfrm>
-            <a:off x="548640" y="2815717"/>
-            <a:ext cx="5669280" cy="548640"/>
-          </a:xfrm>
-          <a:prstGeom prst="roundRect">
-            <a:avLst/>
-          </a:prstGeom>
-          <a:solidFill>
-            <a:srgbClr val="FFFFFF"/>
-          </a:solidFill>
-          <a:ln w="12700">
-            <a:solidFill>
-              <a:srgbClr val="E2E8F0"/>
-            </a:solidFill>
-            <a:prstDash val="solid"/>
-          </a:ln>
-        </p:spPr>
-        <p:txBody>
-          <a:bodyPr/>
-          <a:lstStyle/>
-          <a:p>
-            <a:pPr algn="l" rtl="0"/>
-            <a:endParaRPr lang="he-IL"/>
-          </a:p>
-        </p:txBody>
-      </p:sp>
-      <p:sp>
-        <p:nvSpPr>
-          <p:cNvPr id="28" name="Shape 23">
-            <a:extLst>
-              <a:ext uri="{FF2B5EF4-FFF2-40B4-BE49-F238E27FC236}">
-                <a16:creationId xmlns:a16="http://schemas.microsoft.com/office/drawing/2014/main" id="{0FD9D9D4-A851-7B8D-B23C-9D1A5071DBD7}"/>
-              </a:ext>
-            </a:extLst>
-          </p:cNvPr>
-          <p:cNvSpPr/>
-          <p:nvPr/>
-        </p:nvSpPr>
-        <p:spPr>
-          <a:xfrm>
-            <a:off x="548640" y="2815717"/>
-            <a:ext cx="109728" cy="548640"/>
-          </a:xfrm>
-          <a:prstGeom prst="rect">
-            <a:avLst/>
-          </a:prstGeom>
-          <a:solidFill>
-            <a:schemeClr val="tx2">
-              <a:lumMod val="75000"/>
-            </a:schemeClr>
-          </a:solidFill>
-          <a:ln w="12700">
-            <a:solidFill>
-              <a:schemeClr val="accent1"/>
-            </a:solidFill>
-            <a:prstDash val="solid"/>
-          </a:ln>
-        </p:spPr>
-        <p:txBody>
-          <a:bodyPr/>
-          <a:lstStyle/>
-          <a:p>
-            <a:pPr algn="l" rtl="0"/>
-            <a:endParaRPr lang="he-IL"/>
-          </a:p>
-        </p:txBody>
-      </p:sp>
-      <p:sp>
-        <p:nvSpPr>
-          <p:cNvPr id="29" name="Text 24">
-            <a:extLst>
-              <a:ext uri="{FF2B5EF4-FFF2-40B4-BE49-F238E27FC236}">
-                <a16:creationId xmlns:a16="http://schemas.microsoft.com/office/drawing/2014/main" id="{106574CC-1C90-EDBF-0F69-28190FE793E3}"/>
-              </a:ext>
-            </a:extLst>
-          </p:cNvPr>
-          <p:cNvSpPr/>
-          <p:nvPr/>
-        </p:nvSpPr>
-        <p:spPr>
-          <a:xfrm>
-            <a:off x="777240" y="2925445"/>
-            <a:ext cx="1371600" cy="548640"/>
-          </a:xfrm>
-          <a:prstGeom prst="rect">
-            <a:avLst/>
-          </a:prstGeom>
-          <a:noFill/>
-          <a:ln/>
-        </p:spPr>
-        <p:txBody>
-          <a:bodyPr wrap="square" rtlCol="0" anchor="ctr"/>
-          <a:lstStyle/>
-          <a:p>
-            <a:pPr marL="0" indent="0" algn="l" rtl="0">
-              <a:buNone/>
-            </a:pPr>
-            <a:r>
-              <a:rPr lang="en-US" sz="1600" b="1" dirty="0">
-                <a:solidFill>
-                  <a:srgbClr val="0F172A"/>
-                </a:solidFill>
-                <a:latin typeface="Calibri" pitchFamily="34" charset="0"/>
-                <a:ea typeface="Calibri" pitchFamily="34" charset="-122"/>
-                <a:cs typeface="Calibri" pitchFamily="34" charset="-120"/>
-              </a:rPr>
-              <a:t>Volatility</a:t>
-            </a:r>
-            <a:endParaRPr lang="en-US" sz="1600" dirty="0"/>
-          </a:p>
-        </p:txBody>
-      </p:sp>
-      <p:sp>
-        <p:nvSpPr>
-          <p:cNvPr id="30" name="Text 25">
-            <a:extLst>
-              <a:ext uri="{FF2B5EF4-FFF2-40B4-BE49-F238E27FC236}">
-                <a16:creationId xmlns:a16="http://schemas.microsoft.com/office/drawing/2014/main" id="{63ECE157-33F0-C8CF-76BF-27E988D4566F}"/>
-              </a:ext>
-            </a:extLst>
-          </p:cNvPr>
-          <p:cNvSpPr/>
-          <p:nvPr/>
-        </p:nvSpPr>
-        <p:spPr>
-          <a:xfrm>
-            <a:off x="2057400" y="2943733"/>
-            <a:ext cx="3931920" cy="548640"/>
-          </a:xfrm>
-          <a:prstGeom prst="rect">
-            <a:avLst/>
-          </a:prstGeom>
-          <a:noFill/>
-          <a:ln/>
-        </p:spPr>
-        <p:txBody>
-          <a:bodyPr wrap="square" rtlCol="0" anchor="ctr"/>
-          <a:lstStyle/>
-          <a:p>
-            <a:pPr marL="0" indent="0" algn="l" rtl="0">
-              <a:buNone/>
-            </a:pPr>
-            <a:r>
-              <a:rPr lang="en-US" sz="1400" dirty="0">
-                <a:solidFill>
-                  <a:srgbClr val="64748B"/>
-                </a:solidFill>
-                <a:latin typeface="Calibri" pitchFamily="34" charset="0"/>
-                <a:ea typeface="Calibri" pitchFamily="34" charset="-122"/>
-                <a:cs typeface="Calibri" pitchFamily="34" charset="-120"/>
-              </a:rPr>
-              <a:t>rolling std, risk regime</a:t>
-            </a:r>
-            <a:endParaRPr lang="en-US" sz="1400" dirty="0"/>
-          </a:p>
-        </p:txBody>
-      </p:sp>
-      <p:sp>
-        <p:nvSpPr>
-          <p:cNvPr id="31" name="Shape 26">
-            <a:extLst>
-              <a:ext uri="{FF2B5EF4-FFF2-40B4-BE49-F238E27FC236}">
-                <a16:creationId xmlns:a16="http://schemas.microsoft.com/office/drawing/2014/main" id="{C22DD9DB-7052-4973-3145-779ECB859E25}"/>
-              </a:ext>
-            </a:extLst>
-          </p:cNvPr>
-          <p:cNvSpPr/>
-          <p:nvPr/>
-        </p:nvSpPr>
-        <p:spPr>
-          <a:xfrm>
-            <a:off x="548640" y="3474085"/>
-            <a:ext cx="5669280" cy="548640"/>
-          </a:xfrm>
-          <a:prstGeom prst="roundRect">
-            <a:avLst/>
-          </a:prstGeom>
-          <a:solidFill>
-            <a:srgbClr val="FFFFFF"/>
-          </a:solidFill>
-          <a:ln w="12700">
-            <a:solidFill>
-              <a:srgbClr val="E2E8F0"/>
-            </a:solidFill>
-            <a:prstDash val="solid"/>
-          </a:ln>
-        </p:spPr>
-        <p:txBody>
-          <a:bodyPr/>
-          <a:lstStyle/>
-          <a:p>
-            <a:pPr algn="l" rtl="0"/>
-            <a:endParaRPr lang="he-IL"/>
-          </a:p>
-        </p:txBody>
-      </p:sp>
-      <p:sp>
-        <p:nvSpPr>
-          <p:cNvPr id="32" name="Shape 27">
-            <a:extLst>
-              <a:ext uri="{FF2B5EF4-FFF2-40B4-BE49-F238E27FC236}">
-                <a16:creationId xmlns:a16="http://schemas.microsoft.com/office/drawing/2014/main" id="{2DDBA5F4-83F6-E803-57E1-9C1F6C01971D}"/>
-              </a:ext>
-            </a:extLst>
-          </p:cNvPr>
-          <p:cNvSpPr/>
-          <p:nvPr/>
-        </p:nvSpPr>
-        <p:spPr>
-          <a:xfrm>
-            <a:off x="548640" y="3474085"/>
-            <a:ext cx="109728" cy="548640"/>
-          </a:xfrm>
-          <a:prstGeom prst="rect">
-            <a:avLst/>
-          </a:prstGeom>
-          <a:solidFill>
-            <a:schemeClr val="tx2">
-              <a:lumMod val="75000"/>
-            </a:schemeClr>
-          </a:solidFill>
-          <a:ln w="12700">
-            <a:solidFill>
-              <a:schemeClr val="accent1"/>
-            </a:solidFill>
-            <a:prstDash val="solid"/>
-          </a:ln>
-        </p:spPr>
-        <p:txBody>
-          <a:bodyPr/>
-          <a:lstStyle/>
-          <a:p>
-            <a:pPr algn="l" rtl="0"/>
-            <a:endParaRPr lang="he-IL"/>
-          </a:p>
-        </p:txBody>
-      </p:sp>
-      <p:sp>
-        <p:nvSpPr>
-          <p:cNvPr id="33" name="Text 28">
-            <a:extLst>
-              <a:ext uri="{FF2B5EF4-FFF2-40B4-BE49-F238E27FC236}">
-                <a16:creationId xmlns:a16="http://schemas.microsoft.com/office/drawing/2014/main" id="{ADDE3C70-3DDB-BA75-D258-4464642E69F1}"/>
-              </a:ext>
-            </a:extLst>
-          </p:cNvPr>
-          <p:cNvSpPr/>
-          <p:nvPr/>
-        </p:nvSpPr>
-        <p:spPr>
-          <a:xfrm>
-            <a:off x="777240" y="3583813"/>
-            <a:ext cx="1371600" cy="548640"/>
-          </a:xfrm>
-          <a:prstGeom prst="rect">
-            <a:avLst/>
-          </a:prstGeom>
-          <a:noFill/>
-          <a:ln/>
-        </p:spPr>
-        <p:txBody>
-          <a:bodyPr wrap="square" rtlCol="0" anchor="ctr"/>
-          <a:lstStyle/>
-          <a:p>
-            <a:pPr marL="0" indent="0" algn="l" rtl="0">
-              <a:buNone/>
-            </a:pPr>
-            <a:r>
-              <a:rPr lang="en-US" sz="1600" b="1" dirty="0">
-                <a:solidFill>
-                  <a:srgbClr val="0F172A"/>
-                </a:solidFill>
-                <a:latin typeface="Calibri" pitchFamily="34" charset="0"/>
-                <a:ea typeface="Calibri" pitchFamily="34" charset="-122"/>
-                <a:cs typeface="Calibri" pitchFamily="34" charset="-120"/>
-              </a:rPr>
-              <a:t>Macro</a:t>
-            </a:r>
-            <a:endParaRPr lang="en-US" sz="1600" dirty="0"/>
-          </a:p>
-        </p:txBody>
-      </p:sp>
-      <p:sp>
-        <p:nvSpPr>
-          <p:cNvPr id="34" name="Text 29">
-            <a:extLst>
-              <a:ext uri="{FF2B5EF4-FFF2-40B4-BE49-F238E27FC236}">
-                <a16:creationId xmlns:a16="http://schemas.microsoft.com/office/drawing/2014/main" id="{606FDEEE-E2C0-0F23-2508-5D2755624C65}"/>
-              </a:ext>
-            </a:extLst>
-          </p:cNvPr>
-          <p:cNvSpPr/>
-          <p:nvPr/>
-        </p:nvSpPr>
-        <p:spPr>
-          <a:xfrm>
-            <a:off x="2057400" y="3602101"/>
-            <a:ext cx="3931920" cy="548640"/>
-          </a:xfrm>
-          <a:prstGeom prst="rect">
-            <a:avLst/>
-          </a:prstGeom>
-          <a:noFill/>
-          <a:ln/>
-        </p:spPr>
-        <p:txBody>
-          <a:bodyPr wrap="square" rtlCol="0" anchor="ctr"/>
-          <a:lstStyle/>
-          <a:p>
-            <a:pPr marL="0" indent="0" algn="l" rtl="0">
-              <a:buNone/>
-            </a:pPr>
-            <a:r>
-              <a:rPr lang="en-US" sz="1400" dirty="0">
-                <a:solidFill>
-                  <a:srgbClr val="64748B"/>
-                </a:solidFill>
-                <a:latin typeface="Calibri" pitchFamily="34" charset="0"/>
-                <a:ea typeface="Calibri" pitchFamily="34" charset="-122"/>
-                <a:cs typeface="Calibri" pitchFamily="34" charset="-120"/>
-              </a:rPr>
-              <a:t>VIX, market index</a:t>
-            </a:r>
-            <a:endParaRPr lang="en-US" sz="1400" dirty="0"/>
-          </a:p>
-        </p:txBody>
-      </p:sp>
-      <p:sp>
-        <p:nvSpPr>
-          <p:cNvPr id="35" name="Shape 30">
-            <a:extLst>
-              <a:ext uri="{FF2B5EF4-FFF2-40B4-BE49-F238E27FC236}">
-                <a16:creationId xmlns:a16="http://schemas.microsoft.com/office/drawing/2014/main" id="{157F76B4-EBE5-67C8-73E8-2F2588A3A19C}"/>
-              </a:ext>
-            </a:extLst>
-          </p:cNvPr>
-          <p:cNvSpPr/>
-          <p:nvPr/>
-        </p:nvSpPr>
-        <p:spPr>
-          <a:xfrm>
-            <a:off x="548640" y="4132453"/>
-            <a:ext cx="5669280" cy="548640"/>
-          </a:xfrm>
-          <a:prstGeom prst="roundRect">
-            <a:avLst/>
-          </a:prstGeom>
-          <a:solidFill>
-            <a:srgbClr val="FFFFFF"/>
-          </a:solidFill>
-          <a:ln w="12700">
-            <a:solidFill>
-              <a:srgbClr val="E2E8F0"/>
-            </a:solidFill>
-            <a:prstDash val="solid"/>
-          </a:ln>
-        </p:spPr>
-        <p:txBody>
-          <a:bodyPr/>
-          <a:lstStyle/>
-          <a:p>
-            <a:pPr algn="l" rtl="0"/>
-            <a:endParaRPr lang="he-IL"/>
-          </a:p>
-        </p:txBody>
-      </p:sp>
-      <p:sp>
-        <p:nvSpPr>
-          <p:cNvPr id="36" name="Shape 31">
-            <a:extLst>
-              <a:ext uri="{FF2B5EF4-FFF2-40B4-BE49-F238E27FC236}">
-                <a16:creationId xmlns:a16="http://schemas.microsoft.com/office/drawing/2014/main" id="{8A28EBA8-AB04-B273-AE48-2E6E90035867}"/>
-              </a:ext>
-            </a:extLst>
-          </p:cNvPr>
-          <p:cNvSpPr/>
-          <p:nvPr/>
-        </p:nvSpPr>
-        <p:spPr>
-          <a:xfrm>
-            <a:off x="548640" y="4132453"/>
-            <a:ext cx="109728" cy="548640"/>
-          </a:xfrm>
-          <a:prstGeom prst="rect">
-            <a:avLst/>
-          </a:prstGeom>
-          <a:solidFill>
-            <a:schemeClr val="tx2">
-              <a:lumMod val="75000"/>
-            </a:schemeClr>
-          </a:solidFill>
-          <a:ln w="12700">
-            <a:solidFill>
-              <a:schemeClr val="accent1"/>
-            </a:solidFill>
-            <a:prstDash val="solid"/>
-          </a:ln>
-        </p:spPr>
-        <p:txBody>
-          <a:bodyPr/>
-          <a:lstStyle/>
-          <a:p>
-            <a:pPr algn="l" rtl="0"/>
-            <a:endParaRPr lang="he-IL"/>
-          </a:p>
-        </p:txBody>
-      </p:sp>
-      <p:sp>
-        <p:nvSpPr>
-          <p:cNvPr id="37" name="Text 32">
-            <a:extLst>
-              <a:ext uri="{FF2B5EF4-FFF2-40B4-BE49-F238E27FC236}">
-                <a16:creationId xmlns:a16="http://schemas.microsoft.com/office/drawing/2014/main" id="{18B0E3A8-5CF3-F01C-DF23-35A75ACBADE4}"/>
-              </a:ext>
-            </a:extLst>
-          </p:cNvPr>
-          <p:cNvSpPr/>
-          <p:nvPr/>
-        </p:nvSpPr>
-        <p:spPr>
-          <a:xfrm>
-            <a:off x="777240" y="4242181"/>
-            <a:ext cx="1371600" cy="548640"/>
-          </a:xfrm>
-          <a:prstGeom prst="rect">
-            <a:avLst/>
-          </a:prstGeom>
-          <a:noFill/>
-          <a:ln/>
-        </p:spPr>
-        <p:txBody>
-          <a:bodyPr wrap="square" rtlCol="0" anchor="ctr"/>
-          <a:lstStyle/>
-          <a:p>
-            <a:pPr marL="0" indent="0" algn="l" rtl="0">
-              <a:buNone/>
-            </a:pPr>
-            <a:r>
-              <a:rPr lang="en-US" sz="1600" b="1" dirty="0">
-                <a:solidFill>
-                  <a:srgbClr val="0F172A"/>
-                </a:solidFill>
-                <a:latin typeface="Calibri" pitchFamily="34" charset="0"/>
-                <a:ea typeface="Calibri" pitchFamily="34" charset="-122"/>
-                <a:cs typeface="Calibri" pitchFamily="34" charset="-120"/>
-              </a:rPr>
-              <a:t>Sentiment</a:t>
-            </a:r>
-            <a:endParaRPr lang="en-US" sz="1600" dirty="0"/>
-          </a:p>
-        </p:txBody>
-      </p:sp>
-      <p:sp>
-        <p:nvSpPr>
-          <p:cNvPr id="38" name="Text 33">
-            <a:extLst>
-              <a:ext uri="{FF2B5EF4-FFF2-40B4-BE49-F238E27FC236}">
-                <a16:creationId xmlns:a16="http://schemas.microsoft.com/office/drawing/2014/main" id="{BB4B723A-A3AF-EDD4-74D6-661837DBD1D5}"/>
-              </a:ext>
-            </a:extLst>
-          </p:cNvPr>
-          <p:cNvSpPr/>
-          <p:nvPr/>
-        </p:nvSpPr>
-        <p:spPr>
-          <a:xfrm>
-            <a:off x="2057400" y="5824728"/>
-            <a:ext cx="3931920" cy="548640"/>
-          </a:xfrm>
-          <a:prstGeom prst="rect">
-            <a:avLst/>
-          </a:prstGeom>
-          <a:noFill/>
-          <a:ln/>
-        </p:spPr>
-        <p:txBody>
-          <a:bodyPr wrap="square" rtlCol="0" anchor="ctr"/>
-          <a:lstStyle/>
-          <a:p>
-            <a:pPr marL="0" indent="0" algn="l" rtl="0">
-              <a:buNone/>
-            </a:pPr>
-            <a:r>
-              <a:rPr lang="en-US" sz="1400" dirty="0">
-                <a:solidFill>
-                  <a:srgbClr val="64748B"/>
-                </a:solidFill>
-                <a:latin typeface="Calibri" pitchFamily="34" charset="0"/>
-                <a:ea typeface="Calibri" pitchFamily="34" charset="-122"/>
-                <a:cs typeface="Calibri" pitchFamily="34" charset="-120"/>
-              </a:rPr>
-              <a:t>FinBERT headline tone</a:t>
-            </a:r>
-            <a:endParaRPr lang="en-US" sz="1400" dirty="0"/>
-          </a:p>
-        </p:txBody>
-      </p:sp>
-      <p:sp>
-        <p:nvSpPr>
-          <p:cNvPr id="39" name="Shape 34">
-            <a:extLst>
-              <a:ext uri="{FF2B5EF4-FFF2-40B4-BE49-F238E27FC236}">
-                <a16:creationId xmlns:a16="http://schemas.microsoft.com/office/drawing/2014/main" id="{9E9762A8-A263-93B1-CECC-F1FEBF98F71E}"/>
-              </a:ext>
-            </a:extLst>
-          </p:cNvPr>
-          <p:cNvSpPr/>
-          <p:nvPr/>
-        </p:nvSpPr>
-        <p:spPr>
-          <a:xfrm>
-            <a:off x="6477305" y="1486218"/>
-            <a:ext cx="5105095" cy="3703320"/>
-          </a:xfrm>
-          <a:prstGeom prst="roundRect">
-            <a:avLst/>
-          </a:prstGeom>
-          <a:solidFill>
-            <a:srgbClr val="F8FAFC"/>
-          </a:solidFill>
-          <a:ln w="12700">
-            <a:solidFill>
-              <a:srgbClr val="E2E8F0"/>
-            </a:solidFill>
-            <a:prstDash val="solid"/>
-          </a:ln>
-          <a:effectLst>
-            <a:outerShdw blurRad="38100" dist="12700" dir="2700000" algn="bl" rotWithShape="0">
-              <a:srgbClr val="000000">
-                <a:alpha val="12000"/>
-              </a:srgbClr>
-            </a:outerShdw>
-          </a:effectLst>
-        </p:spPr>
-        <p:txBody>
-          <a:bodyPr/>
-          <a:lstStyle/>
-          <a:p>
-            <a:pPr algn="l" rtl="0"/>
-            <a:endParaRPr lang="he-IL"/>
-          </a:p>
-        </p:txBody>
-      </p:sp>
-      <p:sp>
-        <p:nvSpPr>
-          <p:cNvPr id="40" name="Text 35">
-            <a:extLst>
-              <a:ext uri="{FF2B5EF4-FFF2-40B4-BE49-F238E27FC236}">
-                <a16:creationId xmlns:a16="http://schemas.microsoft.com/office/drawing/2014/main" id="{CB0625AF-0B4F-2906-B23F-FC4CE6D29DB6}"/>
-              </a:ext>
-            </a:extLst>
-          </p:cNvPr>
-          <p:cNvSpPr/>
-          <p:nvPr/>
-        </p:nvSpPr>
-        <p:spPr>
-          <a:xfrm>
-            <a:off x="6766560" y="1745869"/>
-            <a:ext cx="5212080" cy="274320"/>
-          </a:xfrm>
-          <a:prstGeom prst="rect">
-            <a:avLst/>
-          </a:prstGeom>
-          <a:noFill/>
-          <a:ln/>
-        </p:spPr>
-        <p:txBody>
-          <a:bodyPr wrap="square" rtlCol="0" anchor="ctr"/>
-          <a:lstStyle/>
-          <a:p>
-            <a:pPr marL="0" indent="0" algn="l" rtl="0">
-              <a:buNone/>
-            </a:pPr>
-            <a:r>
-              <a:rPr lang="en-US" sz="1800" b="1" dirty="0">
-                <a:solidFill>
-                  <a:srgbClr val="0F172A"/>
-                </a:solidFill>
-                <a:latin typeface="Calibri" pitchFamily="34" charset="0"/>
-                <a:ea typeface="Calibri" pitchFamily="34" charset="-122"/>
-                <a:cs typeface="Calibri" pitchFamily="34" charset="-120"/>
-              </a:rPr>
-              <a:t>Targets</a:t>
-            </a:r>
-            <a:endParaRPr lang="en-US" sz="1800" dirty="0"/>
-          </a:p>
-        </p:txBody>
-      </p:sp>
-      <p:sp>
-        <p:nvSpPr>
-          <p:cNvPr id="41" name="Text 36">
-            <a:extLst>
-              <a:ext uri="{FF2B5EF4-FFF2-40B4-BE49-F238E27FC236}">
-                <a16:creationId xmlns:a16="http://schemas.microsoft.com/office/drawing/2014/main" id="{FDD8D99D-132B-99C8-8022-751931B8B3EB}"/>
-              </a:ext>
-            </a:extLst>
-          </p:cNvPr>
-          <p:cNvSpPr/>
-          <p:nvPr/>
-        </p:nvSpPr>
-        <p:spPr>
-          <a:xfrm>
-            <a:off x="6812280" y="2180209"/>
-            <a:ext cx="5120640" cy="1097280"/>
-          </a:xfrm>
-          <a:prstGeom prst="rect">
-            <a:avLst/>
-          </a:prstGeom>
-          <a:noFill/>
-          <a:ln/>
-        </p:spPr>
-        <p:txBody>
-          <a:bodyPr wrap="square" rtlCol="0" anchor="t"/>
-          <a:lstStyle/>
-          <a:p>
-            <a:pPr marL="182880" indent="-182880" algn="l" rtl="0">
-              <a:spcAft>
-                <a:spcPts val="800"/>
-              </a:spcAft>
-              <a:buSzPct val="100000"/>
-              <a:buChar char="•"/>
-            </a:pPr>
-            <a:r>
-              <a:rPr lang="en-US" sz="1600" dirty="0">
-                <a:solidFill>
-                  <a:srgbClr val="111827"/>
-                </a:solidFill>
-                <a:latin typeface="Calibri" pitchFamily="34" charset="0"/>
-                <a:ea typeface="Calibri" pitchFamily="34" charset="-122"/>
-                <a:cs typeface="Calibri" pitchFamily="34" charset="-120"/>
-              </a:rPr>
-              <a:t>Regression: next-day log return</a:t>
-            </a:r>
-            <a:endParaRPr lang="en-US" sz="1600" dirty="0"/>
-          </a:p>
-          <a:p>
-            <a:pPr marL="182880" indent="-182880" algn="l" rtl="0">
-              <a:spcAft>
-                <a:spcPts val="800"/>
-              </a:spcAft>
-              <a:buSzPct val="100000"/>
-              <a:buChar char="•"/>
-            </a:pPr>
-            <a:r>
-              <a:rPr lang="en-US" sz="1600" dirty="0">
-                <a:solidFill>
-                  <a:srgbClr val="111827"/>
-                </a:solidFill>
-                <a:latin typeface="Calibri" pitchFamily="34" charset="0"/>
-                <a:ea typeface="Calibri" pitchFamily="34" charset="-122"/>
-                <a:cs typeface="Calibri" pitchFamily="34" charset="-120"/>
-              </a:rPr>
-              <a:t>Classification: direction (up/down)</a:t>
-            </a:r>
-            <a:endParaRPr lang="en-US" sz="1600" dirty="0"/>
-          </a:p>
-        </p:txBody>
-      </p:sp>
-      <p:sp>
-        <p:nvSpPr>
-          <p:cNvPr id="42" name="Text 37">
-            <a:extLst>
-              <a:ext uri="{FF2B5EF4-FFF2-40B4-BE49-F238E27FC236}">
-                <a16:creationId xmlns:a16="http://schemas.microsoft.com/office/drawing/2014/main" id="{2E532624-AD4A-CBD1-DE6D-0BC7B9E5A249}"/>
-              </a:ext>
-            </a:extLst>
-          </p:cNvPr>
-          <p:cNvSpPr/>
-          <p:nvPr/>
-        </p:nvSpPr>
-        <p:spPr>
-          <a:xfrm>
-            <a:off x="6812280" y="2998597"/>
-            <a:ext cx="4770120" cy="731520"/>
-          </a:xfrm>
-          <a:prstGeom prst="rect">
-            <a:avLst/>
-          </a:prstGeom>
-          <a:noFill/>
-          <a:ln/>
-        </p:spPr>
-        <p:txBody>
-          <a:bodyPr wrap="square" rtlCol="0" anchor="ctr"/>
-          <a:lstStyle/>
-          <a:p>
-            <a:pPr marL="0" indent="0" algn="l" rtl="0">
-              <a:buNone/>
-            </a:pPr>
-            <a:r>
-              <a:rPr lang="en-US" sz="1400" dirty="0">
-                <a:solidFill>
-                  <a:srgbClr val="64748B"/>
-                </a:solidFill>
-                <a:latin typeface="Calibri" pitchFamily="34" charset="0"/>
-                <a:ea typeface="Calibri" pitchFamily="34" charset="-122"/>
-                <a:cs typeface="Calibri" pitchFamily="34" charset="-120"/>
-              </a:rPr>
-              <a:t>Block design enables controlled comparisons (ablation-style).</a:t>
-            </a:r>
-            <a:endParaRPr lang="en-US" sz="1400" dirty="0"/>
-          </a:p>
-        </p:txBody>
-      </p:sp>
-    </p:spTree>
-    <p:extLst>
-      <p:ext uri="{BB962C8B-B14F-4D97-AF65-F5344CB8AC3E}">
-        <p14:creationId xmlns:p14="http://schemas.microsoft.com/office/powerpoint/2010/main" val="1897573739"/>
-      </p:ext>
-    </p:extLst>
-  </p:cSld>
-  <p:clrMapOvr>
-    <a:masterClrMapping/>
-  </p:clrMapOvr>
-</p:sld>
-</file>
-
-<file path=ppt/slides/slide9.xml><?xml version="1.0" encoding="utf-8"?>
-<p:sld xmlns:a="http://schemas.openxmlformats.org/drawingml/2006/main" xmlns:r="http://schemas.openxmlformats.org/officeDocument/2006/relationships" xmlns:p="http://schemas.openxmlformats.org/presentationml/2006/main">
-  <p:cSld>
-    <p:spTree>
-      <p:nvGrpSpPr>
-        <p:cNvPr id="1" name="">
-          <a:extLst>
-            <a:ext uri="{FF2B5EF4-FFF2-40B4-BE49-F238E27FC236}">
-              <a16:creationId xmlns:a16="http://schemas.microsoft.com/office/drawing/2014/main" id="{F355C819-D8BC-A41C-3053-3619F21D5FAA}"/>
-            </a:ext>
-          </a:extLst>
-        </p:cNvPr>
-        <p:cNvGrpSpPr/>
-        <p:nvPr/>
-      </p:nvGrpSpPr>
-      <p:grpSpPr>
-        <a:xfrm>
-          <a:off x="0" y="0"/>
-          <a:ext cx="0" cy="0"/>
-          <a:chOff x="0" y="0"/>
-          <a:chExt cx="0" cy="0"/>
-        </a:xfrm>
-      </p:grpSpPr>
-      <p:sp>
-        <p:nvSpPr>
-          <p:cNvPr id="2" name="מציין מיקום של תאריך 1">
-            <a:extLst>
-              <a:ext uri="{FF2B5EF4-FFF2-40B4-BE49-F238E27FC236}">
-                <a16:creationId xmlns:a16="http://schemas.microsoft.com/office/drawing/2014/main" id="{64BB56BF-01A4-A5BD-C8F1-AB23439E0516}"/>
-              </a:ext>
-            </a:extLst>
-          </p:cNvPr>
-          <p:cNvSpPr>
-            <a:spLocks noGrp="1"/>
-          </p:cNvSpPr>
-          <p:nvPr>
-            <p:ph type="dt" sz="half" idx="10"/>
-          </p:nvPr>
-        </p:nvSpPr>
-        <p:spPr/>
-        <p:txBody>
-          <a:bodyPr/>
-          <a:lstStyle/>
-          <a:p>
-            <a:fld id="{81A792BA-DE5A-904A-B48C-83C9489152F3}" type="datetime13">
-              <a:rPr lang="he-IL" smtClean="0"/>
-              <a:pPr/>
-              <a:t>16/1/2026</a:t>
-            </a:fld>
-            <a:endParaRPr lang="en-US" dirty="0">
-              <a:cs typeface="Calibri" panose="020F0502020204030204" pitchFamily="34" charset="0"/>
-            </a:endParaRPr>
-          </a:p>
-        </p:txBody>
-      </p:sp>
-      <p:sp>
-        <p:nvSpPr>
-          <p:cNvPr id="3" name="מציין מיקום של כותרת תחתונה 2">
-            <a:extLst>
-              <a:ext uri="{FF2B5EF4-FFF2-40B4-BE49-F238E27FC236}">
-                <a16:creationId xmlns:a16="http://schemas.microsoft.com/office/drawing/2014/main" id="{5FC3B9ED-B69F-6825-1FE4-7902963A9F4F}"/>
-              </a:ext>
-            </a:extLst>
-          </p:cNvPr>
-          <p:cNvSpPr>
-            <a:spLocks noGrp="1"/>
-          </p:cNvSpPr>
-          <p:nvPr>
-            <p:ph type="ftr" sz="quarter" idx="11"/>
-          </p:nvPr>
-        </p:nvSpPr>
-        <p:spPr/>
-        <p:txBody>
-          <a:bodyPr/>
-          <a:lstStyle/>
-          <a:p>
-            <a:r>
-              <a:rPr lang="en-US" sz="1200" kern="1200">
-                <a:solidFill>
-                  <a:schemeClr val="tx1">
-                    <a:tint val="75000"/>
-                  </a:schemeClr>
-                </a:solidFill>
-                <a:latin typeface="+mn-lt"/>
-                <a:ea typeface="+mn-ea"/>
-                <a:cs typeface="+mn-cs"/>
-              </a:rPr>
-              <a:t>Workshop in Data Science|Team 003| Final Presentation</a:t>
-            </a:r>
-            <a:endParaRPr lang="en-US" sz="1200" kern="1200" dirty="0">
-              <a:solidFill>
-                <a:schemeClr val="tx1">
-                  <a:tint val="75000"/>
-                </a:schemeClr>
-              </a:solidFill>
-              <a:latin typeface="+mn-lt"/>
-              <a:ea typeface="+mn-ea"/>
-              <a:cs typeface="+mn-cs"/>
-            </a:endParaRPr>
-          </a:p>
-        </p:txBody>
-      </p:sp>
-      <p:sp>
-        <p:nvSpPr>
-          <p:cNvPr id="4" name="מציין מיקום של מספר שקופית 3">
-            <a:extLst>
-              <a:ext uri="{FF2B5EF4-FFF2-40B4-BE49-F238E27FC236}">
-                <a16:creationId xmlns:a16="http://schemas.microsoft.com/office/drawing/2014/main" id="{09143A4D-2E2F-BDA0-D95A-A2394C8D08F0}"/>
-              </a:ext>
-            </a:extLst>
-          </p:cNvPr>
-          <p:cNvSpPr>
-            <a:spLocks noGrp="1"/>
-          </p:cNvSpPr>
-          <p:nvPr>
-            <p:ph type="sldNum" sz="quarter" idx="12"/>
-          </p:nvPr>
-        </p:nvSpPr>
-        <p:spPr/>
-        <p:txBody>
-          <a:bodyPr/>
-          <a:lstStyle/>
-          <a:p>
-            <a:fld id="{C1FF6DA9-008F-8B48-92A6-B652298478BF}" type="slidenum">
-              <a:rPr lang="en-US" smtClean="0"/>
-              <a:t>9</a:t>
-            </a:fld>
-            <a:endParaRPr lang="en-US" dirty="0"/>
-          </a:p>
-        </p:txBody>
-      </p:sp>
-      <p:sp>
-        <p:nvSpPr>
-          <p:cNvPr id="5" name="כותרת 4">
-            <a:extLst>
-              <a:ext uri="{FF2B5EF4-FFF2-40B4-BE49-F238E27FC236}">
-                <a16:creationId xmlns:a16="http://schemas.microsoft.com/office/drawing/2014/main" id="{E8AD9766-1F71-7FA3-A074-225F2655BC35}"/>
-              </a:ext>
-            </a:extLst>
-          </p:cNvPr>
-          <p:cNvSpPr>
-            <a:spLocks noGrp="1"/>
-          </p:cNvSpPr>
-          <p:nvPr>
-            <p:ph type="title"/>
-          </p:nvPr>
-        </p:nvSpPr>
-        <p:spPr/>
-        <p:txBody>
-          <a:bodyPr>
-            <a:normAutofit fontScale="90000"/>
-          </a:bodyPr>
-          <a:lstStyle/>
-          <a:p>
-            <a:r>
-              <a:rPr lang="en-US" dirty="0">
-                <a:solidFill>
-                  <a:srgbClr val="0F172A"/>
-                </a:solidFill>
-                <a:ea typeface="Calibri" panose="020F0502020204030204" pitchFamily="34" charset="0"/>
-              </a:rPr>
-              <a:t>Evaluation: the “no cheating” zone (walk-forward)</a:t>
-            </a:r>
-            <a:endParaRPr lang="he-IL" dirty="0"/>
-          </a:p>
-        </p:txBody>
-      </p:sp>
-      <p:sp>
-        <p:nvSpPr>
-          <p:cNvPr id="6" name="Shape 2">
-            <a:extLst>
-              <a:ext uri="{FF2B5EF4-FFF2-40B4-BE49-F238E27FC236}">
-                <a16:creationId xmlns:a16="http://schemas.microsoft.com/office/drawing/2014/main" id="{7395C914-DCEC-7642-7FCF-BCE233A4469F}"/>
-              </a:ext>
-            </a:extLst>
-          </p:cNvPr>
-          <p:cNvSpPr/>
-          <p:nvPr/>
-        </p:nvSpPr>
-        <p:spPr>
-          <a:xfrm>
-            <a:off x="548640" y="1143000"/>
-            <a:ext cx="11094415" cy="5120640"/>
-          </a:xfrm>
-          <a:prstGeom prst="roundRect">
-            <a:avLst/>
-          </a:prstGeom>
-          <a:solidFill>
-            <a:srgbClr val="F8FAFC"/>
-          </a:solidFill>
-          <a:ln w="12700">
-            <a:solidFill>
-              <a:srgbClr val="E2E8F0"/>
-            </a:solidFill>
-            <a:prstDash val="solid"/>
-          </a:ln>
-          <a:effectLst>
-            <a:outerShdw blurRad="38100" dist="12700" dir="2700000" algn="bl" rotWithShape="0">
-              <a:srgbClr val="000000">
-                <a:alpha val="12000"/>
-              </a:srgbClr>
-            </a:outerShdw>
-          </a:effectLst>
-        </p:spPr>
-        <p:txBody>
-          <a:bodyPr/>
-          <a:lstStyle/>
-          <a:p>
-            <a:pPr marL="0" algn="l" defTabSz="914400" rtl="0" eaLnBrk="1" latinLnBrk="0" hangingPunct="1"/>
-            <a:endParaRPr lang="he-IL"/>
-          </a:p>
-        </p:txBody>
-      </p:sp>
-      <p:sp>
-        <p:nvSpPr>
-          <p:cNvPr id="7" name="Text 3">
-            <a:extLst>
-              <a:ext uri="{FF2B5EF4-FFF2-40B4-BE49-F238E27FC236}">
-                <a16:creationId xmlns:a16="http://schemas.microsoft.com/office/drawing/2014/main" id="{41009FAB-BAE2-A5BC-3CC0-0D3DF22D197A}"/>
-              </a:ext>
-            </a:extLst>
-          </p:cNvPr>
-          <p:cNvSpPr/>
-          <p:nvPr/>
-        </p:nvSpPr>
-        <p:spPr>
-          <a:xfrm>
-            <a:off x="1005840" y="1463040"/>
-            <a:ext cx="914400" cy="365760"/>
-          </a:xfrm>
-          <a:prstGeom prst="rect">
-            <a:avLst/>
-          </a:prstGeom>
-          <a:noFill/>
-          <a:ln/>
-        </p:spPr>
-        <p:txBody>
-          <a:bodyPr wrap="square" rtlCol="0" anchor="ctr"/>
-          <a:lstStyle/>
-          <a:p>
-            <a:pPr marL="0" indent="0">
-              <a:buNone/>
-            </a:pPr>
-            <a:r>
-              <a:rPr lang="en-US" sz="1800" b="1" dirty="0">
-                <a:solidFill>
-                  <a:srgbClr val="0F172A"/>
-                </a:solidFill>
-                <a:latin typeface="Calibri" pitchFamily="34" charset="0"/>
-                <a:ea typeface="Calibri" pitchFamily="34" charset="-122"/>
-                <a:cs typeface="Calibri" pitchFamily="34" charset="-120"/>
-              </a:rPr>
-              <a:t>Why?</a:t>
-            </a:r>
-            <a:endParaRPr lang="en-US" sz="1800" dirty="0"/>
-          </a:p>
-        </p:txBody>
-      </p:sp>
-      <p:sp>
-        <p:nvSpPr>
-          <p:cNvPr id="8" name="Text 4">
-            <a:extLst>
-              <a:ext uri="{FF2B5EF4-FFF2-40B4-BE49-F238E27FC236}">
-                <a16:creationId xmlns:a16="http://schemas.microsoft.com/office/drawing/2014/main" id="{80B39BD6-AD6A-54B0-92BC-8B96ECEA70F9}"/>
-              </a:ext>
-            </a:extLst>
-          </p:cNvPr>
-          <p:cNvSpPr/>
-          <p:nvPr/>
-        </p:nvSpPr>
-        <p:spPr>
-          <a:xfrm>
-            <a:off x="-1295400" y="1508760"/>
-            <a:ext cx="9875520" cy="365760"/>
-          </a:xfrm>
-          <a:prstGeom prst="rect">
-            <a:avLst/>
-          </a:prstGeom>
-          <a:noFill/>
-          <a:ln/>
-        </p:spPr>
-        <p:txBody>
-          <a:bodyPr wrap="square" rtlCol="0" anchor="ctr"/>
-          <a:lstStyle/>
-          <a:p>
-            <a:pPr marL="0" indent="0">
-              <a:buNone/>
-            </a:pPr>
-            <a:r>
-              <a:rPr lang="en-US" sz="1600" dirty="0">
-                <a:solidFill>
-                  <a:srgbClr val="64748B"/>
-                </a:solidFill>
-                <a:latin typeface="Calibri" pitchFamily="34" charset="0"/>
-                <a:ea typeface="Calibri" pitchFamily="34" charset="-122"/>
-                <a:cs typeface="Calibri" pitchFamily="34" charset="-120"/>
-              </a:rPr>
-              <a:t>Random splits leak future information in time-series.</a:t>
-            </a:r>
-            <a:endParaRPr lang="en-US" sz="1600" dirty="0"/>
-          </a:p>
-        </p:txBody>
-      </p:sp>
-      <p:sp>
-        <p:nvSpPr>
-          <p:cNvPr id="9" name="Text 5">
-            <a:extLst>
-              <a:ext uri="{FF2B5EF4-FFF2-40B4-BE49-F238E27FC236}">
-                <a16:creationId xmlns:a16="http://schemas.microsoft.com/office/drawing/2014/main" id="{8C7247B7-4D8A-D2A2-8EA8-03F9A3E92754}"/>
-              </a:ext>
-            </a:extLst>
-          </p:cNvPr>
-          <p:cNvSpPr/>
-          <p:nvPr/>
-        </p:nvSpPr>
-        <p:spPr>
-          <a:xfrm>
-            <a:off x="1097280" y="1920240"/>
-            <a:ext cx="914400" cy="228600"/>
-          </a:xfrm>
-          <a:prstGeom prst="rect">
-            <a:avLst/>
-          </a:prstGeom>
-          <a:noFill/>
-          <a:ln/>
-        </p:spPr>
-        <p:txBody>
-          <a:bodyPr wrap="square" rtlCol="0" anchor="ctr"/>
-          <a:lstStyle/>
-          <a:p>
-            <a:pPr marL="0" indent="0">
-              <a:buNone/>
-            </a:pPr>
-            <a:r>
-              <a:rPr lang="en-US" sz="1400" dirty="0">
-                <a:solidFill>
-                  <a:srgbClr val="64748B"/>
-                </a:solidFill>
-                <a:latin typeface="Calibri" pitchFamily="34" charset="0"/>
-                <a:ea typeface="Calibri" pitchFamily="34" charset="-122"/>
-                <a:cs typeface="Calibri" pitchFamily="34" charset="-120"/>
-              </a:rPr>
-              <a:t>Fold 1</a:t>
-            </a:r>
-            <a:endParaRPr lang="en-US" sz="1400" dirty="0"/>
-          </a:p>
-        </p:txBody>
-      </p:sp>
-      <p:sp>
-        <p:nvSpPr>
-          <p:cNvPr id="10" name="Shape 6">
-            <a:extLst>
-              <a:ext uri="{FF2B5EF4-FFF2-40B4-BE49-F238E27FC236}">
-                <a16:creationId xmlns:a16="http://schemas.microsoft.com/office/drawing/2014/main" id="{A3A7400D-E752-357F-A59D-360A7DAB60BA}"/>
-              </a:ext>
-            </a:extLst>
-          </p:cNvPr>
-          <p:cNvSpPr/>
-          <p:nvPr/>
-        </p:nvSpPr>
-        <p:spPr>
-          <a:xfrm>
-            <a:off x="1097280" y="2240280"/>
-            <a:ext cx="6248210" cy="640080"/>
-          </a:xfrm>
-          <a:prstGeom prst="roundRect">
-            <a:avLst/>
-          </a:prstGeom>
-          <a:solidFill>
-            <a:srgbClr val="E0F2FE"/>
-          </a:solidFill>
-          <a:ln w="12700">
-            <a:solidFill>
-              <a:srgbClr val="E2E8F0"/>
-            </a:solidFill>
-            <a:prstDash val="solid"/>
-          </a:ln>
-        </p:spPr>
-        <p:txBody>
-          <a:bodyPr/>
-          <a:lstStyle/>
-          <a:p>
-            <a:endParaRPr lang="he-IL"/>
-          </a:p>
-        </p:txBody>
-      </p:sp>
-      <p:sp>
-        <p:nvSpPr>
-          <p:cNvPr id="11" name="Text 7">
-            <a:extLst>
-              <a:ext uri="{FF2B5EF4-FFF2-40B4-BE49-F238E27FC236}">
-                <a16:creationId xmlns:a16="http://schemas.microsoft.com/office/drawing/2014/main" id="{744A36C1-B7FF-CA12-7691-523D1ADDBF3B}"/>
-              </a:ext>
-            </a:extLst>
-          </p:cNvPr>
-          <p:cNvSpPr/>
-          <p:nvPr/>
-        </p:nvSpPr>
-        <p:spPr>
-          <a:xfrm>
-            <a:off x="1097280" y="2404872"/>
-            <a:ext cx="6248210" cy="640080"/>
-          </a:xfrm>
-          <a:prstGeom prst="rect">
-            <a:avLst/>
-          </a:prstGeom>
-          <a:noFill/>
-          <a:ln/>
-        </p:spPr>
-        <p:txBody>
-          <a:bodyPr wrap="square" rtlCol="0" anchor="ctr"/>
-          <a:lstStyle/>
-          <a:p>
-            <a:pPr marL="0" indent="0" algn="ctr">
-              <a:buNone/>
-            </a:pPr>
-            <a:r>
-              <a:rPr lang="en-US" sz="1200" dirty="0">
-                <a:solidFill>
-                  <a:srgbClr val="0F172A"/>
-                </a:solidFill>
-                <a:latin typeface="Calibri" pitchFamily="34" charset="0"/>
-                <a:ea typeface="Calibri" pitchFamily="34" charset="-122"/>
-                <a:cs typeface="Calibri" pitchFamily="34" charset="-120"/>
-              </a:rPr>
-              <a:t>Train</a:t>
-            </a:r>
-            <a:endParaRPr lang="en-US" sz="1200" dirty="0"/>
-          </a:p>
-        </p:txBody>
-      </p:sp>
-      <p:sp>
-        <p:nvSpPr>
-          <p:cNvPr id="12" name="Shape 8">
-            <a:extLst>
-              <a:ext uri="{FF2B5EF4-FFF2-40B4-BE49-F238E27FC236}">
-                <a16:creationId xmlns:a16="http://schemas.microsoft.com/office/drawing/2014/main" id="{AA8139F8-8F0F-D586-C4CC-351E9055AB7C}"/>
-              </a:ext>
-            </a:extLst>
-          </p:cNvPr>
-          <p:cNvSpPr/>
-          <p:nvPr/>
-        </p:nvSpPr>
-        <p:spPr>
-          <a:xfrm>
-            <a:off x="7512108" y="2240280"/>
-            <a:ext cx="1666189" cy="640080"/>
-          </a:xfrm>
-          <a:prstGeom prst="roundRect">
-            <a:avLst/>
-          </a:prstGeom>
-          <a:solidFill>
-            <a:srgbClr val="DCFCE7"/>
-          </a:solidFill>
-          <a:ln w="12700">
-            <a:solidFill>
-              <a:srgbClr val="E2E8F0"/>
-            </a:solidFill>
-            <a:prstDash val="solid"/>
-          </a:ln>
-        </p:spPr>
-        <p:txBody>
-          <a:bodyPr/>
-          <a:lstStyle/>
-          <a:p>
-            <a:endParaRPr lang="he-IL"/>
-          </a:p>
-        </p:txBody>
-      </p:sp>
-      <p:sp>
-        <p:nvSpPr>
-          <p:cNvPr id="13" name="Text 9">
-            <a:extLst>
-              <a:ext uri="{FF2B5EF4-FFF2-40B4-BE49-F238E27FC236}">
-                <a16:creationId xmlns:a16="http://schemas.microsoft.com/office/drawing/2014/main" id="{2F89F957-3985-D5B0-BBDB-56F4AA19EDC4}"/>
-              </a:ext>
-            </a:extLst>
-          </p:cNvPr>
-          <p:cNvSpPr/>
-          <p:nvPr/>
-        </p:nvSpPr>
-        <p:spPr>
-          <a:xfrm>
-            <a:off x="7512108" y="2404872"/>
-            <a:ext cx="1666189" cy="640080"/>
-          </a:xfrm>
-          <a:prstGeom prst="rect">
-            <a:avLst/>
-          </a:prstGeom>
-          <a:noFill/>
-          <a:ln/>
-        </p:spPr>
-        <p:txBody>
-          <a:bodyPr wrap="square" rtlCol="0" anchor="ctr"/>
-          <a:lstStyle/>
-          <a:p>
-            <a:pPr marL="0" indent="0" algn="ctr">
-              <a:buNone/>
-            </a:pPr>
-            <a:r>
-              <a:rPr lang="en-US" sz="1200" dirty="0">
-                <a:solidFill>
-                  <a:srgbClr val="0F172A"/>
-                </a:solidFill>
-                <a:latin typeface="Calibri" pitchFamily="34" charset="0"/>
-                <a:ea typeface="Calibri" pitchFamily="34" charset="-122"/>
-                <a:cs typeface="Calibri" pitchFamily="34" charset="-120"/>
-              </a:rPr>
-              <a:t>Test</a:t>
-            </a:r>
-            <a:endParaRPr lang="en-US" sz="1200" dirty="0"/>
-          </a:p>
-        </p:txBody>
-      </p:sp>
-      <p:sp>
-        <p:nvSpPr>
-          <p:cNvPr id="14" name="Shape 10">
-            <a:extLst>
-              <a:ext uri="{FF2B5EF4-FFF2-40B4-BE49-F238E27FC236}">
-                <a16:creationId xmlns:a16="http://schemas.microsoft.com/office/drawing/2014/main" id="{A52DE199-868A-BA98-351F-2F8F36C9074A}"/>
-              </a:ext>
-            </a:extLst>
-          </p:cNvPr>
-          <p:cNvSpPr/>
-          <p:nvPr/>
-        </p:nvSpPr>
-        <p:spPr>
-          <a:xfrm>
-            <a:off x="9344917" y="2240280"/>
-            <a:ext cx="1749499" cy="640080"/>
-          </a:xfrm>
-          <a:prstGeom prst="roundRect">
-            <a:avLst/>
-          </a:prstGeom>
-          <a:solidFill>
-            <a:srgbClr val="F1F5F9"/>
-          </a:solidFill>
-          <a:ln w="12700">
-            <a:solidFill>
-              <a:srgbClr val="E2E8F0"/>
-            </a:solidFill>
-            <a:prstDash val="solid"/>
-          </a:ln>
-        </p:spPr>
-        <p:txBody>
-          <a:bodyPr/>
-          <a:lstStyle/>
-          <a:p>
-            <a:endParaRPr lang="he-IL"/>
-          </a:p>
-        </p:txBody>
-      </p:sp>
-      <p:sp>
-        <p:nvSpPr>
-          <p:cNvPr id="15" name="Text 11">
-            <a:extLst>
-              <a:ext uri="{FF2B5EF4-FFF2-40B4-BE49-F238E27FC236}">
-                <a16:creationId xmlns:a16="http://schemas.microsoft.com/office/drawing/2014/main" id="{1C98A923-38CA-10D6-02B4-D6CE7AFB7DC7}"/>
-              </a:ext>
-            </a:extLst>
-          </p:cNvPr>
-          <p:cNvSpPr/>
-          <p:nvPr/>
-        </p:nvSpPr>
-        <p:spPr>
-          <a:xfrm>
-            <a:off x="9344917" y="2404872"/>
-            <a:ext cx="1749499" cy="640080"/>
-          </a:xfrm>
-          <a:prstGeom prst="rect">
-            <a:avLst/>
-          </a:prstGeom>
-          <a:noFill/>
-          <a:ln/>
-        </p:spPr>
-        <p:txBody>
-          <a:bodyPr wrap="square" rtlCol="0" anchor="ctr"/>
-          <a:lstStyle/>
-          <a:p>
-            <a:pPr marL="0" indent="0" algn="ctr">
-              <a:buNone/>
-            </a:pPr>
-            <a:r>
-              <a:rPr lang="en-US" sz="1200" dirty="0">
-                <a:solidFill>
-                  <a:srgbClr val="64748B"/>
-                </a:solidFill>
-                <a:latin typeface="Calibri" pitchFamily="34" charset="0"/>
-                <a:ea typeface="Calibri" pitchFamily="34" charset="-122"/>
-                <a:cs typeface="Calibri" pitchFamily="34" charset="-120"/>
-              </a:rPr>
-              <a:t>Future</a:t>
-            </a:r>
-            <a:endParaRPr lang="en-US" sz="1200" dirty="0"/>
-          </a:p>
-        </p:txBody>
-      </p:sp>
-      <p:sp>
-        <p:nvSpPr>
-          <p:cNvPr id="16" name="Text 12">
-            <a:extLst>
-              <a:ext uri="{FF2B5EF4-FFF2-40B4-BE49-F238E27FC236}">
-                <a16:creationId xmlns:a16="http://schemas.microsoft.com/office/drawing/2014/main" id="{5E6F795C-8545-1CF8-FC68-795A246A997C}"/>
-              </a:ext>
-            </a:extLst>
-          </p:cNvPr>
-          <p:cNvSpPr/>
-          <p:nvPr/>
-        </p:nvSpPr>
-        <p:spPr>
-          <a:xfrm>
-            <a:off x="1097280" y="2971800"/>
-            <a:ext cx="2286000" cy="228600"/>
-          </a:xfrm>
-          <a:prstGeom prst="rect">
-            <a:avLst/>
-          </a:prstGeom>
-          <a:noFill/>
-          <a:ln/>
-        </p:spPr>
-        <p:txBody>
-          <a:bodyPr wrap="square" rtlCol="0" anchor="ctr"/>
-          <a:lstStyle/>
-          <a:p>
-            <a:pPr marL="0" indent="0">
-              <a:buNone/>
-            </a:pPr>
-            <a:r>
-              <a:rPr lang="en-US" sz="1400" dirty="0">
-                <a:solidFill>
-                  <a:srgbClr val="64748B"/>
-                </a:solidFill>
-                <a:latin typeface="Calibri" pitchFamily="34" charset="0"/>
-                <a:ea typeface="Calibri" pitchFamily="34" charset="-122"/>
-                <a:cs typeface="Calibri" pitchFamily="34" charset="-120"/>
-              </a:rPr>
-              <a:t>Fold 2 (expands)</a:t>
-            </a:r>
-            <a:endParaRPr lang="en-US" sz="1400" dirty="0"/>
-          </a:p>
-        </p:txBody>
-      </p:sp>
-      <p:sp>
-        <p:nvSpPr>
-          <p:cNvPr id="17" name="Shape 13">
-            <a:extLst>
-              <a:ext uri="{FF2B5EF4-FFF2-40B4-BE49-F238E27FC236}">
-                <a16:creationId xmlns:a16="http://schemas.microsoft.com/office/drawing/2014/main" id="{8B8F2F8C-D1B4-24E2-8CA2-F16A195B1B2C}"/>
-              </a:ext>
-            </a:extLst>
-          </p:cNvPr>
-          <p:cNvSpPr/>
-          <p:nvPr/>
-        </p:nvSpPr>
-        <p:spPr>
-          <a:xfrm>
-            <a:off x="1097280" y="3291840"/>
-            <a:ext cx="7914399" cy="640080"/>
-          </a:xfrm>
-          <a:prstGeom prst="roundRect">
-            <a:avLst/>
-          </a:prstGeom>
-          <a:solidFill>
-            <a:srgbClr val="E0F2FE"/>
-          </a:solidFill>
-          <a:ln w="12700">
-            <a:solidFill>
-              <a:srgbClr val="E2E8F0"/>
-            </a:solidFill>
-            <a:prstDash val="solid"/>
-          </a:ln>
-        </p:spPr>
-        <p:txBody>
-          <a:bodyPr/>
-          <a:lstStyle/>
-          <a:p>
-            <a:endParaRPr lang="he-IL"/>
-          </a:p>
-        </p:txBody>
-      </p:sp>
-      <p:sp>
-        <p:nvSpPr>
-          <p:cNvPr id="18" name="Text 14">
-            <a:extLst>
-              <a:ext uri="{FF2B5EF4-FFF2-40B4-BE49-F238E27FC236}">
-                <a16:creationId xmlns:a16="http://schemas.microsoft.com/office/drawing/2014/main" id="{F16C4ED2-CCC6-340C-02D1-7F0DF5DD5232}"/>
-              </a:ext>
-            </a:extLst>
-          </p:cNvPr>
-          <p:cNvSpPr/>
-          <p:nvPr/>
-        </p:nvSpPr>
-        <p:spPr>
-          <a:xfrm>
-            <a:off x="1097280" y="3456432"/>
-            <a:ext cx="7914399" cy="640080"/>
-          </a:xfrm>
-          <a:prstGeom prst="rect">
-            <a:avLst/>
-          </a:prstGeom>
-          <a:noFill/>
-          <a:ln/>
-        </p:spPr>
-        <p:txBody>
-          <a:bodyPr wrap="square" rtlCol="0" anchor="ctr"/>
-          <a:lstStyle/>
-          <a:p>
-            <a:pPr marL="0" indent="0" algn="ctr">
-              <a:buNone/>
-            </a:pPr>
-            <a:r>
-              <a:rPr lang="en-US" sz="1200" dirty="0">
-                <a:solidFill>
-                  <a:srgbClr val="0F172A"/>
-                </a:solidFill>
-                <a:latin typeface="Calibri" pitchFamily="34" charset="0"/>
-                <a:ea typeface="Calibri" pitchFamily="34" charset="-122"/>
-                <a:cs typeface="Calibri" pitchFamily="34" charset="-120"/>
-              </a:rPr>
-              <a:t>Train</a:t>
-            </a:r>
-            <a:endParaRPr lang="en-US" sz="1200" dirty="0"/>
-          </a:p>
-        </p:txBody>
-      </p:sp>
-      <p:sp>
-        <p:nvSpPr>
-          <p:cNvPr id="19" name="Shape 15">
-            <a:extLst>
-              <a:ext uri="{FF2B5EF4-FFF2-40B4-BE49-F238E27FC236}">
-                <a16:creationId xmlns:a16="http://schemas.microsoft.com/office/drawing/2014/main" id="{DAEC530B-A739-4280-6E24-856391423735}"/>
-              </a:ext>
-            </a:extLst>
-          </p:cNvPr>
-          <p:cNvSpPr/>
-          <p:nvPr/>
-        </p:nvSpPr>
-        <p:spPr>
-          <a:xfrm>
-            <a:off x="9178298" y="3291840"/>
-            <a:ext cx="1666189" cy="640080"/>
-          </a:xfrm>
-          <a:prstGeom prst="roundRect">
-            <a:avLst/>
-          </a:prstGeom>
-          <a:solidFill>
-            <a:srgbClr val="DCFCE7"/>
-          </a:solidFill>
-          <a:ln w="12700">
-            <a:solidFill>
-              <a:srgbClr val="E2E8F0"/>
-            </a:solidFill>
-            <a:prstDash val="solid"/>
-          </a:ln>
-        </p:spPr>
-        <p:txBody>
-          <a:bodyPr/>
-          <a:lstStyle/>
-          <a:p>
-            <a:endParaRPr lang="he-IL"/>
-          </a:p>
-        </p:txBody>
-      </p:sp>
-      <p:sp>
-        <p:nvSpPr>
-          <p:cNvPr id="20" name="Text 16">
-            <a:extLst>
-              <a:ext uri="{FF2B5EF4-FFF2-40B4-BE49-F238E27FC236}">
-                <a16:creationId xmlns:a16="http://schemas.microsoft.com/office/drawing/2014/main" id="{4F9B4E87-AEC4-D03F-0B02-0BE874F6FCAA}"/>
-              </a:ext>
-            </a:extLst>
-          </p:cNvPr>
-          <p:cNvSpPr/>
-          <p:nvPr/>
-        </p:nvSpPr>
-        <p:spPr>
-          <a:xfrm>
-            <a:off x="9178298" y="3456432"/>
-            <a:ext cx="1666189" cy="640080"/>
-          </a:xfrm>
-          <a:prstGeom prst="rect">
-            <a:avLst/>
-          </a:prstGeom>
-          <a:noFill/>
-          <a:ln/>
-        </p:spPr>
-        <p:txBody>
-          <a:bodyPr wrap="square" rtlCol="0" anchor="ctr"/>
-          <a:lstStyle/>
-          <a:p>
-            <a:pPr marL="0" indent="0" algn="ctr">
-              <a:buNone/>
-            </a:pPr>
-            <a:r>
-              <a:rPr lang="en-US" sz="1200" dirty="0">
-                <a:solidFill>
-                  <a:srgbClr val="0F172A"/>
-                </a:solidFill>
-                <a:latin typeface="Calibri" pitchFamily="34" charset="0"/>
-                <a:ea typeface="Calibri" pitchFamily="34" charset="-122"/>
-                <a:cs typeface="Calibri" pitchFamily="34" charset="-120"/>
-              </a:rPr>
-              <a:t>Test</a:t>
-            </a:r>
-            <a:endParaRPr lang="en-US" sz="1200" dirty="0"/>
-          </a:p>
-        </p:txBody>
-      </p:sp>
-      <p:sp>
-        <p:nvSpPr>
-          <p:cNvPr id="21" name="Text 17">
-            <a:extLst>
-              <a:ext uri="{FF2B5EF4-FFF2-40B4-BE49-F238E27FC236}">
-                <a16:creationId xmlns:a16="http://schemas.microsoft.com/office/drawing/2014/main" id="{C2FF5DB4-343A-D949-FAE3-9D44E0D1BBC7}"/>
-              </a:ext>
-            </a:extLst>
-          </p:cNvPr>
-          <p:cNvSpPr/>
-          <p:nvPr/>
-        </p:nvSpPr>
-        <p:spPr>
-          <a:xfrm>
-            <a:off x="1097280" y="4251960"/>
-            <a:ext cx="9997135" cy="365760"/>
-          </a:xfrm>
-          <a:prstGeom prst="rect">
-            <a:avLst/>
-          </a:prstGeom>
-          <a:noFill/>
-          <a:ln/>
-        </p:spPr>
-        <p:txBody>
-          <a:bodyPr wrap="square" rtlCol="0" anchor="ctr"/>
-          <a:lstStyle/>
-          <a:p>
-            <a:pPr marL="0" indent="0" algn="l" rtl="0">
-              <a:buNone/>
-            </a:pPr>
-            <a:r>
-              <a:rPr lang="en-US" sz="1600" dirty="0">
-                <a:solidFill>
-                  <a:srgbClr val="0F172A"/>
-                </a:solidFill>
-                <a:latin typeface="Calibri" pitchFamily="34" charset="0"/>
-                <a:ea typeface="Calibri" pitchFamily="34" charset="-122"/>
-                <a:cs typeface="Calibri" pitchFamily="34" charset="-120"/>
-              </a:rPr>
-              <a:t>This mimics real deployment: train on past → predict immediate future.</a:t>
-            </a:r>
-            <a:endParaRPr lang="en-US" sz="1600" dirty="0"/>
-          </a:p>
-        </p:txBody>
-      </p:sp>
-      <p:sp>
-        <p:nvSpPr>
-          <p:cNvPr id="22" name="Text 18">
-            <a:extLst>
-              <a:ext uri="{FF2B5EF4-FFF2-40B4-BE49-F238E27FC236}">
-                <a16:creationId xmlns:a16="http://schemas.microsoft.com/office/drawing/2014/main" id="{75F89760-00D1-F28D-DF19-CBFF5BD911B2}"/>
-              </a:ext>
-            </a:extLst>
-          </p:cNvPr>
-          <p:cNvSpPr/>
-          <p:nvPr/>
-        </p:nvSpPr>
-        <p:spPr>
-          <a:xfrm>
-            <a:off x="1097280" y="4617720"/>
-            <a:ext cx="9997135" cy="320040"/>
-          </a:xfrm>
-          <a:prstGeom prst="rect">
-            <a:avLst/>
-          </a:prstGeom>
-          <a:noFill/>
-          <a:ln/>
-        </p:spPr>
-        <p:txBody>
-          <a:bodyPr wrap="square" rtlCol="0" anchor="ctr"/>
-          <a:lstStyle/>
-          <a:p>
-            <a:pPr marL="0" indent="0" algn="l" rtl="0">
-              <a:buNone/>
-            </a:pPr>
-            <a:r>
-              <a:rPr lang="en-US" sz="1400" dirty="0">
-                <a:solidFill>
-                  <a:srgbClr val="64748B"/>
-                </a:solidFill>
-                <a:latin typeface="Calibri" pitchFamily="34" charset="0"/>
-                <a:ea typeface="Calibri" pitchFamily="34" charset="-122"/>
-                <a:cs typeface="Calibri" pitchFamily="34" charset="-120"/>
-              </a:rPr>
-              <a:t>We aggregate results across folds (mean ± std) to assess stability.</a:t>
-            </a:r>
-            <a:endParaRPr lang="en-US" sz="1400" dirty="0"/>
-          </a:p>
-        </p:txBody>
-      </p:sp>
-    </p:spTree>
-    <p:extLst>
-      <p:ext uri="{BB962C8B-B14F-4D97-AF65-F5344CB8AC3E}">
-        <p14:creationId xmlns:p14="http://schemas.microsoft.com/office/powerpoint/2010/main" val="4011506032"/>
       </p:ext>
     </p:extLst>
   </p:cSld>
